--- a/docs/presentation/RTK-CRM-LCT2026.pptx
+++ b/docs/presentation/RTK-CRM-LCT2026.pptx
@@ -5954,7 +5954,7 @@
                 </a:solidFill>
                 <a:latin typeface="Montserrat"/>
               </a:rPr>
-              <a:t>•  PostgreSQL для production</a:t>
+              <a:t>•  PostgreSQL (Managed или контейнер)</a:t>
             </a:r>
           </a:p>
           <a:p>
@@ -5973,7 +5973,7 @@
                 </a:solidFill>
                 <a:latin typeface="Montserrat"/>
               </a:rPr>
-              <a:t>•  SQLite для локального запуска</a:t>
+              <a:t>•  Yandex Object Storage для файлов</a:t>
             </a:r>
           </a:p>
           <a:p>
@@ -5992,7 +5992,7 @@
                 </a:solidFill>
                 <a:latin typeface="Montserrat"/>
               </a:rPr>
-              <a:t>•  Docker Compose и Nginx</a:t>
+              <a:t>•  KeyDB для кэша, Docker Compose, Nginx</a:t>
             </a:r>
           </a:p>
         </p:txBody>
@@ -11314,7 +11314,7 @@
                 </a:solidFill>
                 <a:latin typeface="Montserrat"/>
               </a:rPr>
-              <a:t>Демо: rtk-crm-nx4r.vercel.app</a:t>
+              <a:t>Демо: Yandex Cloud (ВМ с nginx)</a:t>
             </a:r>
           </a:p>
         </p:txBody>
@@ -11394,7 +11394,7 @@
                 </a:solidFill>
                 <a:latin typeface="Montserrat"/>
               </a:rPr>
-              <a:t>API: rtk-crm-backend.onrender.com</a:t>
+              <a:t>API: https://&lt;домен&gt;/api</a:t>
             </a:r>
           </a:p>
         </p:txBody>

--- a/docs/presentation/RTK-CRM-LCT2026.pptx
+++ b/docs/presentation/RTK-CRM-LCT2026.pptx
@@ -2388,7 +2388,7 @@
                 </a:solidFill>
                 <a:latin typeface="Montserrat"/>
               </a:rPr>
-              <a:t>React 18 + TypeScript + Ant Design на клиенте; FastAPI, SQLAlchemy 2 (async), PostgreSQL и JWT на сервере. Ролевой доступ и audit log для изменяющих операций.</a:t>
+              <a:t>React 18 + TypeScript + Ant Design на клиенте; FastAPI, SQLAlchemy 2 (async), PostgreSQL и JWT на сервере. Вход через Keycloak (Code Flow + PKCE) или локальный JWT. Ролевой доступ и audit log для изменяющих операций.</a:t>
             </a:r>
           </a:p>
         </p:txBody>
@@ -3373,7 +3373,7 @@
                 </a:solidFill>
                 <a:latin typeface="Montserrat"/>
               </a:rPr>
-              <a:t>•  Ключевые показатели и распределение по этапам</a:t>
+              <a:t>•  Интеграция с LMS и CMS: dry-run и импорт</a:t>
             </a:r>
           </a:p>
           <a:p>
@@ -5639,8 +5639,8 @@
         </p:nvSpPr>
         <p:spPr>
           <a:xfrm>
-            <a:off x="822960" y="1847088"/>
-            <a:ext cx="2843784" cy="548640"/>
+            <a:off x="822960" y="1600200"/>
+            <a:ext cx="4992624" cy="457200"/>
           </a:xfrm>
           <a:prstGeom prst="rect">
             <a:avLst/>
@@ -5681,8 +5681,8 @@
         </p:nvSpPr>
         <p:spPr>
           <a:xfrm>
-            <a:off x="822960" y="2487168"/>
-            <a:ext cx="2843784" cy="3291840"/>
+            <a:off x="822960" y="2148840"/>
+            <a:ext cx="4992624" cy="1371600"/>
           </a:xfrm>
           <a:prstGeom prst="rect">
             <a:avLst/>
@@ -5761,8 +5761,8 @@
         </p:nvSpPr>
         <p:spPr>
           <a:xfrm>
-            <a:off x="4617720" y="1847088"/>
-            <a:ext cx="2999232" cy="548640"/>
+            <a:off x="6373368" y="1600200"/>
+            <a:ext cx="4992624" cy="457200"/>
           </a:xfrm>
           <a:prstGeom prst="rect">
             <a:avLst/>
@@ -5803,8 +5803,8 @@
         </p:nvSpPr>
         <p:spPr>
           <a:xfrm>
-            <a:off x="4617720" y="2487168"/>
-            <a:ext cx="2999232" cy="3291840"/>
+            <a:off x="6373368" y="2148840"/>
+            <a:ext cx="4992624" cy="1371600"/>
           </a:xfrm>
           <a:prstGeom prst="rect">
             <a:avLst/>
@@ -5883,8 +5883,8 @@
         </p:nvSpPr>
         <p:spPr>
           <a:xfrm>
-            <a:off x="8567928" y="1847088"/>
-            <a:ext cx="2843784" cy="548640"/>
+            <a:off x="822960" y="3657600"/>
+            <a:ext cx="4992624" cy="457200"/>
           </a:xfrm>
           <a:prstGeom prst="rect">
             <a:avLst/>
@@ -5925,8 +5925,8 @@
         </p:nvSpPr>
         <p:spPr>
           <a:xfrm>
-            <a:off x="8567928" y="2487168"/>
-            <a:ext cx="2843784" cy="3291840"/>
+            <a:off x="822960" y="4206240"/>
+            <a:ext cx="4992624" cy="1371600"/>
           </a:xfrm>
           <a:prstGeom prst="rect">
             <a:avLst/>
@@ -5993,6 +5993,128 @@
                 <a:latin typeface="Montserrat"/>
               </a:rPr>
               <a:t>•  KeyDB для кэша, Docker Compose, Nginx</a:t>
+            </a:r>
+          </a:p>
+        </p:txBody>
+      </p:sp>
+      <p:sp>
+        <p:nvSpPr>
+          <p:cNvPr id="18" name="TextBox 17"/>
+          <p:cNvSpPr txBox="1"/>
+          <p:nvPr/>
+        </p:nvSpPr>
+        <p:spPr>
+          <a:xfrm>
+            <a:off x="6373368" y="3657600"/>
+            <a:ext cx="4992624" cy="457200"/>
+          </a:xfrm>
+          <a:prstGeom prst="rect">
+            <a:avLst/>
+          </a:prstGeom>
+          <a:noFill/>
+        </p:spPr>
+        <p:txBody>
+          <a:bodyPr wrap="square">
+            <a:spAutoFit/>
+          </a:bodyPr>
+          <a:lstStyle/>
+          <a:p>
+            <a:pPr algn="l">
+              <a:lnSpc>
+                <a:spcPct val="112000"/>
+              </a:lnSpc>
+              <a:spcAft>
+                <a:spcPts val="0"/>
+              </a:spcAft>
+            </a:pPr>
+            <a:r>
+              <a:rPr sz="1500" b="1">
+                <a:solidFill>
+                  <a:srgbClr val="520978"/>
+                </a:solidFill>
+                <a:latin typeface="Montserrat"/>
+              </a:rPr>
+              <a:t>Интеграции и защита</a:t>
+            </a:r>
+          </a:p>
+        </p:txBody>
+      </p:sp>
+      <p:sp>
+        <p:nvSpPr>
+          <p:cNvPr id="19" name="TextBox 18"/>
+          <p:cNvSpPr txBox="1"/>
+          <p:nvPr/>
+        </p:nvSpPr>
+        <p:spPr>
+          <a:xfrm>
+            <a:off x="6373368" y="4206240"/>
+            <a:ext cx="4992624" cy="1371600"/>
+          </a:xfrm>
+          <a:prstGeom prst="rect">
+            <a:avLst/>
+          </a:prstGeom>
+          <a:noFill/>
+        </p:spPr>
+        <p:txBody>
+          <a:bodyPr wrap="square">
+            <a:spAutoFit/>
+          </a:bodyPr>
+          <a:lstStyle/>
+          <a:p>
+            <a:pPr algn="l">
+              <a:lnSpc>
+                <a:spcPct val="112000"/>
+              </a:lnSpc>
+              <a:spcAft>
+                <a:spcPts val="1000"/>
+              </a:spcAft>
+            </a:pPr>
+            <a:r>
+              <a:rPr sz="1150" b="0">
+                <a:solidFill>
+                  <a:srgbClr val="1C1D22"/>
+                </a:solidFill>
+                <a:latin typeface="Montserrat"/>
+              </a:rPr>
+              <a:t>•  Keycloak: Code Flow + PKCE, RS256</a:t>
+            </a:r>
+          </a:p>
+          <a:p>
+            <a:pPr algn="l">
+              <a:lnSpc>
+                <a:spcPct val="112000"/>
+              </a:lnSpc>
+              <a:spcAft>
+                <a:spcPts val="1000"/>
+              </a:spcAft>
+            </a:pPr>
+            <a:r>
+              <a:rPr sz="1150" b="0">
+                <a:solidFill>
+                  <a:srgbClr val="1C1D22"/>
+                </a:solidFill>
+                <a:latin typeface="Montserrat"/>
+              </a:rPr>
+              <a:t>•  LMS и CMS: контракт обмена, dry-run</a:t>
+            </a:r>
+          </a:p>
+          <a:p>
+            <a:pPr algn="l">
+              <a:lnSpc>
+                <a:spcPct val="112000"/>
+              </a:lnSpc>
+              <a:spcAft>
+                <a:spcPts val="1000"/>
+              </a:spcAft>
+            </a:pPr>
+            <a:r>
+              <a:rPr sz="1150" b="0">
+                <a:solidFill>
+                  <a:srgbClr val="1C1D22"/>
+                </a:solidFill>
+                <a:latin typeface="Montserrat"/>
+              </a:rPr>
+              <a:t>•  GigaChat: сводка по взаимодействию</a:t>
             </a:r>
           </a:p>
         </p:txBody>
@@ -11217,7 +11339,7 @@
       </p:pic>
       <p:pic>
         <p:nvPicPr>
-          <p:cNvPr id="33" name="Picture 32" descr="07-reports.png"/>
+          <p:cNvPr id="33" name="Picture 32" descr="11-integration.png"/>
           <p:cNvPicPr>
             <a:picLocks noChangeAspect="1"/>
           </p:cNvPicPr>
@@ -11356,7 +11478,7 @@
                 </a:solidFill>
                 <a:latin typeface="Montserrat"/>
               </a:rPr>
-              <a:t>Отчёты и экспорт</a:t>
+              <a:t>Интеграция с LMS и CMS</a:t>
             </a:r>
           </a:p>
           <a:p>
@@ -11375,7 +11497,7 @@
                 </a:solidFill>
                 <a:latin typeface="Montserrat"/>
               </a:rPr>
-              <a:t>Ключевые показатели, распределение по этапам и выгрузка в XLSX, XLS, PDF и JSON с учётом выбранной воронки.</a:t>
+              <a:t>Контракт обмена, предпросмотр пакета без записи (dry-run) и идемпотентный импорт по номеру договора. Отчёты выгружаются в XLSX, XLS, PDF и JSON.</a:t>
             </a:r>
           </a:p>
           <a:p>

--- a/docs/presentation/RTK-CRM-LCT2026.pptx
+++ b/docs/presentation/RTK-CRM-LCT2026.pptx
@@ -11436,7 +11436,7 @@
                 </a:solidFill>
                 <a:latin typeface="Montserrat"/>
               </a:rPr>
-              <a:t>Демо: Yandex Cloud (ВМ с nginx)</a:t>
+              <a:t>Демо: https://crm-rtk.pixel-minds.ru</a:t>
             </a:r>
           </a:p>
         </p:txBody>
@@ -11516,7 +11516,7 @@
                 </a:solidFill>
                 <a:latin typeface="Montserrat"/>
               </a:rPr>
-              <a:t>API: https://&lt;домен&gt;/api</a:t>
+              <a:t>API: https://crm-rtk.pixel-minds.ru/api</a:t>
             </a:r>
           </a:p>
         </p:txBody>

--- a/docs/presentation/RTK-CRM-LCT2026.pptx
+++ b/docs/presentation/RTK-CRM-LCT2026.pptx
@@ -5,17 +5,17 @@
     <p:sldMasterId id="2147483648" r:id="rId1"/>
   </p:sldMasterIdLst>
   <p:sldIdLst>
-    <p:sldId id="262" r:id="rId12"/>
-    <p:sldId id="263" r:id="rId13"/>
-    <p:sldId id="264" r:id="rId14"/>
-    <p:sldId id="265" r:id="rId15"/>
-    <p:sldId id="266" r:id="rId16"/>
     <p:sldId id="268" r:id="rId18"/>
     <p:sldId id="272" r:id="rId22"/>
     <p:sldId id="274" r:id="rId24"/>
     <p:sldId id="275" r:id="rId25"/>
     <p:sldId id="271" r:id="rId21"/>
     <p:sldId id="282" r:id="rId32"/>
+    <p:sldId id="262" r:id="rId12"/>
+    <p:sldId id="263" r:id="rId13"/>
+    <p:sldId id="264" r:id="rId14"/>
+    <p:sldId id="265" r:id="rId15"/>
+    <p:sldId id="266" r:id="rId16"/>
   </p:sldIdLst>
   <p:sldSz cx="12192000" cy="6858000"/>
   <p:notesSz cx="12192000" cy="6858000"/>
@@ -1815,8 +1815,8 @@
         </p:nvSpPr>
         <p:spPr>
           <a:xfrm>
-            <a:off x="868680" y="1225296"/>
-            <a:ext cx="10424160" cy="1371600"/>
+            <a:off x="612444" y="1199693"/>
+            <a:ext cx="3925570" cy="1097915"/>
           </a:xfrm>
           <a:prstGeom prst="rect">
             <a:avLst/>
@@ -1840,7 +1840,7 @@
               </a:spcAft>
             </a:pPr>
             <a:r>
-              <a:rPr sz="1500" b="1">
+              <a:rPr sz="1400" b="1">
                 <a:solidFill>
                   <a:srgbClr val="520978"/>
                 </a:solidFill>
@@ -1863,13 +1863,13 @@
               </a:spcAft>
             </a:pPr>
             <a:r>
-              <a:rPr sz="1150" b="0">
+              <a:rPr sz="1400" b="0">
                 <a:solidFill>
                   <a:srgbClr val="1C1D22"/>
                 </a:solidFill>
                 <a:latin typeface="Montserrat"/>
               </a:rPr>
-              <a:t>Команда сложилась на хакатоне ЛЦТ 2026: backend, frontend, аналитика, отчёты и QA. Роли распределили по сильным сторонам, работали итерациями с ежедневной синхронизацией.</a:t>
+              <a:t>Команда сложилась на хакатоне ЛЦТ 2026: backend, frontend, аналитика, отчёты и QA. Роли распределили по сильным сторонам.</a:t>
             </a:r>
           </a:p>
         </p:txBody>
@@ -1882,8 +1882,8 @@
         </p:nvSpPr>
         <p:spPr>
           <a:xfrm>
-            <a:off x="868680" y="2852928"/>
-            <a:ext cx="10424160" cy="1371600"/>
+            <a:off x="612444" y="2931109"/>
+            <a:ext cx="3971925" cy="981075"/>
           </a:xfrm>
           <a:prstGeom prst="rect">
             <a:avLst/>
@@ -1907,7 +1907,7 @@
               </a:spcAft>
             </a:pPr>
             <a:r>
-              <a:rPr sz="1500" b="1">
+              <a:rPr sz="1400" b="1">
                 <a:solidFill>
                   <a:srgbClr val="520978"/>
                 </a:solidFill>
@@ -1930,13 +1930,13 @@
               </a:spcAft>
             </a:pPr>
             <a:r>
-              <a:rPr sz="1150" b="0">
+              <a:rPr sz="1400" b="0">
                 <a:solidFill>
                   <a:srgbClr val="1C1D22"/>
                 </a:solidFill>
                 <a:latin typeface="Montserrat"/>
               </a:rPr>
-              <a:t>Задача ИТ Школы — про реальный процесс, а не учебный кейс: взаимодействие с вузами живёт в таблицах и чатах. Хотелось собрать это в один прозрачный контур.</a:t>
+              <a:t>Задача ИТ Школы про реальный процесс, а не учебный кейс: взаимодействие с вузами живёт в таблицах и чатах. Собрали это в один прозрачный контур.</a:t>
             </a:r>
           </a:p>
         </p:txBody>
@@ -2097,8 +2097,8 @@
         </p:nvSpPr>
         <p:spPr>
           <a:xfrm>
-            <a:off x="868680" y="4535424"/>
-            <a:ext cx="10424160" cy="1371600"/>
+            <a:off x="612444" y="4584243"/>
+            <a:ext cx="7117080" cy="1541780"/>
           </a:xfrm>
           <a:prstGeom prst="rect">
             <a:avLst/>
@@ -2122,7 +2122,7 @@
               </a:spcAft>
             </a:pPr>
             <a:r>
-              <a:rPr sz="1500" b="1">
+              <a:rPr sz="1400" b="1">
                 <a:solidFill>
                   <a:srgbClr val="520978"/>
                 </a:solidFill>
@@ -2145,13 +2145,13 @@
               </a:spcAft>
             </a:pPr>
             <a:r>
-              <a:rPr sz="1150" b="0">
+              <a:rPr sz="1400" b="0">
                 <a:solidFill>
                   <a:srgbClr val="1C1D22"/>
                 </a:solidFill>
                 <a:latin typeface="Montserrat"/>
               </a:rPr>
-              <a:t>Свести две разные воронки — B2B (14 этапов) и B2C (4 этапа) — так, чтобы фильтры, создание заявок и отчёты не путали их между собой. Отдельно занимались версткой PDF-отчётов и контрастом тёмной темы.</a:t>
+              <a:t>Свести две воронки — B2B (14 этапов) и B2C (4 этапа) — так, чтобы фильтры, создание заявок и отчёты не путали их между собой. Отдельно занимались вёрсткой PDF-отчётов и контрастом тёмной темы.</a:t>
             </a:r>
           </a:p>
         </p:txBody>
@@ -2236,7 +2236,7 @@
                 </a:solidFill>
                 <a:latin typeface="Montserrat"/>
               </a:rPr>
-              <a:t>4</a:t>
+              <a:t>10</a:t>
             </a:r>
           </a:p>
         </p:txBody>
@@ -2359,7 +2359,7 @@
               </a:spcAft>
             </a:pPr>
             <a:r>
-              <a:rPr sz="1500" b="1">
+              <a:rPr sz="2000" b="1">
                 <a:solidFill>
                   <a:srgbClr val="520978"/>
                 </a:solidFill>
@@ -2382,13 +2382,13 @@
               </a:spcAft>
             </a:pPr>
             <a:r>
-              <a:rPr sz="1150" b="0">
+              <a:rPr sz="1400" b="0">
                 <a:solidFill>
                   <a:srgbClr val="1C1D22"/>
                 </a:solidFill>
                 <a:latin typeface="Montserrat"/>
               </a:rPr>
-              <a:t>React 18 + TypeScript + Ant Design на клиенте; FastAPI, SQLAlchemy 2 (async), PostgreSQL и JWT на сервере. Вход через Keycloak (Code Flow + PKCE) или локальный JWT. Ролевой доступ и audit log для изменяющих операций.</a:t>
+              <a:t>React 18 + TypeScript + Ant Design; FastAPI, SQLAlchemy 2 (async), PostgreSQL. Вход через Keycloak (Code Flow + PKCE) или локальный JWT, ролевой доступ и audit log.</a:t>
             </a:r>
           </a:p>
         </p:txBody>
@@ -2426,7 +2426,7 @@
               </a:spcAft>
             </a:pPr>
             <a:r>
-              <a:rPr sz="1500" b="1">
+              <a:rPr sz="2000" b="1">
                 <a:solidFill>
                   <a:srgbClr val="520978"/>
                 </a:solidFill>
@@ -2449,13 +2449,13 @@
               </a:spcAft>
             </a:pPr>
             <a:r>
-              <a:rPr sz="1150" b="0">
+              <a:rPr sz="1400" b="0">
                 <a:solidFill>
                   <a:srgbClr val="1C1D22"/>
                 </a:solidFill>
                 <a:latin typeface="Montserrat"/>
               </a:rPr>
-              <a:t>Продукт закрывает потребность ИТ Школы в управляемом взаимодействии с вузами и переносится на другие подразделения с похожим процессом: продажи, партнёрства, работа с филиалами.</a:t>
+              <a:t>Закрывает потребность ИТ Школы в управляемом взаимодействии с вузами и переносится на подразделения с похожим процессом: продажи, партнёрства, работа с филиалами.</a:t>
             </a:r>
           </a:p>
         </p:txBody>
@@ -2494,7 +2494,7 @@
                 </a:solidFill>
                 <a:latin typeface="Montserrat"/>
               </a:rPr>
-              <a:t>5</a:t>
+              <a:t>11</a:t>
             </a:r>
           </a:p>
         </p:txBody>
@@ -2787,7 +2787,7 @@
                 </a:solidFill>
                 <a:latin typeface="Montserrat"/>
               </a:rPr>
-              <a:t>6</a:t>
+              <a:t>1</a:t>
             </a:r>
           </a:p>
         </p:txBody>
@@ -4123,7 +4123,7 @@
                 </a:solidFill>
                 <a:latin typeface="Montserrat"/>
               </a:rPr>
-              <a:t>10</a:t>
+              <a:t>5</a:t>
             </a:r>
           </a:p>
         </p:txBody>
@@ -5571,7 +5571,7 @@
                 </a:solidFill>
                 <a:latin typeface="Montserrat"/>
               </a:rPr>
-              <a:t>7</a:t>
+              <a:t>2</a:t>
             </a:r>
           </a:p>
         </p:txBody>
@@ -6577,7 +6577,7 @@
                 </a:solidFill>
                 <a:latin typeface="Montserrat"/>
               </a:rPr>
-              <a:t>8</a:t>
+              <a:t>3</a:t>
             </a:r>
           </a:p>
         </p:txBody>
@@ -8184,7 +8184,7 @@
                 </a:solidFill>
                 <a:latin typeface="Montserrat"/>
               </a:rPr>
-              <a:t>9</a:t>
+              <a:t>4</a:t>
             </a:r>
             <a:endParaRPr sz="1200">
               <a:latin typeface="Microsoft Sans Serif"/>
@@ -11253,7 +11253,7 @@
                 </a:solidFill>
                 <a:latin typeface="Montserrat"/>
               </a:rPr>
-              <a:t>11</a:t>
+              <a:t>6</a:t>
             </a:r>
           </a:p>
         </p:txBody>
@@ -11993,69 +11993,14 @@
       </p:sp>
       <p:sp>
         <p:nvSpPr>
-          <p:cNvPr id="8" name="Rounded Rectangle 7"/>
-          <p:cNvSpPr/>
+          <p:cNvPr id="8" name="TextBox 7"/>
+          <p:cNvSpPr txBox="1"/>
           <p:nvPr/>
         </p:nvSpPr>
         <p:spPr>
           <a:xfrm>
             <a:off x="822960" y="4224528"/>
-            <a:ext cx="3200400" cy="475488"/>
-          </a:xfrm>
-          <a:prstGeom prst="roundRect">
-            <a:avLst>
-              <a:gd name="adj" fmla="val 50000"/>
-            </a:avLst>
-          </a:prstGeom>
-          <a:solidFill>
-            <a:srgbClr val="FF0053"/>
-          </a:solidFill>
-          <a:ln>
-            <a:noFill/>
-          </a:ln>
-          <a:effectLst/>
-        </p:spPr>
-        <p:style>
-          <a:lnRef idx="1">
-            <a:schemeClr val="accent1"/>
-          </a:lnRef>
-          <a:fillRef idx="3">
-            <a:schemeClr val="accent1"/>
-          </a:fillRef>
-          <a:effectRef idx="2">
-            <a:schemeClr val="accent1"/>
-          </a:effectRef>
-          <a:fontRef idx="minor">
-            <a:schemeClr val="lt1"/>
-          </a:fontRef>
-        </p:style>
-        <p:txBody>
-          <a:bodyPr rtlCol="0" anchor="ctr" wrap="square" lIns="128016" rIns="128016"/>
-          <a:lstStyle/>
-          <a:p>
-            <a:pPr algn="l"/>
-            <a:r>
-              <a:rPr sz="1300" b="1">
-                <a:solidFill>
-                  <a:srgbClr val="FFFFFF"/>
-                </a:solidFill>
-                <a:latin typeface="Montserrat"/>
-              </a:rPr>
-              <a:t>Команда из 5 человек</a:t>
-            </a:r>
-          </a:p>
-        </p:txBody>
-      </p:sp>
-      <p:sp>
-        <p:nvSpPr>
-          <p:cNvPr id="9" name="TextBox 8"/>
-          <p:cNvSpPr txBox="1"/>
-          <p:nvPr/>
-        </p:nvSpPr>
-        <p:spPr>
-          <a:xfrm>
-            <a:off x="822960" y="4956048"/>
-            <a:ext cx="10058400" cy="457200"/>
+            <a:ext cx="10058400" cy="475488"/>
           </a:xfrm>
           <a:prstGeom prst="rect">
             <a:avLst/>
@@ -12077,13 +12022,13 @@
               </a:spcAft>
             </a:pPr>
             <a:r>
-              <a:rPr sz="1300" b="0">
+              <a:rPr sz="1500" b="0">
                 <a:solidFill>
                   <a:srgbClr val="E6D2EF"/>
                 </a:solidFill>
                 <a:latin typeface="Montserrat"/>
               </a:rPr>
-              <a:t>Москва · github.com/Pavel1778/rtk-crm</a:t>
+              <a:t>Команда из 5 человек · Москва · github.com/Pavel1778/rtk-crm</a:t>
             </a:r>
           </a:p>
         </p:txBody>
@@ -12233,7 +12178,7 @@
               </a:spcAft>
             </a:pPr>
             <a:r>
-              <a:rPr sz="2000" b="1">
+              <a:rPr sz="1600" b="1">
                 <a:solidFill>
                   <a:srgbClr val="520978"/>
                 </a:solidFill>
@@ -12256,7 +12201,7 @@
               </a:spcAft>
             </a:pPr>
             <a:r>
-              <a:rPr sz="1200" b="0">
+              <a:rPr sz="1400" b="0">
                 <a:solidFill>
                   <a:srgbClr val="1C1D22"/>
                 </a:solidFill>
@@ -12275,7 +12220,7 @@
               </a:spcAft>
             </a:pPr>
             <a:r>
-              <a:rPr sz="1200" b="0">
+              <a:rPr sz="1400" b="0">
                 <a:solidFill>
                   <a:srgbClr val="1C1D22"/>
                 </a:solidFill>
@@ -12294,13 +12239,13 @@
               </a:spcAft>
             </a:pPr>
             <a:r>
-              <a:rPr sz="1100" b="0">
-                <a:solidFill>
-                  <a:srgbClr val="6B5B78"/>
+              <a:rPr sz="1400" b="0">
+                <a:solidFill>
+                  <a:srgbClr val="1C1D22"/>
                 </a:solidFill>
                 <a:latin typeface="Montserrat"/>
               </a:rPr>
-              <a:t>Краткое описание: команда собралась на хакатоне ЛЦТ 2026 вокруг задачи ИТ Школы — связать коммуникации с вузами в один управляемый процесс.</a:t>
+              <a:t>Город и регион: Москва</a:t>
             </a:r>
           </a:p>
           <a:p>
@@ -12313,13 +12258,13 @@
               </a:spcAft>
             </a:pPr>
             <a:r>
-              <a:rPr sz="1200" b="0">
-                <a:solidFill>
-                  <a:srgbClr val="1C1D22"/>
+              <a:rPr sz="1400" b="0">
+                <a:solidFill>
+                  <a:srgbClr val="6B5B78"/>
                 </a:solidFill>
                 <a:latin typeface="Montserrat"/>
               </a:rPr>
-              <a:t>Город и регион: Москва</a:t>
+              <a:t>Собрались на ЛЦТ 2026 вокруг задачи ИТ Школы.</a:t>
             </a:r>
           </a:p>
         </p:txBody>
@@ -12460,7 +12405,7 @@
               </a:spcAft>
             </a:pPr>
             <a:r>
-              <a:rPr sz="2000" b="1">
+              <a:rPr sz="1600" b="1">
                 <a:solidFill>
                   <a:srgbClr val="520978"/>
                 </a:solidFill>
@@ -12483,13 +12428,13 @@
               </a:spcAft>
             </a:pPr>
             <a:r>
-              <a:rPr sz="1200" b="0">
+              <a:rPr sz="1400" b="0">
                 <a:solidFill>
                   <a:srgbClr val="1C1D22"/>
                 </a:solidFill>
                 <a:latin typeface="Montserrat"/>
               </a:rPr>
-              <a:t>CRM, которая ведёт взаимодействие с вузом от первого контакта до результата: Kanban по этапам workflow, карточка взаимодействия, задачи, комментарии, файлы и отчёты с экспортом.</a:t>
+              <a:t>CRM ведёт взаимодействие с вузом от первого контакта до результата: Kanban, карточка, задачи, комментарии, файлы, отчёты.</a:t>
             </a:r>
           </a:p>
         </p:txBody>
@@ -12527,7 +12472,7 @@
               </a:spcAft>
             </a:pPr>
             <a:r>
-              <a:rPr sz="2000" b="1">
+              <a:rPr sz="1600" b="1">
                 <a:solidFill>
                   <a:srgbClr val="520978"/>
                 </a:solidFill>
@@ -12550,13 +12495,13 @@
               </a:spcAft>
             </a:pPr>
             <a:r>
-              <a:rPr sz="1200" b="0">
+              <a:rPr sz="1400" b="0">
                 <a:solidFill>
                   <a:srgbClr val="1C1D22"/>
                 </a:solidFill>
                 <a:latin typeface="Montserrat"/>
               </a:rPr>
-              <a:t>Настраиваемый workflow: этапы, порядок и цвета меняет администратор без доработки кода. Отдельные воронки B2B (14 этапов) и B2C (4 этапа) с корректной фильтрацией в UI, API и отчётах.</a:t>
+              <a:t>Настраиваемый workflow без доработки кода. Воронки B2B (14 этапов) и B2C (4 этапа) не смешиваются в UI, API и отчётах.</a:t>
             </a:r>
           </a:p>
         </p:txBody>
@@ -12595,7 +12540,7 @@
                 </a:solidFill>
                 <a:latin typeface="Montserrat"/>
               </a:rPr>
-              <a:t>2</a:t>
+              <a:t>8</a:t>
             </a:r>
           </a:p>
         </p:txBody>
@@ -12827,9 +12772,9 @@
               </a:spcAft>
             </a:pPr>
             <a:r>
-              <a:rPr sz="1400" b="1">
-                <a:solidFill>
-                  <a:srgbClr val="1C1D22"/>
+              <a:rPr sz="1600" b="1">
+                <a:solidFill>
+                  <a:srgbClr val="520978"/>
                 </a:solidFill>
                 <a:latin typeface="Montserrat"/>
               </a:rPr>
@@ -12882,7 +12827,7 @@
               </a:tabLst>
             </a:pPr>
             <a:r>
-              <a:rPr sz="1000" b="0">
+              <a:rPr sz="1400" b="0">
                 <a:solidFill>
                   <a:srgbClr val="3C1B50"/>
                 </a:solidFill>
@@ -12905,7 +12850,7 @@
               </a:spcAft>
             </a:pPr>
             <a:r>
-              <a:rPr sz="1000" b="0">
+              <a:rPr sz="1400" b="0">
                 <a:solidFill>
                   <a:srgbClr val="6B5B78"/>
                 </a:solidFill>
@@ -13192,9 +13137,9 @@
               </a:spcAft>
             </a:pPr>
             <a:r>
-              <a:rPr sz="1400" b="1">
-                <a:solidFill>
-                  <a:srgbClr val="1C1D22"/>
+              <a:rPr sz="1600" b="1">
+                <a:solidFill>
+                  <a:srgbClr val="520978"/>
                 </a:solidFill>
                 <a:latin typeface="Montserrat"/>
               </a:rPr>
@@ -13372,9 +13317,9 @@
               </a:spcAft>
             </a:pPr>
             <a:r>
-              <a:rPr sz="1400" b="1">
-                <a:solidFill>
-                  <a:srgbClr val="1C1D22"/>
+              <a:rPr sz="1600" b="1">
+                <a:solidFill>
+                  <a:srgbClr val="520978"/>
                 </a:solidFill>
                 <a:latin typeface="Montserrat"/>
               </a:rPr>
@@ -13427,7 +13372,7 @@
               </a:tabLst>
             </a:pPr>
             <a:r>
-              <a:rPr sz="1000" b="0">
+              <a:rPr sz="1400" b="0">
                 <a:solidFill>
                   <a:srgbClr val="3C1B50"/>
                 </a:solidFill>
@@ -13450,7 +13395,7 @@
               </a:spcAft>
             </a:pPr>
             <a:r>
-              <a:rPr sz="1000" b="0">
+              <a:rPr sz="1400" b="0">
                 <a:solidFill>
                   <a:srgbClr val="6B5B78"/>
                 </a:solidFill>
@@ -13626,9 +13571,9 @@
               </a:spcAft>
             </a:pPr>
             <a:r>
-              <a:rPr sz="1400" b="1">
-                <a:solidFill>
-                  <a:srgbClr val="1C1D22"/>
+              <a:rPr sz="1600" b="1">
+                <a:solidFill>
+                  <a:srgbClr val="520978"/>
                 </a:solidFill>
                 <a:latin typeface="Montserrat"/>
               </a:rPr>
@@ -13681,7 +13626,7 @@
               </a:tabLst>
             </a:pPr>
             <a:r>
-              <a:rPr sz="1000" b="0">
+              <a:rPr sz="1400" b="0">
                 <a:solidFill>
                   <a:srgbClr val="3C1B50"/>
                 </a:solidFill>
@@ -13704,7 +13649,7 @@
               </a:spcAft>
             </a:pPr>
             <a:r>
-              <a:rPr sz="1000" b="0">
+              <a:rPr sz="1400" b="0">
                 <a:solidFill>
                   <a:srgbClr val="6B5B78"/>
                 </a:solidFill>
@@ -13880,9 +13825,9 @@
               </a:spcAft>
             </a:pPr>
             <a:r>
-              <a:rPr sz="1400" b="1">
-                <a:solidFill>
-                  <a:srgbClr val="1C1D22"/>
+              <a:rPr sz="1600" b="1">
+                <a:solidFill>
+                  <a:srgbClr val="520978"/>
                 </a:solidFill>
                 <a:latin typeface="Montserrat"/>
               </a:rPr>
@@ -13935,7 +13880,7 @@
               </a:tabLst>
             </a:pPr>
             <a:r>
-              <a:rPr sz="1000" b="0">
+              <a:rPr sz="1400" b="0">
                 <a:solidFill>
                   <a:srgbClr val="3C1B50"/>
                 </a:solidFill>
@@ -13958,7 +13903,7 @@
               </a:spcAft>
             </a:pPr>
             <a:r>
-              <a:rPr sz="1000" b="0">
+              <a:rPr sz="1400" b="0">
                 <a:solidFill>
                   <a:srgbClr val="6B5B78"/>
                 </a:solidFill>
@@ -14009,7 +13954,7 @@
               </a:tabLst>
             </a:pPr>
             <a:r>
-              <a:rPr sz="1000" b="0">
+              <a:rPr sz="1400" b="0">
                 <a:solidFill>
                   <a:srgbClr val="3C1B50"/>
                 </a:solidFill>
@@ -14032,7 +13977,7 @@
               </a:spcAft>
             </a:pPr>
             <a:r>
-              <a:rPr sz="1000" b="0">
+              <a:rPr sz="1400" b="0">
                 <a:solidFill>
                   <a:srgbClr val="6B5B78"/>
                 </a:solidFill>
@@ -14077,444 +14022,7 @@
                 </a:solidFill>
                 <a:latin typeface="Montserrat"/>
               </a:rPr>
-              <a:t>3</a:t>
-            </a:r>
-          </a:p>
-        </p:txBody>
-      </p:sp>
-      <p:sp>
-        <p:nvSpPr>
-          <p:cNvPr id="22" name="Oval 21"/>
-          <p:cNvSpPr/>
-          <p:nvPr/>
-        </p:nvSpPr>
-        <p:spPr>
-          <a:xfrm>
-            <a:off x="597204" y="2057400"/>
-            <a:ext cx="1325880" cy="1325880"/>
-          </a:xfrm>
-          <a:prstGeom prst="ellipse">
-            <a:avLst/>
-          </a:prstGeom>
-          <a:solidFill>
-            <a:srgbClr val="FF0053"/>
-          </a:solidFill>
-          <a:ln w="25400">
-            <a:solidFill>
-              <a:srgbClr val="FFFFFF"/>
-            </a:solidFill>
-          </a:ln>
-          <a:effectLst/>
-        </p:spPr>
-        <p:style>
-          <a:lnRef idx="1">
-            <a:schemeClr val="accent1"/>
-          </a:lnRef>
-          <a:fillRef idx="3">
-            <a:schemeClr val="accent1"/>
-          </a:fillRef>
-          <a:effectRef idx="2">
-            <a:schemeClr val="accent1"/>
-          </a:effectRef>
-          <a:fontRef idx="minor">
-            <a:schemeClr val="lt1"/>
-          </a:fontRef>
-        </p:style>
-        <p:txBody>
-          <a:bodyPr rtlCol="0" anchor="ctr"/>
-          <a:lstStyle/>
-          <a:p>
-            <a:pPr algn="ctr"/>
-            <a:r>
-              <a:rPr sz="2600" b="1">
-                <a:solidFill>
-                  <a:srgbClr val="FFFFFF"/>
-                </a:solidFill>
-                <a:latin typeface="Montserrat"/>
-              </a:rPr>
-              <a:t>СП</a:t>
-            </a:r>
-          </a:p>
-        </p:txBody>
-      </p:sp>
-      <p:pic>
-        <p:nvPicPr>
-          <p:cNvPr id="23" name="Picture 22" descr="image.png"/>
-          <p:cNvPicPr>
-            <a:picLocks noChangeAspect="1"/>
-          </p:cNvPicPr>
-          <p:nvPr/>
-        </p:nvPicPr>
-        <p:blipFill>
-          <a:blip r:embed="rId3"/>
-          <a:stretch>
-            <a:fillRect/>
-          </a:stretch>
-        </p:blipFill>
-        <p:spPr>
-          <a:xfrm>
-            <a:off x="981252" y="5074920"/>
-            <a:ext cx="713232" cy="713232"/>
-          </a:xfrm>
-          <a:prstGeom prst="rect">
-            <a:avLst/>
-          </a:prstGeom>
-        </p:spPr>
-      </p:pic>
-      <p:sp>
-        <p:nvSpPr>
-          <p:cNvPr id="24" name="Oval 23"/>
-          <p:cNvSpPr/>
-          <p:nvPr/>
-        </p:nvSpPr>
-        <p:spPr>
-          <a:xfrm>
-            <a:off x="2902966" y="2057400"/>
-            <a:ext cx="1325880" cy="1325880"/>
-          </a:xfrm>
-          <a:prstGeom prst="ellipse">
-            <a:avLst/>
-          </a:prstGeom>
-          <a:solidFill>
-            <a:srgbClr val="FF0053"/>
-          </a:solidFill>
-          <a:ln w="25400">
-            <a:solidFill>
-              <a:srgbClr val="FFFFFF"/>
-            </a:solidFill>
-          </a:ln>
-          <a:effectLst/>
-        </p:spPr>
-        <p:style>
-          <a:lnRef idx="1">
-            <a:schemeClr val="accent1"/>
-          </a:lnRef>
-          <a:fillRef idx="3">
-            <a:schemeClr val="accent1"/>
-          </a:fillRef>
-          <a:effectRef idx="2">
-            <a:schemeClr val="accent1"/>
-          </a:effectRef>
-          <a:fontRef idx="minor">
-            <a:schemeClr val="lt1"/>
-          </a:fontRef>
-        </p:style>
-        <p:txBody>
-          <a:bodyPr rtlCol="0" anchor="ctr"/>
-          <a:lstStyle/>
-          <a:p>
-            <a:pPr algn="ctr"/>
-            <a:r>
-              <a:rPr sz="2600" b="1">
-                <a:solidFill>
-                  <a:srgbClr val="FFFFFF"/>
-                </a:solidFill>
-                <a:latin typeface="Montserrat"/>
-              </a:rPr>
-              <a:t>ТК</a:t>
-            </a:r>
-          </a:p>
-        </p:txBody>
-      </p:sp>
-      <p:pic>
-        <p:nvPicPr>
-          <p:cNvPr id="25" name="Picture 24" descr="image.png"/>
-          <p:cNvPicPr>
-            <a:picLocks noChangeAspect="1"/>
-          </p:cNvPicPr>
-          <p:nvPr/>
-        </p:nvPicPr>
-        <p:blipFill>
-          <a:blip r:embed="rId4"/>
-          <a:stretch>
-            <a:fillRect/>
-          </a:stretch>
-        </p:blipFill>
-        <p:spPr>
-          <a:xfrm>
-            <a:off x="3287013" y="5074920"/>
-            <a:ext cx="713232" cy="713232"/>
-          </a:xfrm>
-          <a:prstGeom prst="rect">
-            <a:avLst/>
-          </a:prstGeom>
-        </p:spPr>
-      </p:pic>
-      <p:sp>
-        <p:nvSpPr>
-          <p:cNvPr id="26" name="Oval 25"/>
-          <p:cNvSpPr/>
-          <p:nvPr/>
-        </p:nvSpPr>
-        <p:spPr>
-          <a:xfrm>
-            <a:off x="5209159" y="2057400"/>
-            <a:ext cx="1325880" cy="1325880"/>
-          </a:xfrm>
-          <a:prstGeom prst="ellipse">
-            <a:avLst/>
-          </a:prstGeom>
-          <a:solidFill>
-            <a:srgbClr val="FF0053"/>
-          </a:solidFill>
-          <a:ln w="25400">
-            <a:solidFill>
-              <a:srgbClr val="FFFFFF"/>
-            </a:solidFill>
-          </a:ln>
-          <a:effectLst/>
-        </p:spPr>
-        <p:style>
-          <a:lnRef idx="1">
-            <a:schemeClr val="accent1"/>
-          </a:lnRef>
-          <a:fillRef idx="3">
-            <a:schemeClr val="accent1"/>
-          </a:fillRef>
-          <a:effectRef idx="2">
-            <a:schemeClr val="accent1"/>
-          </a:effectRef>
-          <a:fontRef idx="minor">
-            <a:schemeClr val="lt1"/>
-          </a:fontRef>
-        </p:style>
-        <p:txBody>
-          <a:bodyPr rtlCol="0" anchor="ctr"/>
-          <a:lstStyle/>
-          <a:p>
-            <a:pPr algn="ctr"/>
-            <a:r>
-              <a:rPr sz="2600" b="1">
-                <a:solidFill>
-                  <a:srgbClr val="FFFFFF"/>
-                </a:solidFill>
-                <a:latin typeface="Montserrat"/>
-              </a:rPr>
-              <a:t>СА</a:t>
-            </a:r>
-          </a:p>
-        </p:txBody>
-      </p:sp>
-      <p:pic>
-        <p:nvPicPr>
-          <p:cNvPr id="27" name="Picture 26" descr="image.png"/>
-          <p:cNvPicPr>
-            <a:picLocks noChangeAspect="1"/>
-          </p:cNvPicPr>
-          <p:nvPr/>
-        </p:nvPicPr>
-        <p:blipFill>
-          <a:blip r:embed="rId5"/>
-          <a:stretch>
-            <a:fillRect/>
-          </a:stretch>
-        </p:blipFill>
-        <p:spPr>
-          <a:xfrm>
-            <a:off x="5593207" y="5074920"/>
-            <a:ext cx="713232" cy="713232"/>
-          </a:xfrm>
-          <a:prstGeom prst="rect">
-            <a:avLst/>
-          </a:prstGeom>
-        </p:spPr>
-      </p:pic>
-      <p:sp>
-        <p:nvSpPr>
-          <p:cNvPr id="28" name="Oval 27"/>
-          <p:cNvSpPr/>
-          <p:nvPr/>
-        </p:nvSpPr>
-        <p:spPr>
-          <a:xfrm>
-            <a:off x="7514970" y="2057400"/>
-            <a:ext cx="1325880" cy="1325880"/>
-          </a:xfrm>
-          <a:prstGeom prst="ellipse">
-            <a:avLst/>
-          </a:prstGeom>
-          <a:solidFill>
-            <a:srgbClr val="FF0053"/>
-          </a:solidFill>
-          <a:ln w="25400">
-            <a:solidFill>
-              <a:srgbClr val="FFFFFF"/>
-            </a:solidFill>
-          </a:ln>
-          <a:effectLst/>
-        </p:spPr>
-        <p:style>
-          <a:lnRef idx="1">
-            <a:schemeClr val="accent1"/>
-          </a:lnRef>
-          <a:fillRef idx="3">
-            <a:schemeClr val="accent1"/>
-          </a:fillRef>
-          <a:effectRef idx="2">
-            <a:schemeClr val="accent1"/>
-          </a:effectRef>
-          <a:fontRef idx="minor">
-            <a:schemeClr val="lt1"/>
-          </a:fontRef>
-        </p:style>
-        <p:txBody>
-          <a:bodyPr rtlCol="0" anchor="ctr"/>
-          <a:lstStyle/>
-          <a:p>
-            <a:pPr algn="ctr"/>
-            <a:r>
-              <a:rPr sz="2600" b="1">
-                <a:solidFill>
-                  <a:srgbClr val="FFFFFF"/>
-                </a:solidFill>
-                <a:latin typeface="Montserrat"/>
-              </a:rPr>
-              <a:t>ИМ</a:t>
-            </a:r>
-          </a:p>
-        </p:txBody>
-      </p:sp>
-      <p:pic>
-        <p:nvPicPr>
-          <p:cNvPr id="29" name="Picture 28" descr="image.png"/>
-          <p:cNvPicPr>
-            <a:picLocks noChangeAspect="1"/>
-          </p:cNvPicPr>
-          <p:nvPr/>
-        </p:nvPicPr>
-        <p:blipFill>
-          <a:blip r:embed="rId6"/>
-          <a:stretch>
-            <a:fillRect/>
-          </a:stretch>
-        </p:blipFill>
-        <p:spPr>
-          <a:xfrm>
-            <a:off x="7899018" y="5074920"/>
-            <a:ext cx="713232" cy="713232"/>
-          </a:xfrm>
-          <a:prstGeom prst="rect">
-            <a:avLst/>
-          </a:prstGeom>
-        </p:spPr>
-      </p:pic>
-      <p:sp>
-        <p:nvSpPr>
-          <p:cNvPr id="30" name="Oval 29"/>
-          <p:cNvSpPr/>
-          <p:nvPr/>
-        </p:nvSpPr>
-        <p:spPr>
-          <a:xfrm>
-            <a:off x="9820782" y="2057400"/>
-            <a:ext cx="1325880" cy="1325880"/>
-          </a:xfrm>
-          <a:prstGeom prst="ellipse">
-            <a:avLst/>
-          </a:prstGeom>
-          <a:solidFill>
-            <a:srgbClr val="FF0053"/>
-          </a:solidFill>
-          <a:ln w="25400">
-            <a:solidFill>
-              <a:srgbClr val="FFFFFF"/>
-            </a:solidFill>
-          </a:ln>
-          <a:effectLst/>
-        </p:spPr>
-        <p:style>
-          <a:lnRef idx="1">
-            <a:schemeClr val="accent1"/>
-          </a:lnRef>
-          <a:fillRef idx="3">
-            <a:schemeClr val="accent1"/>
-          </a:fillRef>
-          <a:effectRef idx="2">
-            <a:schemeClr val="accent1"/>
-          </a:effectRef>
-          <a:fontRef idx="minor">
-            <a:schemeClr val="lt1"/>
-          </a:fontRef>
-        </p:style>
-        <p:txBody>
-          <a:bodyPr rtlCol="0" anchor="ctr"/>
-          <a:lstStyle/>
-          <a:p>
-            <a:pPr algn="ctr"/>
-            <a:r>
-              <a:rPr sz="2600" b="1">
-                <a:solidFill>
-                  <a:srgbClr val="FFFFFF"/>
-                </a:solidFill>
-                <a:latin typeface="Montserrat"/>
-              </a:rPr>
-              <a:t>НП</a:t>
-            </a:r>
-          </a:p>
-        </p:txBody>
-      </p:sp>
-      <p:pic>
-        <p:nvPicPr>
-          <p:cNvPr id="31" name="Picture 30" descr="image.png"/>
-          <p:cNvPicPr>
-            <a:picLocks noChangeAspect="1"/>
-          </p:cNvPicPr>
-          <p:nvPr/>
-        </p:nvPicPr>
-        <p:blipFill>
-          <a:blip r:embed="rId7"/>
-          <a:stretch>
-            <a:fillRect/>
-          </a:stretch>
-        </p:blipFill>
-        <p:spPr>
-          <a:xfrm>
-            <a:off x="10204830" y="5074920"/>
-            <a:ext cx="713232" cy="713232"/>
-          </a:xfrm>
-          <a:prstGeom prst="rect">
-            <a:avLst/>
-          </a:prstGeom>
-        </p:spPr>
-      </p:pic>
-      <p:sp>
-        <p:nvSpPr>
-          <p:cNvPr id="32" name="TextBox 31"/>
-          <p:cNvSpPr txBox="1"/>
-          <p:nvPr/>
-        </p:nvSpPr>
-        <p:spPr>
-          <a:xfrm>
-            <a:off x="594360" y="6035040"/>
-            <a:ext cx="4572000" cy="365760"/>
-          </a:xfrm>
-          <a:prstGeom prst="rect">
-            <a:avLst/>
-          </a:prstGeom>
-          <a:noFill/>
-        </p:spPr>
-        <p:txBody>
-          <a:bodyPr wrap="square">
-            <a:spAutoFit/>
-          </a:bodyPr>
-          <a:lstStyle/>
-          <a:p>
-            <a:pPr algn="l">
-              <a:lnSpc>
-                <a:spcPct val="112000"/>
-              </a:lnSpc>
-              <a:spcAft>
-                <a:spcPts val="0"/>
-              </a:spcAft>
-            </a:pPr>
-            <a:r>
-              <a:rPr sz="900" b="0">
-                <a:solidFill>
-                  <a:srgbClr val="6B5B78"/>
-                </a:solidFill>
-                <a:latin typeface="Montserrat"/>
-              </a:rPr>
-              <a:t>QR-код ведёт на профиль участника в Telegram</a:t>
+              <a:t>9</a:t>
             </a:r>
           </a:p>
         </p:txBody>

--- a/docs/presentation/RTK-CRM-LCT2026.pptx
+++ b/docs/presentation/RTK-CRM-LCT2026.pptx
@@ -2006,14 +2006,14 @@
         <p:spPr>
           <a:xfrm>
             <a:off x="11676633" y="1289050"/>
-            <a:ext cx="220979" cy="238125"/>
+            <a:ext cx="548640" cy="238125"/>
           </a:xfrm>
           <a:prstGeom prst="rect">
             <a:avLst/>
           </a:prstGeom>
         </p:spPr>
         <p:txBody>
-          <a:bodyPr wrap="square" lIns="0" tIns="11430" rIns="0" bIns="0" rtlCol="0" vert="horz">
+          <a:bodyPr wrap="none" lIns="0" tIns="11430" rIns="0" bIns="0" rtlCol="0" vert="horz">
             <a:spAutoFit/>
           </a:bodyPr>
           <a:lstStyle/>
@@ -2052,14 +2052,14 @@
         <p:spPr>
           <a:xfrm>
             <a:off x="11649202" y="2931109"/>
-            <a:ext cx="220979" cy="238125"/>
+            <a:ext cx="548640" cy="238125"/>
           </a:xfrm>
           <a:prstGeom prst="rect">
             <a:avLst/>
           </a:prstGeom>
         </p:spPr>
         <p:txBody>
-          <a:bodyPr wrap="square" lIns="0" tIns="12065" rIns="0" bIns="0" rtlCol="0" vert="horz">
+          <a:bodyPr wrap="none" lIns="0" tIns="12065" rIns="0" bIns="0" rtlCol="0" vert="horz">
             <a:spAutoFit/>
           </a:bodyPr>
           <a:lstStyle/>
@@ -2165,14 +2165,14 @@
         <p:spPr>
           <a:xfrm>
             <a:off x="11649202" y="4603750"/>
-            <a:ext cx="220979" cy="238125"/>
+            <a:ext cx="548640" cy="238125"/>
           </a:xfrm>
           <a:prstGeom prst="rect">
             <a:avLst/>
           </a:prstGeom>
         </p:spPr>
         <p:txBody>
-          <a:bodyPr wrap="square" lIns="0" tIns="11430" rIns="0" bIns="0" rtlCol="0" vert="horz">
+          <a:bodyPr wrap="none" lIns="0" tIns="11430" rIns="0" bIns="0" rtlCol="0" vert="horz">
             <a:spAutoFit/>
           </a:bodyPr>
           <a:lstStyle/>
@@ -2213,10 +2213,13 @@
           </p:nvPr>
         </p:nvSpPr>
         <p:spPr>
+          <a:xfrm>
+            <a:ext cx="548640" cy="0"/>
+          </a:xfrm>
           <a:prstGeom prst="rect"/>
         </p:spPr>
         <p:txBody>
-          <a:bodyPr wrap="square" lIns="0" tIns="43180" rIns="0" bIns="0" rtlCol="0" vert="horz">
+          <a:bodyPr wrap="none" lIns="0" tIns="43180" rIns="0" bIns="0" rtlCol="0" vert="horz">
             <a:spAutoFit/>
           </a:bodyPr>
           <a:lstStyle/>
@@ -2388,7 +2391,7 @@
                 </a:solidFill>
                 <a:latin typeface="Montserrat"/>
               </a:rPr>
-              <a:t>React 18 + TypeScript + Ant Design; FastAPI, SQLAlchemy 2 (async), PostgreSQL. Вход через Keycloak (Code Flow + PKCE) или локальный JWT, ролевой доступ и audit log.</a:t>
+              <a:t>React 18 + TypeScript + Ant Design; FastAPI, SQLAlchemy 2 (async), PostgreSQL. Вход через Keycloak (Code Flow + PKCE) или локальный JWT, ролевой доступ и аудит-лог.</a:t>
             </a:r>
           </a:p>
         </p:txBody>
@@ -2432,7 +2435,7 @@
                 </a:solidFill>
                 <a:latin typeface="Montserrat"/>
               </a:rPr>
-              <a:t>Маркетинговая суть решения</a:t>
+              <a:t>Эффект и масштабирование</a:t>
             </a:r>
             <a:endParaRPr sz="2000">
               <a:latin typeface="Arial"/>
@@ -2471,10 +2474,13 @@
           </p:nvPr>
         </p:nvSpPr>
         <p:spPr>
+          <a:xfrm>
+            <a:ext cx="548640" cy="0"/>
+          </a:xfrm>
           <a:prstGeom prst="rect"/>
         </p:spPr>
         <p:txBody>
-          <a:bodyPr wrap="square" lIns="0" tIns="43180" rIns="0" bIns="0" rtlCol="0" vert="horz">
+          <a:bodyPr wrap="none" lIns="0" tIns="43180" rIns="0" bIns="0" rtlCol="0" vert="horz">
             <a:spAutoFit/>
           </a:bodyPr>
           <a:lstStyle/>
@@ -2560,198 +2566,6 @@
             </a:prstGeom>
           </p:spPr>
         </p:pic>
-        <p:sp>
-          <p:nvSpPr>
-            <p:cNvPr id="4" name="object 4"/>
-            <p:cNvSpPr/>
-            <p:nvPr/>
-          </p:nvSpPr>
-          <p:spPr>
-            <a:xfrm>
-              <a:off x="326136" y="1304544"/>
-              <a:ext cx="11539855" cy="5050790"/>
-            </a:xfrm>
-            <a:custGeom>
-              <a:avLst/>
-              <a:gdLst/>
-              <a:ahLst/>
-              <a:cxnLst/>
-              <a:rect l="l" t="t" r="r" b="b"/>
-              <a:pathLst>
-                <a:path w="11539855" h="5050790">
-                  <a:moveTo>
-                    <a:pt x="11189970" y="0"/>
-                  </a:moveTo>
-                  <a:lnTo>
-                    <a:pt x="349796" y="0"/>
-                  </a:lnTo>
-                  <a:lnTo>
-                    <a:pt x="302332" y="3192"/>
-                  </a:lnTo>
-                  <a:lnTo>
-                    <a:pt x="256808" y="12493"/>
-                  </a:lnTo>
-                  <a:lnTo>
-                    <a:pt x="213642" y="27485"/>
-                  </a:lnTo>
-                  <a:lnTo>
-                    <a:pt x="173250" y="47751"/>
-                  </a:lnTo>
-                  <a:lnTo>
-                    <a:pt x="136049" y="72876"/>
-                  </a:lnTo>
-                  <a:lnTo>
-                    <a:pt x="102455" y="102441"/>
-                  </a:lnTo>
-                  <a:lnTo>
-                    <a:pt x="72886" y="136030"/>
-                  </a:lnTo>
-                  <a:lnTo>
-                    <a:pt x="47759" y="173228"/>
-                  </a:lnTo>
-                  <a:lnTo>
-                    <a:pt x="27489" y="213615"/>
-                  </a:lnTo>
-                  <a:lnTo>
-                    <a:pt x="12495" y="256778"/>
-                  </a:lnTo>
-                  <a:lnTo>
-                    <a:pt x="3193" y="302297"/>
-                  </a:lnTo>
-                  <a:lnTo>
-                    <a:pt x="0" y="349757"/>
-                  </a:lnTo>
-                  <a:lnTo>
-                    <a:pt x="0" y="4700739"/>
-                  </a:lnTo>
-                  <a:lnTo>
-                    <a:pt x="3193" y="4748203"/>
-                  </a:lnTo>
-                  <a:lnTo>
-                    <a:pt x="12495" y="4793727"/>
-                  </a:lnTo>
-                  <a:lnTo>
-                    <a:pt x="27489" y="4836893"/>
-                  </a:lnTo>
-                  <a:lnTo>
-                    <a:pt x="47759" y="4877285"/>
-                  </a:lnTo>
-                  <a:lnTo>
-                    <a:pt x="72886" y="4914486"/>
-                  </a:lnTo>
-                  <a:lnTo>
-                    <a:pt x="102455" y="4948080"/>
-                  </a:lnTo>
-                  <a:lnTo>
-                    <a:pt x="136049" y="4977649"/>
-                  </a:lnTo>
-                  <a:lnTo>
-                    <a:pt x="173250" y="5002776"/>
-                  </a:lnTo>
-                  <a:lnTo>
-                    <a:pt x="213642" y="5023046"/>
-                  </a:lnTo>
-                  <a:lnTo>
-                    <a:pt x="256808" y="5038040"/>
-                  </a:lnTo>
-                  <a:lnTo>
-                    <a:pt x="302332" y="5047342"/>
-                  </a:lnTo>
-                  <a:lnTo>
-                    <a:pt x="349796" y="5050535"/>
-                  </a:lnTo>
-                  <a:lnTo>
-                    <a:pt x="11189970" y="5050535"/>
-                  </a:lnTo>
-                  <a:lnTo>
-                    <a:pt x="11237430" y="5047342"/>
-                  </a:lnTo>
-                  <a:lnTo>
-                    <a:pt x="11282949" y="5038040"/>
-                  </a:lnTo>
-                  <a:lnTo>
-                    <a:pt x="11326112" y="5023046"/>
-                  </a:lnTo>
-                  <a:lnTo>
-                    <a:pt x="11366500" y="5002776"/>
-                  </a:lnTo>
-                  <a:lnTo>
-                    <a:pt x="11403697" y="4977649"/>
-                  </a:lnTo>
-                  <a:lnTo>
-                    <a:pt x="11437286" y="4948080"/>
-                  </a:lnTo>
-                  <a:lnTo>
-                    <a:pt x="11466851" y="4914486"/>
-                  </a:lnTo>
-                  <a:lnTo>
-                    <a:pt x="11491976" y="4877285"/>
-                  </a:lnTo>
-                  <a:lnTo>
-                    <a:pt x="11512242" y="4836893"/>
-                  </a:lnTo>
-                  <a:lnTo>
-                    <a:pt x="11527234" y="4793727"/>
-                  </a:lnTo>
-                  <a:lnTo>
-                    <a:pt x="11536535" y="4748203"/>
-                  </a:lnTo>
-                  <a:lnTo>
-                    <a:pt x="11539728" y="4700739"/>
-                  </a:lnTo>
-                  <a:lnTo>
-                    <a:pt x="11539728" y="349757"/>
-                  </a:lnTo>
-                  <a:lnTo>
-                    <a:pt x="11536535" y="302297"/>
-                  </a:lnTo>
-                  <a:lnTo>
-                    <a:pt x="11527234" y="256778"/>
-                  </a:lnTo>
-                  <a:lnTo>
-                    <a:pt x="11512242" y="213615"/>
-                  </a:lnTo>
-                  <a:lnTo>
-                    <a:pt x="11491976" y="173227"/>
-                  </a:lnTo>
-                  <a:lnTo>
-                    <a:pt x="11466851" y="136030"/>
-                  </a:lnTo>
-                  <a:lnTo>
-                    <a:pt x="11437286" y="102441"/>
-                  </a:lnTo>
-                  <a:lnTo>
-                    <a:pt x="11403697" y="72876"/>
-                  </a:lnTo>
-                  <a:lnTo>
-                    <a:pt x="11366500" y="47751"/>
-                  </a:lnTo>
-                  <a:lnTo>
-                    <a:pt x="11326112" y="27485"/>
-                  </a:lnTo>
-                  <a:lnTo>
-                    <a:pt x="11282949" y="12493"/>
-                  </a:lnTo>
-                  <a:lnTo>
-                    <a:pt x="11237430" y="3192"/>
-                  </a:lnTo>
-                  <a:lnTo>
-                    <a:pt x="11189970" y="0"/>
-                  </a:lnTo>
-                  <a:close/>
-                </a:path>
-              </a:pathLst>
-            </a:custGeom>
-            <a:solidFill>
-              <a:srgbClr val="FFFFFF"/>
-            </a:solidFill>
-          </p:spPr>
-          <p:txBody>
-            <a:bodyPr wrap="square" lIns="0" tIns="0" rIns="0" bIns="0" rtlCol="0"/>
-            <a:lstStyle/>
-            <a:p/>
-          </p:txBody>
-        </p:sp>
       </p:grpSp>
       <p:sp>
         <p:nvSpPr>
@@ -2764,10 +2578,13 @@
           </p:nvPr>
         </p:nvSpPr>
         <p:spPr>
+          <a:xfrm>
+            <a:ext cx="548640" cy="0"/>
+          </a:xfrm>
           <a:prstGeom prst="rect"/>
         </p:spPr>
         <p:txBody>
-          <a:bodyPr wrap="square" lIns="0" tIns="43180" rIns="0" bIns="0" rtlCol="0" vert="horz">
+          <a:bodyPr wrap="none" lIns="0" tIns="43180" rIns="0" bIns="0" rtlCol="0" vert="horz">
             <a:spAutoFit/>
           </a:bodyPr>
           <a:lstStyle/>
@@ -2800,16 +2617,16 @@
         </p:nvSpPr>
         <p:spPr>
           <a:xfrm>
-            <a:off x="329184" y="1307592"/>
-            <a:ext cx="11539728" cy="5047488"/>
+            <a:off x="347472" y="320040"/>
+            <a:ext cx="4206240" cy="475488"/>
           </a:xfrm>
           <a:prstGeom prst="roundRect">
             <a:avLst>
-              <a:gd name="adj" fmla="val 6000"/>
+              <a:gd name="adj" fmla="val 50000"/>
             </a:avLst>
           </a:prstGeom>
           <a:solidFill>
-            <a:srgbClr val="FFFFFF"/>
+            <a:srgbClr val="FF0053"/>
           </a:solidFill>
           <a:ln>
             <a:noFill/>
@@ -2831,10 +2648,19 @@
           </a:fontRef>
         </p:style>
         <p:txBody>
-          <a:bodyPr rtlCol="0" anchor="ctr"/>
-          <a:lstStyle/>
-          <a:p>
-            <a:pPr algn="ctr"/>
+          <a:bodyPr rtlCol="0" anchor="ctr" wrap="square" lIns="128016" rIns="128016"/>
+          <a:lstStyle/>
+          <a:p>
+            <a:pPr algn="l"/>
+            <a:r>
+              <a:rPr sz="1300" b="1">
+                <a:solidFill>
+                  <a:srgbClr val="FFFFFF"/>
+                </a:solidFill>
+                <a:latin typeface="Montserrat"/>
+              </a:rPr>
+              <a:t>01 · Подробное описание решения</a:t>
+            </a:r>
           </a:p>
         </p:txBody>
       </p:sp>
@@ -2846,16 +2672,16 @@
         </p:nvSpPr>
         <p:spPr>
           <a:xfrm>
-            <a:off x="566928" y="1517904"/>
-            <a:ext cx="4023360" cy="475488"/>
+            <a:off x="502920" y="1371600"/>
+            <a:ext cx="3557016" cy="4206240"/>
           </a:xfrm>
           <a:prstGeom prst="roundRect">
             <a:avLst>
-              <a:gd name="adj" fmla="val 50000"/>
+              <a:gd name="adj" fmla="val 6000"/>
             </a:avLst>
           </a:prstGeom>
           <a:solidFill>
-            <a:srgbClr val="FF0053"/>
+            <a:srgbClr val="F7F4FA"/>
           </a:solidFill>
           <a:ln>
             <a:noFill/>
@@ -2877,32 +2703,145 @@
           </a:fontRef>
         </p:style>
         <p:txBody>
-          <a:bodyPr rtlCol="0" anchor="ctr" wrap="square" lIns="128016" rIns="128016"/>
-          <a:lstStyle/>
-          <a:p>
-            <a:pPr algn="l"/>
+          <a:bodyPr rtlCol="0" anchor="ctr"/>
+          <a:lstStyle/>
+          <a:p>
+            <a:pPr algn="ctr"/>
+          </a:p>
+        </p:txBody>
+      </p:sp>
+      <p:sp>
+        <p:nvSpPr>
+          <p:cNvPr id="8" name="TextBox 7"/>
+          <p:cNvSpPr txBox="1"/>
+          <p:nvPr/>
+        </p:nvSpPr>
+        <p:spPr>
+          <a:xfrm>
+            <a:off x="758952" y="1627632"/>
+            <a:ext cx="3044952" cy="640080"/>
+          </a:xfrm>
+          <a:prstGeom prst="rect">
+            <a:avLst/>
+          </a:prstGeom>
+          <a:noFill/>
+        </p:spPr>
+        <p:txBody>
+          <a:bodyPr wrap="square">
+            <a:spAutoFit/>
+          </a:bodyPr>
+          <a:lstStyle/>
+          <a:p>
+            <a:pPr algn="l">
+              <a:lnSpc>
+                <a:spcPct val="112000"/>
+              </a:lnSpc>
+              <a:spcAft>
+                <a:spcPts val="0"/>
+              </a:spcAft>
+            </a:pPr>
             <a:r>
               <a:rPr sz="1300" b="1">
                 <a:solidFill>
-                  <a:srgbClr val="FFFFFF"/>
-                </a:solidFill>
-                <a:latin typeface="Montserrat"/>
-              </a:rPr>
-              <a:t>01 · Подробное описание решения</a:t>
-            </a:r>
-          </a:p>
-        </p:txBody>
-      </p:sp>
-      <p:sp>
-        <p:nvSpPr>
-          <p:cNvPr id="8" name="Rounded Rectangle 7"/>
+                  <a:srgbClr val="520978"/>
+                </a:solidFill>
+                <a:latin typeface="Montserrat"/>
+              </a:rPr>
+              <a:t>Kanban-доска взаимодействий</a:t>
+            </a:r>
+          </a:p>
+        </p:txBody>
+      </p:sp>
+      <p:sp>
+        <p:nvSpPr>
+          <p:cNvPr id="9" name="TextBox 8"/>
+          <p:cNvSpPr txBox="1"/>
+          <p:nvPr/>
+        </p:nvSpPr>
+        <p:spPr>
+          <a:xfrm>
+            <a:off x="758952" y="2304288"/>
+            <a:ext cx="3044952" cy="3017520"/>
+          </a:xfrm>
+          <a:prstGeom prst="rect">
+            <a:avLst/>
+          </a:prstGeom>
+          <a:noFill/>
+        </p:spPr>
+        <p:txBody>
+          <a:bodyPr wrap="square">
+            <a:spAutoFit/>
+          </a:bodyPr>
+          <a:lstStyle/>
+          <a:p>
+            <a:pPr algn="l">
+              <a:lnSpc>
+                <a:spcPct val="122000"/>
+              </a:lnSpc>
+              <a:spcAft>
+                <a:spcPts val="1000"/>
+              </a:spcAft>
+            </a:pPr>
+            <a:r>
+              <a:rPr sz="1200" b="0">
+                <a:solidFill>
+                  <a:srgbClr val="1C1D22"/>
+                </a:solidFill>
+                <a:latin typeface="Montserrat"/>
+              </a:rPr>
+              <a:t>•  Перемещение карточек между этапами (drag-and-drop)</a:t>
+            </a:r>
+          </a:p>
+          <a:p>
+            <a:pPr algn="l">
+              <a:lnSpc>
+                <a:spcPct val="122000"/>
+              </a:lnSpc>
+              <a:spcAft>
+                <a:spcPts val="1000"/>
+              </a:spcAft>
+            </a:pPr>
+            <a:r>
+              <a:rPr sz="1200" b="0">
+                <a:solidFill>
+                  <a:srgbClr val="1C1D22"/>
+                </a:solidFill>
+                <a:latin typeface="Montserrat"/>
+              </a:rPr>
+              <a:t>•  Поиск по вузу и фильтр по ИТ-продукту</a:t>
+            </a:r>
+          </a:p>
+          <a:p>
+            <a:pPr algn="l">
+              <a:lnSpc>
+                <a:spcPct val="122000"/>
+              </a:lnSpc>
+              <a:spcAft>
+                <a:spcPts val="1000"/>
+              </a:spcAft>
+            </a:pPr>
+            <a:r>
+              <a:rPr sz="1200" b="0">
+                <a:solidFill>
+                  <a:srgbClr val="1C1D22"/>
+                </a:solidFill>
+                <a:latin typeface="Montserrat"/>
+              </a:rPr>
+              <a:t>•  Выбор этапа на мобильной версии</a:t>
+            </a:r>
+          </a:p>
+        </p:txBody>
+      </p:sp>
+      <p:sp>
+        <p:nvSpPr>
+          <p:cNvPr id="10" name="Rounded Rectangle 9"/>
           <p:cNvSpPr/>
           <p:nvPr/>
         </p:nvSpPr>
         <p:spPr>
           <a:xfrm>
-            <a:off x="685800" y="2240280"/>
-            <a:ext cx="3429000" cy="3703320"/>
+            <a:off x="4316882" y="1371600"/>
+            <a:ext cx="3557016" cy="4206240"/>
           </a:xfrm>
           <a:prstGeom prst="roundRect">
             <a:avLst>
@@ -2941,14 +2880,14 @@
       </p:sp>
       <p:sp>
         <p:nvSpPr>
-          <p:cNvPr id="9" name="TextBox 8"/>
+          <p:cNvPr id="11" name="TextBox 10"/>
           <p:cNvSpPr txBox="1"/>
           <p:nvPr/>
         </p:nvSpPr>
         <p:spPr>
           <a:xfrm>
-            <a:off x="905256" y="2450592"/>
-            <a:ext cx="3017520" cy="685800"/>
+            <a:off x="4572914" y="1627632"/>
+            <a:ext cx="3044952" cy="640080"/>
           </a:xfrm>
           <a:prstGeom prst="rect">
             <a:avLst/>
@@ -2976,21 +2915,21 @@
                 </a:solidFill>
                 <a:latin typeface="Montserrat"/>
               </a:rPr>
-              <a:t>Kanban-доска взаимодействий</a:t>
-            </a:r>
-          </a:p>
-        </p:txBody>
-      </p:sp>
-      <p:sp>
-        <p:nvSpPr>
-          <p:cNvPr id="10" name="TextBox 9"/>
+              <a:t>Карточка взаимодействия</a:t>
+            </a:r>
+          </a:p>
+        </p:txBody>
+      </p:sp>
+      <p:sp>
+        <p:nvSpPr>
+          <p:cNvPr id="12" name="TextBox 11"/>
           <p:cNvSpPr txBox="1"/>
           <p:nvPr/>
         </p:nvSpPr>
         <p:spPr>
           <a:xfrm>
-            <a:off x="905256" y="3127248"/>
-            <a:ext cx="3017520" cy="2651760"/>
+            <a:off x="4572914" y="2304288"/>
+            <a:ext cx="3044952" cy="3017520"/>
           </a:xfrm>
           <a:prstGeom prst="rect">
             <a:avLst/>
@@ -3005,72 +2944,72 @@
           <a:p>
             <a:pPr algn="l">
               <a:lnSpc>
-                <a:spcPct val="112000"/>
-              </a:lnSpc>
-              <a:spcAft>
-                <a:spcPts val="800"/>
-              </a:spcAft>
-            </a:pPr>
-            <a:r>
-              <a:rPr sz="1100" b="0">
+                <a:spcPct val="122000"/>
+              </a:lnSpc>
+              <a:spcAft>
+                <a:spcPts val="1000"/>
+              </a:spcAft>
+            </a:pPr>
+            <a:r>
+              <a:rPr sz="1200" b="0">
                 <a:solidFill>
                   <a:srgbClr val="1C1D22"/>
                 </a:solidFill>
                 <a:latin typeface="Montserrat"/>
               </a:rPr>
-              <a:t>•  Перемещение карточек между этапами (drag-and-drop)</a:t>
+              <a:t>•  Вуз, продукт, направление и договор</a:t>
             </a:r>
           </a:p>
           <a:p>
             <a:pPr algn="l">
               <a:lnSpc>
-                <a:spcPct val="112000"/>
-              </a:lnSpc>
-              <a:spcAft>
-                <a:spcPts val="800"/>
-              </a:spcAft>
-            </a:pPr>
-            <a:r>
-              <a:rPr sz="1100" b="0">
+                <a:spcPct val="122000"/>
+              </a:lnSpc>
+              <a:spcAft>
+                <a:spcPts val="1000"/>
+              </a:spcAft>
+            </a:pPr>
+            <a:r>
+              <a:rPr sz="1200" b="0">
                 <a:solidFill>
                   <a:srgbClr val="1C1D22"/>
                 </a:solidFill>
                 <a:latin typeface="Montserrat"/>
               </a:rPr>
-              <a:t>•  Поиск по вузу и фильтр по ИТ-продукту</a:t>
+              <a:t>•  Задачи со сроками и ответственными</a:t>
             </a:r>
           </a:p>
           <a:p>
             <a:pPr algn="l">
               <a:lnSpc>
-                <a:spcPct val="112000"/>
-              </a:lnSpc>
-              <a:spcAft>
-                <a:spcPts val="800"/>
-              </a:spcAft>
-            </a:pPr>
-            <a:r>
-              <a:rPr sz="1100" b="0">
+                <a:spcPct val="122000"/>
+              </a:lnSpc>
+              <a:spcAft>
+                <a:spcPts val="1000"/>
+              </a:spcAft>
+            </a:pPr>
+            <a:r>
+              <a:rPr sz="1200" b="0">
                 <a:solidFill>
                   <a:srgbClr val="1C1D22"/>
                 </a:solidFill>
                 <a:latin typeface="Montserrat"/>
               </a:rPr>
-              <a:t>•  Отдельный выбор этапа на мобильной версии</a:t>
-            </a:r>
-          </a:p>
-        </p:txBody>
-      </p:sp>
-      <p:sp>
-        <p:nvSpPr>
-          <p:cNvPr id="11" name="Rounded Rectangle 10"/>
+              <a:t>•  Комментарии, файлы и история изменений</a:t>
+            </a:r>
+          </a:p>
+        </p:txBody>
+      </p:sp>
+      <p:sp>
+        <p:nvSpPr>
+          <p:cNvPr id="13" name="Rounded Rectangle 12"/>
           <p:cNvSpPr/>
           <p:nvPr/>
         </p:nvSpPr>
         <p:spPr>
           <a:xfrm>
-            <a:off x="4288536" y="2240280"/>
-            <a:ext cx="3429000" cy="3703320"/>
+            <a:off x="8130844" y="1371600"/>
+            <a:ext cx="3557016" cy="4206240"/>
           </a:xfrm>
           <a:prstGeom prst="roundRect">
             <a:avLst>
@@ -3109,14 +3048,14 @@
       </p:sp>
       <p:sp>
         <p:nvSpPr>
-          <p:cNvPr id="12" name="TextBox 11"/>
+          <p:cNvPr id="14" name="TextBox 13"/>
           <p:cNvSpPr txBox="1"/>
           <p:nvPr/>
         </p:nvSpPr>
         <p:spPr>
           <a:xfrm>
-            <a:off x="4507992" y="2450592"/>
-            <a:ext cx="3017520" cy="685800"/>
+            <a:off x="8386876" y="1627632"/>
+            <a:ext cx="3044952" cy="640080"/>
           </a:xfrm>
           <a:prstGeom prst="rect">
             <a:avLst/>
@@ -3144,21 +3083,21 @@
                 </a:solidFill>
                 <a:latin typeface="Montserrat"/>
               </a:rPr>
-              <a:t>Карточка взаимодействия</a:t>
-            </a:r>
-          </a:p>
-        </p:txBody>
-      </p:sp>
-      <p:sp>
-        <p:nvSpPr>
-          <p:cNvPr id="13" name="TextBox 12"/>
+              <a:t>Управляемость и отчётность</a:t>
+            </a:r>
+          </a:p>
+        </p:txBody>
+      </p:sp>
+      <p:sp>
+        <p:nvSpPr>
+          <p:cNvPr id="15" name="TextBox 14"/>
           <p:cNvSpPr txBox="1"/>
           <p:nvPr/>
         </p:nvSpPr>
         <p:spPr>
           <a:xfrm>
-            <a:off x="4507992" y="3127248"/>
-            <a:ext cx="3017520" cy="2651760"/>
+            <a:off x="8386876" y="2304288"/>
+            <a:ext cx="3044952" cy="3017520"/>
           </a:xfrm>
           <a:prstGeom prst="rect">
             <a:avLst/>
@@ -3173,220 +3112,52 @@
           <a:p>
             <a:pPr algn="l">
               <a:lnSpc>
-                <a:spcPct val="112000"/>
-              </a:lnSpc>
-              <a:spcAft>
-                <a:spcPts val="800"/>
-              </a:spcAft>
-            </a:pPr>
-            <a:r>
-              <a:rPr sz="1100" b="0">
+                <a:spcPct val="122000"/>
+              </a:lnSpc>
+              <a:spcAft>
+                <a:spcPts val="1000"/>
+              </a:spcAft>
+            </a:pPr>
+            <a:r>
+              <a:rPr sz="1200" b="0">
                 <a:solidFill>
                   <a:srgbClr val="1C1D22"/>
                 </a:solidFill>
                 <a:latin typeface="Montserrat"/>
               </a:rPr>
-              <a:t>•  Вуз, продукт, направление и договор</a:t>
+              <a:t>•  Настройка этапов workflow администратором</a:t>
             </a:r>
           </a:p>
           <a:p>
             <a:pPr algn="l">
               <a:lnSpc>
-                <a:spcPct val="112000"/>
-              </a:lnSpc>
-              <a:spcAft>
-                <a:spcPts val="800"/>
-              </a:spcAft>
-            </a:pPr>
-            <a:r>
-              <a:rPr sz="1100" b="0">
+                <a:spcPct val="122000"/>
+              </a:lnSpc>
+              <a:spcAft>
+                <a:spcPts val="1000"/>
+              </a:spcAft>
+            </a:pPr>
+            <a:r>
+              <a:rPr sz="1200" b="0">
                 <a:solidFill>
                   <a:srgbClr val="1C1D22"/>
                 </a:solidFill>
                 <a:latin typeface="Montserrat"/>
               </a:rPr>
-              <a:t>•  Задачи со сроками и ответственными</a:t>
+              <a:t>•  Интеграция с LMS и CMS: dry-run и импорт</a:t>
             </a:r>
           </a:p>
           <a:p>
             <a:pPr algn="l">
               <a:lnSpc>
-                <a:spcPct val="112000"/>
-              </a:lnSpc>
-              <a:spcAft>
-                <a:spcPts val="800"/>
-              </a:spcAft>
-            </a:pPr>
-            <a:r>
-              <a:rPr sz="1100" b="0">
-                <a:solidFill>
-                  <a:srgbClr val="1C1D22"/>
-                </a:solidFill>
-                <a:latin typeface="Montserrat"/>
-              </a:rPr>
-              <a:t>•  Комментарии, файлы и история изменений</a:t>
-            </a:r>
-          </a:p>
-        </p:txBody>
-      </p:sp>
-      <p:sp>
-        <p:nvSpPr>
-          <p:cNvPr id="14" name="Rounded Rectangle 13"/>
-          <p:cNvSpPr/>
-          <p:nvPr/>
-        </p:nvSpPr>
-        <p:spPr>
-          <a:xfrm>
-            <a:off x="7891271" y="2240280"/>
-            <a:ext cx="3429000" cy="3703320"/>
-          </a:xfrm>
-          <a:prstGeom prst="roundRect">
-            <a:avLst>
-              <a:gd name="adj" fmla="val 6000"/>
-            </a:avLst>
-          </a:prstGeom>
-          <a:solidFill>
-            <a:srgbClr val="F7F4FA"/>
-          </a:solidFill>
-          <a:ln>
-            <a:noFill/>
-          </a:ln>
-          <a:effectLst/>
-        </p:spPr>
-        <p:style>
-          <a:lnRef idx="1">
-            <a:schemeClr val="accent1"/>
-          </a:lnRef>
-          <a:fillRef idx="3">
-            <a:schemeClr val="accent1"/>
-          </a:fillRef>
-          <a:effectRef idx="2">
-            <a:schemeClr val="accent1"/>
-          </a:effectRef>
-          <a:fontRef idx="minor">
-            <a:schemeClr val="lt1"/>
-          </a:fontRef>
-        </p:style>
-        <p:txBody>
-          <a:bodyPr rtlCol="0" anchor="ctr"/>
-          <a:lstStyle/>
-          <a:p>
-            <a:pPr algn="ctr"/>
-          </a:p>
-        </p:txBody>
-      </p:sp>
-      <p:sp>
-        <p:nvSpPr>
-          <p:cNvPr id="15" name="TextBox 14"/>
-          <p:cNvSpPr txBox="1"/>
-          <p:nvPr/>
-        </p:nvSpPr>
-        <p:spPr>
-          <a:xfrm>
-            <a:off x="8110727" y="2450592"/>
-            <a:ext cx="3017520" cy="685800"/>
-          </a:xfrm>
-          <a:prstGeom prst="rect">
-            <a:avLst/>
-          </a:prstGeom>
-          <a:noFill/>
-        </p:spPr>
-        <p:txBody>
-          <a:bodyPr wrap="square">
-            <a:spAutoFit/>
-          </a:bodyPr>
-          <a:lstStyle/>
-          <a:p>
-            <a:pPr algn="l">
-              <a:lnSpc>
-                <a:spcPct val="112000"/>
-              </a:lnSpc>
-              <a:spcAft>
-                <a:spcPts val="0"/>
-              </a:spcAft>
-            </a:pPr>
-            <a:r>
-              <a:rPr sz="1300" b="1">
-                <a:solidFill>
-                  <a:srgbClr val="520978"/>
-                </a:solidFill>
-                <a:latin typeface="Montserrat"/>
-              </a:rPr>
-              <a:t>Управляемость и отчётность</a:t>
-            </a:r>
-          </a:p>
-        </p:txBody>
-      </p:sp>
-      <p:sp>
-        <p:nvSpPr>
-          <p:cNvPr id="16" name="TextBox 15"/>
-          <p:cNvSpPr txBox="1"/>
-          <p:nvPr/>
-        </p:nvSpPr>
-        <p:spPr>
-          <a:xfrm>
-            <a:off x="8110727" y="3127248"/>
-            <a:ext cx="3017520" cy="2651760"/>
-          </a:xfrm>
-          <a:prstGeom prst="rect">
-            <a:avLst/>
-          </a:prstGeom>
-          <a:noFill/>
-        </p:spPr>
-        <p:txBody>
-          <a:bodyPr wrap="square">
-            <a:spAutoFit/>
-          </a:bodyPr>
-          <a:lstStyle/>
-          <a:p>
-            <a:pPr algn="l">
-              <a:lnSpc>
-                <a:spcPct val="112000"/>
-              </a:lnSpc>
-              <a:spcAft>
-                <a:spcPts val="800"/>
-              </a:spcAft>
-            </a:pPr>
-            <a:r>
-              <a:rPr sz="1100" b="0">
-                <a:solidFill>
-                  <a:srgbClr val="1C1D22"/>
-                </a:solidFill>
-                <a:latin typeface="Montserrat"/>
-              </a:rPr>
-              <a:t>•  Настройка этапов workflow администратором</a:t>
-            </a:r>
-          </a:p>
-          <a:p>
-            <a:pPr algn="l">
-              <a:lnSpc>
-                <a:spcPct val="112000"/>
-              </a:lnSpc>
-              <a:spcAft>
-                <a:spcPts val="800"/>
-              </a:spcAft>
-            </a:pPr>
-            <a:r>
-              <a:rPr sz="1100" b="0">
-                <a:solidFill>
-                  <a:srgbClr val="1C1D22"/>
-                </a:solidFill>
-                <a:latin typeface="Montserrat"/>
-              </a:rPr>
-              <a:t>•  Интеграция с LMS и CMS: dry-run и импорт</a:t>
-            </a:r>
-          </a:p>
-          <a:p>
-            <a:pPr algn="l">
-              <a:lnSpc>
-                <a:spcPct val="112000"/>
-              </a:lnSpc>
-              <a:spcAft>
-                <a:spcPts val="800"/>
-              </a:spcAft>
-            </a:pPr>
-            <a:r>
-              <a:rPr sz="1100" b="0">
+                <a:spcPct val="122000"/>
+              </a:lnSpc>
+              <a:spcAft>
+                <a:spcPts val="1000"/>
+              </a:spcAft>
+            </a:pPr>
+            <a:r>
+              <a:rPr sz="1200" b="0">
                 <a:solidFill>
                   <a:srgbClr val="1C1D22"/>
                 </a:solidFill>
@@ -3458,636 +3229,6 @@
             </a:prstGeom>
           </p:spPr>
         </p:pic>
-        <p:sp>
-          <p:nvSpPr>
-            <p:cNvPr id="4" name="object 4"/>
-            <p:cNvSpPr/>
-            <p:nvPr/>
-          </p:nvSpPr>
-          <p:spPr>
-            <a:xfrm>
-              <a:off x="347472" y="323088"/>
-              <a:ext cx="3108960" cy="622300"/>
-            </a:xfrm>
-            <a:custGeom>
-              <a:avLst/>
-              <a:gdLst/>
-              <a:ahLst/>
-              <a:cxnLst/>
-              <a:rect l="l" t="t" r="r" b="b"/>
-              <a:pathLst>
-                <a:path w="3108960" h="622300">
-                  <a:moveTo>
-                    <a:pt x="2992628" y="0"/>
-                  </a:moveTo>
-                  <a:lnTo>
-                    <a:pt x="116319" y="0"/>
-                  </a:lnTo>
-                  <a:lnTo>
-                    <a:pt x="71039" y="9140"/>
-                  </a:lnTo>
-                  <a:lnTo>
-                    <a:pt x="34066" y="34067"/>
-                  </a:lnTo>
-                  <a:lnTo>
-                    <a:pt x="9139" y="71044"/>
-                  </a:lnTo>
-                  <a:lnTo>
-                    <a:pt x="0" y="116331"/>
-                  </a:lnTo>
-                  <a:lnTo>
-                    <a:pt x="0" y="505459"/>
-                  </a:lnTo>
-                  <a:lnTo>
-                    <a:pt x="9139" y="550747"/>
-                  </a:lnTo>
-                  <a:lnTo>
-                    <a:pt x="34066" y="587724"/>
-                  </a:lnTo>
-                  <a:lnTo>
-                    <a:pt x="71039" y="612651"/>
-                  </a:lnTo>
-                  <a:lnTo>
-                    <a:pt x="116319" y="621791"/>
-                  </a:lnTo>
-                  <a:lnTo>
-                    <a:pt x="2992628" y="621791"/>
-                  </a:lnTo>
-                  <a:lnTo>
-                    <a:pt x="3037915" y="612651"/>
-                  </a:lnTo>
-                  <a:lnTo>
-                    <a:pt x="3074892" y="587724"/>
-                  </a:lnTo>
-                  <a:lnTo>
-                    <a:pt x="3099819" y="550747"/>
-                  </a:lnTo>
-                  <a:lnTo>
-                    <a:pt x="3108960" y="505459"/>
-                  </a:lnTo>
-                  <a:lnTo>
-                    <a:pt x="3108960" y="116331"/>
-                  </a:lnTo>
-                  <a:lnTo>
-                    <a:pt x="3099819" y="71044"/>
-                  </a:lnTo>
-                  <a:lnTo>
-                    <a:pt x="3074892" y="34067"/>
-                  </a:lnTo>
-                  <a:lnTo>
-                    <a:pt x="3037915" y="9140"/>
-                  </a:lnTo>
-                  <a:lnTo>
-                    <a:pt x="2992628" y="0"/>
-                  </a:lnTo>
-                  <a:close/>
-                </a:path>
-              </a:pathLst>
-            </a:custGeom>
-            <a:solidFill>
-              <a:srgbClr val="FF0052"/>
-            </a:solidFill>
-          </p:spPr>
-          <p:txBody>
-            <a:bodyPr wrap="square" lIns="0" tIns="0" rIns="0" bIns="0" rtlCol="0"/>
-            <a:lstStyle/>
-            <a:p/>
-          </p:txBody>
-        </p:sp>
-        <p:sp>
-          <p:nvSpPr>
-            <p:cNvPr id="5" name="object 5"/>
-            <p:cNvSpPr/>
-            <p:nvPr/>
-          </p:nvSpPr>
-          <p:spPr>
-            <a:xfrm>
-              <a:off x="347472" y="1520951"/>
-              <a:ext cx="11497310" cy="4678680"/>
-            </a:xfrm>
-            <a:custGeom>
-              <a:avLst/>
-              <a:gdLst/>
-              <a:ahLst/>
-              <a:cxnLst/>
-              <a:rect l="l" t="t" r="r" b="b"/>
-              <a:pathLst>
-                <a:path w="11497310" h="4678680">
-                  <a:moveTo>
-                    <a:pt x="2670048" y="262255"/>
-                  </a:moveTo>
-                  <a:lnTo>
-                    <a:pt x="2665819" y="215099"/>
-                  </a:lnTo>
-                  <a:lnTo>
-                    <a:pt x="2653639" y="170726"/>
-                  </a:lnTo>
-                  <a:lnTo>
-                    <a:pt x="2634246" y="129870"/>
-                  </a:lnTo>
-                  <a:lnTo>
-                    <a:pt x="2608389" y="93268"/>
-                  </a:lnTo>
-                  <a:lnTo>
-                    <a:pt x="2576779" y="61658"/>
-                  </a:lnTo>
-                  <a:lnTo>
-                    <a:pt x="2540177" y="35801"/>
-                  </a:lnTo>
-                  <a:lnTo>
-                    <a:pt x="2499322" y="16408"/>
-                  </a:lnTo>
-                  <a:lnTo>
-                    <a:pt x="2454948" y="4229"/>
-                  </a:lnTo>
-                  <a:lnTo>
-                    <a:pt x="2407793" y="0"/>
-                  </a:lnTo>
-                  <a:lnTo>
-                    <a:pt x="262229" y="0"/>
-                  </a:lnTo>
-                  <a:lnTo>
-                    <a:pt x="215087" y="4229"/>
-                  </a:lnTo>
-                  <a:lnTo>
-                    <a:pt x="170726" y="16408"/>
-                  </a:lnTo>
-                  <a:lnTo>
-                    <a:pt x="129870" y="35801"/>
-                  </a:lnTo>
-                  <a:lnTo>
-                    <a:pt x="93268" y="61658"/>
-                  </a:lnTo>
-                  <a:lnTo>
-                    <a:pt x="61671" y="93268"/>
-                  </a:lnTo>
-                  <a:lnTo>
-                    <a:pt x="35788" y="129870"/>
-                  </a:lnTo>
-                  <a:lnTo>
-                    <a:pt x="16395" y="170726"/>
-                  </a:lnTo>
-                  <a:lnTo>
-                    <a:pt x="4216" y="215099"/>
-                  </a:lnTo>
-                  <a:lnTo>
-                    <a:pt x="0" y="262255"/>
-                  </a:lnTo>
-                  <a:lnTo>
-                    <a:pt x="0" y="4416450"/>
-                  </a:lnTo>
-                  <a:lnTo>
-                    <a:pt x="4216" y="4463593"/>
-                  </a:lnTo>
-                  <a:lnTo>
-                    <a:pt x="16395" y="4507954"/>
-                  </a:lnTo>
-                  <a:lnTo>
-                    <a:pt x="35788" y="4548810"/>
-                  </a:lnTo>
-                  <a:lnTo>
-                    <a:pt x="61671" y="4585411"/>
-                  </a:lnTo>
-                  <a:lnTo>
-                    <a:pt x="93268" y="4617009"/>
-                  </a:lnTo>
-                  <a:lnTo>
-                    <a:pt x="129870" y="4642891"/>
-                  </a:lnTo>
-                  <a:lnTo>
-                    <a:pt x="170726" y="4662284"/>
-                  </a:lnTo>
-                  <a:lnTo>
-                    <a:pt x="215087" y="4674463"/>
-                  </a:lnTo>
-                  <a:lnTo>
-                    <a:pt x="262229" y="4678680"/>
-                  </a:lnTo>
-                  <a:lnTo>
-                    <a:pt x="2407793" y="4678680"/>
-                  </a:lnTo>
-                  <a:lnTo>
-                    <a:pt x="2454948" y="4674463"/>
-                  </a:lnTo>
-                  <a:lnTo>
-                    <a:pt x="2499322" y="4662284"/>
-                  </a:lnTo>
-                  <a:lnTo>
-                    <a:pt x="2540177" y="4642891"/>
-                  </a:lnTo>
-                  <a:lnTo>
-                    <a:pt x="2576779" y="4617009"/>
-                  </a:lnTo>
-                  <a:lnTo>
-                    <a:pt x="2608389" y="4585411"/>
-                  </a:lnTo>
-                  <a:lnTo>
-                    <a:pt x="2634246" y="4548810"/>
-                  </a:lnTo>
-                  <a:lnTo>
-                    <a:pt x="2653639" y="4507954"/>
-                  </a:lnTo>
-                  <a:lnTo>
-                    <a:pt x="2665819" y="4463593"/>
-                  </a:lnTo>
-                  <a:lnTo>
-                    <a:pt x="2670048" y="4416450"/>
-                  </a:lnTo>
-                  <a:lnTo>
-                    <a:pt x="2670048" y="262255"/>
-                  </a:lnTo>
-                  <a:close/>
-                </a:path>
-                <a:path w="11497310" h="4678680">
-                  <a:moveTo>
-                    <a:pt x="5614416" y="262509"/>
-                  </a:moveTo>
-                  <a:lnTo>
-                    <a:pt x="5610187" y="215315"/>
-                  </a:lnTo>
-                  <a:lnTo>
-                    <a:pt x="5597995" y="170891"/>
-                  </a:lnTo>
-                  <a:lnTo>
-                    <a:pt x="5578576" y="129997"/>
-                  </a:lnTo>
-                  <a:lnTo>
-                    <a:pt x="5552694" y="93357"/>
-                  </a:lnTo>
-                  <a:lnTo>
-                    <a:pt x="5521058" y="61722"/>
-                  </a:lnTo>
-                  <a:lnTo>
-                    <a:pt x="5484419" y="35839"/>
-                  </a:lnTo>
-                  <a:lnTo>
-                    <a:pt x="5443525" y="16421"/>
-                  </a:lnTo>
-                  <a:lnTo>
-                    <a:pt x="5399100" y="4229"/>
-                  </a:lnTo>
-                  <a:lnTo>
-                    <a:pt x="5351907" y="0"/>
-                  </a:lnTo>
-                  <a:lnTo>
-                    <a:pt x="3203829" y="0"/>
-                  </a:lnTo>
-                  <a:lnTo>
-                    <a:pt x="3156623" y="4229"/>
-                  </a:lnTo>
-                  <a:lnTo>
-                    <a:pt x="3112198" y="16421"/>
-                  </a:lnTo>
-                  <a:lnTo>
-                    <a:pt x="3071304" y="35839"/>
-                  </a:lnTo>
-                  <a:lnTo>
-                    <a:pt x="3034665" y="61722"/>
-                  </a:lnTo>
-                  <a:lnTo>
-                    <a:pt x="3003029" y="93357"/>
-                  </a:lnTo>
-                  <a:lnTo>
-                    <a:pt x="2977146" y="129997"/>
-                  </a:lnTo>
-                  <a:lnTo>
-                    <a:pt x="2957728" y="170891"/>
-                  </a:lnTo>
-                  <a:lnTo>
-                    <a:pt x="2945536" y="215315"/>
-                  </a:lnTo>
-                  <a:lnTo>
-                    <a:pt x="2941307" y="262509"/>
-                  </a:lnTo>
-                  <a:lnTo>
-                    <a:pt x="2941307" y="4416158"/>
-                  </a:lnTo>
-                  <a:lnTo>
-                    <a:pt x="2945536" y="4463351"/>
-                  </a:lnTo>
-                  <a:lnTo>
-                    <a:pt x="2957728" y="4507763"/>
-                  </a:lnTo>
-                  <a:lnTo>
-                    <a:pt x="2977146" y="4548657"/>
-                  </a:lnTo>
-                  <a:lnTo>
-                    <a:pt x="3003029" y="4585297"/>
-                  </a:lnTo>
-                  <a:lnTo>
-                    <a:pt x="3034665" y="4616945"/>
-                  </a:lnTo>
-                  <a:lnTo>
-                    <a:pt x="3071304" y="4642840"/>
-                  </a:lnTo>
-                  <a:lnTo>
-                    <a:pt x="3112198" y="4662259"/>
-                  </a:lnTo>
-                  <a:lnTo>
-                    <a:pt x="3156623" y="4674451"/>
-                  </a:lnTo>
-                  <a:lnTo>
-                    <a:pt x="3203829" y="4678680"/>
-                  </a:lnTo>
-                  <a:lnTo>
-                    <a:pt x="5351907" y="4678680"/>
-                  </a:lnTo>
-                  <a:lnTo>
-                    <a:pt x="5399100" y="4674451"/>
-                  </a:lnTo>
-                  <a:lnTo>
-                    <a:pt x="5443525" y="4662259"/>
-                  </a:lnTo>
-                  <a:lnTo>
-                    <a:pt x="5484419" y="4642840"/>
-                  </a:lnTo>
-                  <a:lnTo>
-                    <a:pt x="5521058" y="4616945"/>
-                  </a:lnTo>
-                  <a:lnTo>
-                    <a:pt x="5552694" y="4585297"/>
-                  </a:lnTo>
-                  <a:lnTo>
-                    <a:pt x="5578576" y="4548657"/>
-                  </a:lnTo>
-                  <a:lnTo>
-                    <a:pt x="5597995" y="4507763"/>
-                  </a:lnTo>
-                  <a:lnTo>
-                    <a:pt x="5610187" y="4463351"/>
-                  </a:lnTo>
-                  <a:lnTo>
-                    <a:pt x="5614416" y="4416158"/>
-                  </a:lnTo>
-                  <a:lnTo>
-                    <a:pt x="5614416" y="262509"/>
-                  </a:lnTo>
-                  <a:close/>
-                </a:path>
-                <a:path w="11497310" h="4678680">
-                  <a:moveTo>
-                    <a:pt x="8555736" y="262509"/>
-                  </a:moveTo>
-                  <a:lnTo>
-                    <a:pt x="8551507" y="215315"/>
-                  </a:lnTo>
-                  <a:lnTo>
-                    <a:pt x="8539315" y="170891"/>
-                  </a:lnTo>
-                  <a:lnTo>
-                    <a:pt x="8519897" y="129997"/>
-                  </a:lnTo>
-                  <a:lnTo>
-                    <a:pt x="8494014" y="93357"/>
-                  </a:lnTo>
-                  <a:lnTo>
-                    <a:pt x="8462378" y="61722"/>
-                  </a:lnTo>
-                  <a:lnTo>
-                    <a:pt x="8425739" y="35839"/>
-                  </a:lnTo>
-                  <a:lnTo>
-                    <a:pt x="8384845" y="16421"/>
-                  </a:lnTo>
-                  <a:lnTo>
-                    <a:pt x="8340420" y="4229"/>
-                  </a:lnTo>
-                  <a:lnTo>
-                    <a:pt x="8293227" y="0"/>
-                  </a:lnTo>
-                  <a:lnTo>
-                    <a:pt x="6145149" y="0"/>
-                  </a:lnTo>
-                  <a:lnTo>
-                    <a:pt x="6097943" y="4229"/>
-                  </a:lnTo>
-                  <a:lnTo>
-                    <a:pt x="6053518" y="16421"/>
-                  </a:lnTo>
-                  <a:lnTo>
-                    <a:pt x="6012624" y="35839"/>
-                  </a:lnTo>
-                  <a:lnTo>
-                    <a:pt x="5975985" y="61722"/>
-                  </a:lnTo>
-                  <a:lnTo>
-                    <a:pt x="5944349" y="93357"/>
-                  </a:lnTo>
-                  <a:lnTo>
-                    <a:pt x="5918466" y="129997"/>
-                  </a:lnTo>
-                  <a:lnTo>
-                    <a:pt x="5899048" y="170891"/>
-                  </a:lnTo>
-                  <a:lnTo>
-                    <a:pt x="5886856" y="215315"/>
-                  </a:lnTo>
-                  <a:lnTo>
-                    <a:pt x="5882640" y="262509"/>
-                  </a:lnTo>
-                  <a:lnTo>
-                    <a:pt x="5882640" y="4416158"/>
-                  </a:lnTo>
-                  <a:lnTo>
-                    <a:pt x="5886856" y="4463351"/>
-                  </a:lnTo>
-                  <a:lnTo>
-                    <a:pt x="5899048" y="4507763"/>
-                  </a:lnTo>
-                  <a:lnTo>
-                    <a:pt x="5918466" y="4548657"/>
-                  </a:lnTo>
-                  <a:lnTo>
-                    <a:pt x="5944349" y="4585297"/>
-                  </a:lnTo>
-                  <a:lnTo>
-                    <a:pt x="5975985" y="4616945"/>
-                  </a:lnTo>
-                  <a:lnTo>
-                    <a:pt x="6012624" y="4642840"/>
-                  </a:lnTo>
-                  <a:lnTo>
-                    <a:pt x="6053518" y="4662259"/>
-                  </a:lnTo>
-                  <a:lnTo>
-                    <a:pt x="6097943" y="4674451"/>
-                  </a:lnTo>
-                  <a:lnTo>
-                    <a:pt x="6145149" y="4678680"/>
-                  </a:lnTo>
-                  <a:lnTo>
-                    <a:pt x="8293227" y="4678680"/>
-                  </a:lnTo>
-                  <a:lnTo>
-                    <a:pt x="8340420" y="4674451"/>
-                  </a:lnTo>
-                  <a:lnTo>
-                    <a:pt x="8384845" y="4662259"/>
-                  </a:lnTo>
-                  <a:lnTo>
-                    <a:pt x="8425739" y="4642840"/>
-                  </a:lnTo>
-                  <a:lnTo>
-                    <a:pt x="8462378" y="4616945"/>
-                  </a:lnTo>
-                  <a:lnTo>
-                    <a:pt x="8494014" y="4585297"/>
-                  </a:lnTo>
-                  <a:lnTo>
-                    <a:pt x="8519897" y="4548657"/>
-                  </a:lnTo>
-                  <a:lnTo>
-                    <a:pt x="8539315" y="4507763"/>
-                  </a:lnTo>
-                  <a:lnTo>
-                    <a:pt x="8551507" y="4463351"/>
-                  </a:lnTo>
-                  <a:lnTo>
-                    <a:pt x="8555736" y="4416158"/>
-                  </a:lnTo>
-                  <a:lnTo>
-                    <a:pt x="8555736" y="262509"/>
-                  </a:lnTo>
-                  <a:close/>
-                </a:path>
-                <a:path w="11497310" h="4678680">
-                  <a:moveTo>
-                    <a:pt x="11497056" y="262255"/>
-                  </a:moveTo>
-                  <a:lnTo>
-                    <a:pt x="11492827" y="215099"/>
-                  </a:lnTo>
-                  <a:lnTo>
-                    <a:pt x="11480648" y="170726"/>
-                  </a:lnTo>
-                  <a:lnTo>
-                    <a:pt x="11461255" y="129870"/>
-                  </a:lnTo>
-                  <a:lnTo>
-                    <a:pt x="11435398" y="93268"/>
-                  </a:lnTo>
-                  <a:lnTo>
-                    <a:pt x="11403787" y="61658"/>
-                  </a:lnTo>
-                  <a:lnTo>
-                    <a:pt x="11367186" y="35801"/>
-                  </a:lnTo>
-                  <a:lnTo>
-                    <a:pt x="11326330" y="16408"/>
-                  </a:lnTo>
-                  <a:lnTo>
-                    <a:pt x="11281956" y="4229"/>
-                  </a:lnTo>
-                  <a:lnTo>
-                    <a:pt x="11234801" y="0"/>
-                  </a:lnTo>
-                  <a:lnTo>
-                    <a:pt x="9089263" y="0"/>
-                  </a:lnTo>
-                  <a:lnTo>
-                    <a:pt x="9042095" y="4229"/>
-                  </a:lnTo>
-                  <a:lnTo>
-                    <a:pt x="8997721" y="16408"/>
-                  </a:lnTo>
-                  <a:lnTo>
-                    <a:pt x="8956865" y="35801"/>
-                  </a:lnTo>
-                  <a:lnTo>
-                    <a:pt x="8920264" y="61658"/>
-                  </a:lnTo>
-                  <a:lnTo>
-                    <a:pt x="8888654" y="93268"/>
-                  </a:lnTo>
-                  <a:lnTo>
-                    <a:pt x="8862797" y="129870"/>
-                  </a:lnTo>
-                  <a:lnTo>
-                    <a:pt x="8843404" y="170726"/>
-                  </a:lnTo>
-                  <a:lnTo>
-                    <a:pt x="8831224" y="215099"/>
-                  </a:lnTo>
-                  <a:lnTo>
-                    <a:pt x="8827008" y="262255"/>
-                  </a:lnTo>
-                  <a:lnTo>
-                    <a:pt x="8827008" y="4416450"/>
-                  </a:lnTo>
-                  <a:lnTo>
-                    <a:pt x="8831224" y="4463593"/>
-                  </a:lnTo>
-                  <a:lnTo>
-                    <a:pt x="8843404" y="4507954"/>
-                  </a:lnTo>
-                  <a:lnTo>
-                    <a:pt x="8862797" y="4548810"/>
-                  </a:lnTo>
-                  <a:lnTo>
-                    <a:pt x="8888654" y="4585411"/>
-                  </a:lnTo>
-                  <a:lnTo>
-                    <a:pt x="8920264" y="4617009"/>
-                  </a:lnTo>
-                  <a:lnTo>
-                    <a:pt x="8956865" y="4642891"/>
-                  </a:lnTo>
-                  <a:lnTo>
-                    <a:pt x="8997721" y="4662284"/>
-                  </a:lnTo>
-                  <a:lnTo>
-                    <a:pt x="9042095" y="4674463"/>
-                  </a:lnTo>
-                  <a:lnTo>
-                    <a:pt x="9089263" y="4678680"/>
-                  </a:lnTo>
-                  <a:lnTo>
-                    <a:pt x="11234801" y="4678680"/>
-                  </a:lnTo>
-                  <a:lnTo>
-                    <a:pt x="11281956" y="4674463"/>
-                  </a:lnTo>
-                  <a:lnTo>
-                    <a:pt x="11326330" y="4662284"/>
-                  </a:lnTo>
-                  <a:lnTo>
-                    <a:pt x="11367186" y="4642891"/>
-                  </a:lnTo>
-                  <a:lnTo>
-                    <a:pt x="11403787" y="4617009"/>
-                  </a:lnTo>
-                  <a:lnTo>
-                    <a:pt x="11435398" y="4585411"/>
-                  </a:lnTo>
-                  <a:lnTo>
-                    <a:pt x="11461255" y="4548810"/>
-                  </a:lnTo>
-                  <a:lnTo>
-                    <a:pt x="11480648" y="4507954"/>
-                  </a:lnTo>
-                  <a:lnTo>
-                    <a:pt x="11492827" y="4463593"/>
-                  </a:lnTo>
-                  <a:lnTo>
-                    <a:pt x="11497056" y="4416450"/>
-                  </a:lnTo>
-                  <a:lnTo>
-                    <a:pt x="11497056" y="262255"/>
-                  </a:lnTo>
-                  <a:close/>
-                </a:path>
-              </a:pathLst>
-            </a:custGeom>
-            <a:solidFill>
-              <a:srgbClr val="FFFFFF"/>
-            </a:solidFill>
-          </p:spPr>
-          <p:txBody>
-            <a:bodyPr wrap="square" lIns="0" tIns="0" rIns="0" bIns="0" rtlCol="0"/>
-            <a:lstStyle/>
-            <a:p/>
-          </p:txBody>
-        </p:sp>
       </p:grpSp>
       <p:sp>
         <p:nvSpPr>
@@ -4100,10 +3241,13 @@
           </p:nvPr>
         </p:nvSpPr>
         <p:spPr>
+          <a:xfrm>
+            <a:ext cx="548640" cy="0"/>
+          </a:xfrm>
           <a:prstGeom prst="rect"/>
         </p:spPr>
         <p:txBody>
-          <a:bodyPr wrap="square" lIns="0" tIns="43180" rIns="0" bIns="0" rtlCol="0" vert="horz">
+          <a:bodyPr wrap="none" lIns="0" tIns="43180" rIns="0" bIns="0" rtlCol="0" vert="horz">
             <a:spAutoFit/>
           </a:bodyPr>
           <a:lstStyle/>
@@ -4185,113 +3329,14 @@
       </p:sp>
       <p:sp>
         <p:nvSpPr>
-          <p:cNvPr id="8" name="TextBox 7"/>
-          <p:cNvSpPr txBox="1"/>
-          <p:nvPr/>
-        </p:nvSpPr>
-        <p:spPr>
-          <a:xfrm>
-            <a:off x="685800" y="1874519"/>
-            <a:ext cx="10789920" cy="3931920"/>
-          </a:xfrm>
-          <a:prstGeom prst="rect">
-            <a:avLst/>
-          </a:prstGeom>
-          <a:noFill/>
-        </p:spPr>
-        <p:txBody>
-          <a:bodyPr wrap="square">
-            <a:spAutoFit/>
-          </a:bodyPr>
-          <a:lstStyle/>
-          <a:p>
-            <a:pPr algn="l">
-              <a:lnSpc>
-                <a:spcPct val="112000"/>
-              </a:lnSpc>
-              <a:spcAft>
-                <a:spcPts val="1000"/>
-              </a:spcAft>
-            </a:pPr>
-            <a:r>
-              <a:rPr sz="2000" b="1">
-                <a:solidFill>
-                  <a:srgbClr val="520978"/>
-                </a:solidFill>
-                <a:latin typeface="Montserrat"/>
-              </a:rPr>
-              <a:t>Настраиваемый workflow без доработки кода</a:t>
-            </a:r>
-          </a:p>
-          <a:p>
-            <a:pPr algn="l">
-              <a:lnSpc>
-                <a:spcPct val="112000"/>
-              </a:lnSpc>
-              <a:spcAft>
-                <a:spcPts val="1400"/>
-              </a:spcAft>
-            </a:pPr>
-            <a:r>
-              <a:rPr sz="1300" b="0">
-                <a:solidFill>
-                  <a:srgbClr val="1C1D22"/>
-                </a:solidFill>
-                <a:latin typeface="Montserrat"/>
-              </a:rPr>
-              <a:t>Администратор сам добавляет и переименовывает этапы, задаёт цвет колонки, порядок и включение — процесс меняется вместе с бизнесом, а не вслед за релизом.</a:t>
-            </a:r>
-          </a:p>
-          <a:p>
-            <a:pPr algn="l">
-              <a:lnSpc>
-                <a:spcPct val="112000"/>
-              </a:lnSpc>
-              <a:spcAft>
-                <a:spcPts val="1000"/>
-              </a:spcAft>
-            </a:pPr>
-            <a:r>
-              <a:rPr sz="2000" b="1">
-                <a:solidFill>
-                  <a:srgbClr val="520978"/>
-                </a:solidFill>
-                <a:latin typeface="Montserrat"/>
-              </a:rPr>
-              <a:t>Две воронки в одном продукте</a:t>
-            </a:r>
-          </a:p>
-          <a:p>
-            <a:pPr algn="l">
-              <a:lnSpc>
-                <a:spcPct val="112000"/>
-              </a:lnSpc>
-              <a:spcAft>
-                <a:spcPts val="0"/>
-              </a:spcAft>
-            </a:pPr>
-            <a:r>
-              <a:rPr sz="1300" b="0">
-                <a:solidFill>
-                  <a:srgbClr val="1C1D22"/>
-                </a:solidFill>
-                <a:latin typeface="Montserrat"/>
-              </a:rPr>
-              <a:t>B2B строится на 14 этапах, B2C — на 4. Фильтры доски, создание заявок и отчёты учитывают scope, поэтому воронки не смешиваются ни в UI, ни в API.</a:t>
-            </a:r>
-          </a:p>
-        </p:txBody>
-      </p:sp>
-      <p:sp>
-        <p:nvSpPr>
-          <p:cNvPr id="9" name="Rounded Rectangle 8"/>
+          <p:cNvPr id="8" name="Rounded Rectangle 7"/>
           <p:cNvSpPr/>
           <p:nvPr/>
         </p:nvSpPr>
         <p:spPr>
           <a:xfrm>
-            <a:off x="685800" y="5623560"/>
-            <a:ext cx="10789920" cy="868680"/>
+            <a:off x="502920" y="1371600"/>
+            <a:ext cx="5632704" cy="3383280"/>
           </a:xfrm>
           <a:prstGeom prst="roundRect">
             <a:avLst>
@@ -4330,14 +3375,60 @@
       </p:sp>
       <p:sp>
         <p:nvSpPr>
+          <p:cNvPr id="9" name="Rounded Rectangle 8"/>
+          <p:cNvSpPr/>
+          <p:nvPr/>
+        </p:nvSpPr>
+        <p:spPr>
+          <a:xfrm>
+            <a:off x="6172200" y="1371600"/>
+            <a:ext cx="5632704" cy="3383280"/>
+          </a:xfrm>
+          <a:prstGeom prst="roundRect">
+            <a:avLst>
+              <a:gd name="adj" fmla="val 6000"/>
+            </a:avLst>
+          </a:prstGeom>
+          <a:solidFill>
+            <a:srgbClr val="F7F4FA"/>
+          </a:solidFill>
+          <a:ln>
+            <a:noFill/>
+          </a:ln>
+          <a:effectLst/>
+        </p:spPr>
+        <p:style>
+          <a:lnRef idx="1">
+            <a:schemeClr val="accent1"/>
+          </a:lnRef>
+          <a:fillRef idx="3">
+            <a:schemeClr val="accent1"/>
+          </a:fillRef>
+          <a:effectRef idx="2">
+            <a:schemeClr val="accent1"/>
+          </a:effectRef>
+          <a:fontRef idx="minor">
+            <a:schemeClr val="lt1"/>
+          </a:fontRef>
+        </p:style>
+        <p:txBody>
+          <a:bodyPr rtlCol="0" anchor="ctr"/>
+          <a:lstStyle/>
+          <a:p>
+            <a:pPr algn="ctr"/>
+          </a:p>
+        </p:txBody>
+      </p:sp>
+      <p:sp>
+        <p:nvSpPr>
           <p:cNvPr id="10" name="TextBox 9"/>
           <p:cNvSpPr txBox="1"/>
           <p:nvPr/>
         </p:nvSpPr>
         <p:spPr>
           <a:xfrm>
-            <a:off x="914400" y="5742432"/>
-            <a:ext cx="10332720" cy="685800"/>
+            <a:off x="777240" y="1645920"/>
+            <a:ext cx="5084064" cy="2834640"/>
           </a:xfrm>
           <a:prstGeom prst="rect">
             <a:avLst/>
@@ -4352,14 +3443,184 @@
           <a:p>
             <a:pPr algn="l">
               <a:lnSpc>
+                <a:spcPct val="115000"/>
+              </a:lnSpc>
+              <a:spcAft>
+                <a:spcPts val="1000"/>
+              </a:spcAft>
+            </a:pPr>
+            <a:r>
+              <a:rPr sz="1700" b="1">
+                <a:solidFill>
+                  <a:srgbClr val="520978"/>
+                </a:solidFill>
+                <a:latin typeface="Montserrat"/>
+              </a:rPr>
+              <a:t>Настраиваемый workflow без доработки кода</a:t>
+            </a:r>
+          </a:p>
+          <a:p>
+            <a:pPr algn="l">
+              <a:lnSpc>
+                <a:spcPct val="130000"/>
+              </a:lnSpc>
+              <a:spcAft>
+                <a:spcPts val="0"/>
+              </a:spcAft>
+            </a:pPr>
+            <a:r>
+              <a:rPr sz="1250" b="0">
+                <a:solidFill>
+                  <a:srgbClr val="1C1D22"/>
+                </a:solidFill>
+                <a:latin typeface="Montserrat"/>
+              </a:rPr>
+              <a:t>Администратор сам добавляет и переименовывает этапы, задаёт цвет колонки, порядок и включение — процесс меняется вместе с бизнесом, а не вслед за релизом.</a:t>
+            </a:r>
+          </a:p>
+        </p:txBody>
+      </p:sp>
+      <p:sp>
+        <p:nvSpPr>
+          <p:cNvPr id="11" name="TextBox 10"/>
+          <p:cNvSpPr txBox="1"/>
+          <p:nvPr/>
+        </p:nvSpPr>
+        <p:spPr>
+          <a:xfrm>
+            <a:off x="6446520" y="1645920"/>
+            <a:ext cx="5084064" cy="2834640"/>
+          </a:xfrm>
+          <a:prstGeom prst="rect">
+            <a:avLst/>
+          </a:prstGeom>
+          <a:noFill/>
+        </p:spPr>
+        <p:txBody>
+          <a:bodyPr wrap="square">
+            <a:spAutoFit/>
+          </a:bodyPr>
+          <a:lstStyle/>
+          <a:p>
+            <a:pPr algn="l">
+              <a:lnSpc>
+                <a:spcPct val="115000"/>
+              </a:lnSpc>
+              <a:spcAft>
+                <a:spcPts val="1000"/>
+              </a:spcAft>
+            </a:pPr>
+            <a:r>
+              <a:rPr sz="1700" b="1">
+                <a:solidFill>
+                  <a:srgbClr val="520978"/>
+                </a:solidFill>
+                <a:latin typeface="Montserrat"/>
+              </a:rPr>
+              <a:t>Две воронки в одном продукте</a:t>
+            </a:r>
+          </a:p>
+          <a:p>
+            <a:pPr algn="l">
+              <a:lnSpc>
+                <a:spcPct val="130000"/>
+              </a:lnSpc>
+              <a:spcAft>
+                <a:spcPts val="0"/>
+              </a:spcAft>
+            </a:pPr>
+            <a:r>
+              <a:rPr sz="1250" b="0">
+                <a:solidFill>
+                  <a:srgbClr val="1C1D22"/>
+                </a:solidFill>
+                <a:latin typeface="Montserrat"/>
+              </a:rPr>
+              <a:t>B2B строится на 14 этапах, B2C — на 4. Фильтры доски, создание заявок и отчёты учитывают scope, поэтому воронки не смешиваются ни в UI, ни в API.</a:t>
+            </a:r>
+          </a:p>
+        </p:txBody>
+      </p:sp>
+      <p:sp>
+        <p:nvSpPr>
+          <p:cNvPr id="12" name="Rounded Rectangle 11"/>
+          <p:cNvSpPr/>
+          <p:nvPr/>
+        </p:nvSpPr>
+        <p:spPr>
+          <a:xfrm>
+            <a:off x="502920" y="4983480"/>
+            <a:ext cx="11301984" cy="1051560"/>
+          </a:xfrm>
+          <a:prstGeom prst="roundRect">
+            <a:avLst>
+              <a:gd name="adj" fmla="val 6000"/>
+            </a:avLst>
+          </a:prstGeom>
+          <a:solidFill>
+            <a:srgbClr val="FFFFFF"/>
+          </a:solidFill>
+          <a:ln w="12700">
+            <a:solidFill>
+              <a:srgbClr val="F7F4FA"/>
+            </a:solidFill>
+          </a:ln>
+          <a:effectLst/>
+        </p:spPr>
+        <p:style>
+          <a:lnRef idx="1">
+            <a:schemeClr val="accent1"/>
+          </a:lnRef>
+          <a:fillRef idx="3">
+            <a:schemeClr val="accent1"/>
+          </a:fillRef>
+          <a:effectRef idx="2">
+            <a:schemeClr val="accent1"/>
+          </a:effectRef>
+          <a:fontRef idx="minor">
+            <a:schemeClr val="lt1"/>
+          </a:fontRef>
+        </p:style>
+        <p:txBody>
+          <a:bodyPr rtlCol="0" anchor="ctr"/>
+          <a:lstStyle/>
+          <a:p>
+            <a:pPr algn="ctr"/>
+          </a:p>
+        </p:txBody>
+      </p:sp>
+      <p:sp>
+        <p:nvSpPr>
+          <p:cNvPr id="13" name="TextBox 12"/>
+          <p:cNvSpPr txBox="1"/>
+          <p:nvPr/>
+        </p:nvSpPr>
+        <p:spPr>
+          <a:xfrm>
+            <a:off x="777240" y="5166360"/>
+            <a:ext cx="10753344" cy="777240"/>
+          </a:xfrm>
+          <a:prstGeom prst="rect">
+            <a:avLst/>
+          </a:prstGeom>
+          <a:noFill/>
+        </p:spPr>
+        <p:txBody>
+          <a:bodyPr wrap="square">
+            <a:spAutoFit/>
+          </a:bodyPr>
+          <a:lstStyle/>
+          <a:p>
+            <a:pPr algn="l">
+              <a:lnSpc>
                 <a:spcPct val="112000"/>
               </a:lnSpc>
               <a:spcAft>
-                <a:spcPts val="300"/>
-              </a:spcAft>
-            </a:pPr>
-            <a:r>
-              <a:rPr sz="1200" b="1">
+                <a:spcPts val="400"/>
+              </a:spcAft>
+            </a:pPr>
+            <a:r>
+              <a:rPr sz="1300" b="1">
                 <a:solidFill>
                   <a:srgbClr val="520978"/>
                 </a:solidFill>
@@ -4371,14 +3632,14 @@
           <a:p>
             <a:pPr algn="l">
               <a:lnSpc>
-                <a:spcPct val="112000"/>
+                <a:spcPct val="120000"/>
               </a:lnSpc>
               <a:spcAft>
                 <a:spcPts val="0"/>
               </a:spcAft>
             </a:pPr>
             <a:r>
-              <a:rPr sz="1050" b="0">
+              <a:rPr sz="1100" b="0">
                 <a:solidFill>
                   <a:srgbClr val="6B5B78"/>
                 </a:solidFill>
@@ -4450,1092 +3711,6 @@
             </a:prstGeom>
           </p:spPr>
         </p:pic>
-        <p:sp>
-          <p:nvSpPr>
-            <p:cNvPr id="4" name="object 4"/>
-            <p:cNvSpPr/>
-            <p:nvPr/>
-          </p:nvSpPr>
-          <p:spPr>
-            <a:xfrm>
-              <a:off x="4421123" y="1522475"/>
-              <a:ext cx="3398520" cy="4678680"/>
-            </a:xfrm>
-            <a:custGeom>
-              <a:avLst/>
-              <a:gdLst/>
-              <a:ahLst/>
-              <a:cxnLst/>
-              <a:rect l="l" t="t" r="r" b="b"/>
-              <a:pathLst>
-                <a:path w="3398520" h="4678680">
-                  <a:moveTo>
-                    <a:pt x="3064764" y="0"/>
-                  </a:moveTo>
-                  <a:lnTo>
-                    <a:pt x="333755" y="0"/>
-                  </a:lnTo>
-                  <a:lnTo>
-                    <a:pt x="284447" y="3619"/>
-                  </a:lnTo>
-                  <a:lnTo>
-                    <a:pt x="237381" y="14135"/>
-                  </a:lnTo>
-                  <a:lnTo>
-                    <a:pt x="193075" y="31028"/>
-                  </a:lnTo>
-                  <a:lnTo>
-                    <a:pt x="152045" y="53783"/>
-                  </a:lnTo>
-                  <a:lnTo>
-                    <a:pt x="114808" y="81882"/>
-                  </a:lnTo>
-                  <a:lnTo>
-                    <a:pt x="81882" y="114808"/>
-                  </a:lnTo>
-                  <a:lnTo>
-                    <a:pt x="53783" y="152045"/>
-                  </a:lnTo>
-                  <a:lnTo>
-                    <a:pt x="31028" y="193075"/>
-                  </a:lnTo>
-                  <a:lnTo>
-                    <a:pt x="14135" y="237381"/>
-                  </a:lnTo>
-                  <a:lnTo>
-                    <a:pt x="3619" y="284447"/>
-                  </a:lnTo>
-                  <a:lnTo>
-                    <a:pt x="0" y="333756"/>
-                  </a:lnTo>
-                  <a:lnTo>
-                    <a:pt x="0" y="4344911"/>
-                  </a:lnTo>
-                  <a:lnTo>
-                    <a:pt x="3619" y="4394234"/>
-                  </a:lnTo>
-                  <a:lnTo>
-                    <a:pt x="14135" y="4441309"/>
-                  </a:lnTo>
-                  <a:lnTo>
-                    <a:pt x="31028" y="4485621"/>
-                  </a:lnTo>
-                  <a:lnTo>
-                    <a:pt x="53783" y="4526654"/>
-                  </a:lnTo>
-                  <a:lnTo>
-                    <a:pt x="81882" y="4563890"/>
-                  </a:lnTo>
-                  <a:lnTo>
-                    <a:pt x="114808" y="4596813"/>
-                  </a:lnTo>
-                  <a:lnTo>
-                    <a:pt x="152045" y="4624909"/>
-                  </a:lnTo>
-                  <a:lnTo>
-                    <a:pt x="193075" y="4647659"/>
-                  </a:lnTo>
-                  <a:lnTo>
-                    <a:pt x="237381" y="4664548"/>
-                  </a:lnTo>
-                  <a:lnTo>
-                    <a:pt x="284447" y="4675061"/>
-                  </a:lnTo>
-                  <a:lnTo>
-                    <a:pt x="333755" y="4678680"/>
-                  </a:lnTo>
-                  <a:lnTo>
-                    <a:pt x="3064764" y="4678680"/>
-                  </a:lnTo>
-                  <a:lnTo>
-                    <a:pt x="3114072" y="4675061"/>
-                  </a:lnTo>
-                  <a:lnTo>
-                    <a:pt x="3161138" y="4664548"/>
-                  </a:lnTo>
-                  <a:lnTo>
-                    <a:pt x="3205444" y="4647659"/>
-                  </a:lnTo>
-                  <a:lnTo>
-                    <a:pt x="3246474" y="4624909"/>
-                  </a:lnTo>
-                  <a:lnTo>
-                    <a:pt x="3283711" y="4596813"/>
-                  </a:lnTo>
-                  <a:lnTo>
-                    <a:pt x="3316637" y="4563890"/>
-                  </a:lnTo>
-                  <a:lnTo>
-                    <a:pt x="3344736" y="4526654"/>
-                  </a:lnTo>
-                  <a:lnTo>
-                    <a:pt x="3367491" y="4485621"/>
-                  </a:lnTo>
-                  <a:lnTo>
-                    <a:pt x="3384384" y="4441309"/>
-                  </a:lnTo>
-                  <a:lnTo>
-                    <a:pt x="3394900" y="4394234"/>
-                  </a:lnTo>
-                  <a:lnTo>
-                    <a:pt x="3398520" y="4344911"/>
-                  </a:lnTo>
-                  <a:lnTo>
-                    <a:pt x="3398520" y="333756"/>
-                  </a:lnTo>
-                  <a:lnTo>
-                    <a:pt x="3394900" y="284447"/>
-                  </a:lnTo>
-                  <a:lnTo>
-                    <a:pt x="3384384" y="237381"/>
-                  </a:lnTo>
-                  <a:lnTo>
-                    <a:pt x="3367491" y="193075"/>
-                  </a:lnTo>
-                  <a:lnTo>
-                    <a:pt x="3344736" y="152045"/>
-                  </a:lnTo>
-                  <a:lnTo>
-                    <a:pt x="3316637" y="114808"/>
-                  </a:lnTo>
-                  <a:lnTo>
-                    <a:pt x="3283711" y="81882"/>
-                  </a:lnTo>
-                  <a:lnTo>
-                    <a:pt x="3246474" y="53783"/>
-                  </a:lnTo>
-                  <a:lnTo>
-                    <a:pt x="3205444" y="31028"/>
-                  </a:lnTo>
-                  <a:lnTo>
-                    <a:pt x="3161138" y="14135"/>
-                  </a:lnTo>
-                  <a:lnTo>
-                    <a:pt x="3114072" y="3619"/>
-                  </a:lnTo>
-                  <a:lnTo>
-                    <a:pt x="3064764" y="0"/>
-                  </a:lnTo>
-                  <a:close/>
-                </a:path>
-              </a:pathLst>
-            </a:custGeom>
-            <a:solidFill>
-              <a:srgbClr val="FFFFFF"/>
-            </a:solidFill>
-          </p:spPr>
-          <p:txBody>
-            <a:bodyPr wrap="square" lIns="0" tIns="0" rIns="0" bIns="0" rtlCol="0"/>
-            <a:lstStyle/>
-            <a:p/>
-          </p:txBody>
-        </p:sp>
-        <p:sp>
-          <p:nvSpPr>
-            <p:cNvPr id="5" name="object 5"/>
-            <p:cNvSpPr/>
-            <p:nvPr/>
-          </p:nvSpPr>
-          <p:spPr>
-            <a:xfrm>
-              <a:off x="4421123" y="1522475"/>
-              <a:ext cx="3398520" cy="4678680"/>
-            </a:xfrm>
-            <a:custGeom>
-              <a:avLst/>
-              <a:gdLst/>
-              <a:ahLst/>
-              <a:cxnLst/>
-              <a:rect l="l" t="t" r="r" b="b"/>
-              <a:pathLst>
-                <a:path w="3398520" h="4678680">
-                  <a:moveTo>
-                    <a:pt x="0" y="333756"/>
-                  </a:moveTo>
-                  <a:lnTo>
-                    <a:pt x="3619" y="284447"/>
-                  </a:lnTo>
-                  <a:lnTo>
-                    <a:pt x="14135" y="237381"/>
-                  </a:lnTo>
-                  <a:lnTo>
-                    <a:pt x="31028" y="193075"/>
-                  </a:lnTo>
-                  <a:lnTo>
-                    <a:pt x="53783" y="152045"/>
-                  </a:lnTo>
-                  <a:lnTo>
-                    <a:pt x="81882" y="114808"/>
-                  </a:lnTo>
-                  <a:lnTo>
-                    <a:pt x="114808" y="81882"/>
-                  </a:lnTo>
-                  <a:lnTo>
-                    <a:pt x="152045" y="53783"/>
-                  </a:lnTo>
-                  <a:lnTo>
-                    <a:pt x="193075" y="31028"/>
-                  </a:lnTo>
-                  <a:lnTo>
-                    <a:pt x="237381" y="14135"/>
-                  </a:lnTo>
-                  <a:lnTo>
-                    <a:pt x="284447" y="3619"/>
-                  </a:lnTo>
-                  <a:lnTo>
-                    <a:pt x="333755" y="0"/>
-                  </a:lnTo>
-                  <a:lnTo>
-                    <a:pt x="3064764" y="0"/>
-                  </a:lnTo>
-                  <a:lnTo>
-                    <a:pt x="3114072" y="3619"/>
-                  </a:lnTo>
-                  <a:lnTo>
-                    <a:pt x="3161138" y="14135"/>
-                  </a:lnTo>
-                  <a:lnTo>
-                    <a:pt x="3205444" y="31028"/>
-                  </a:lnTo>
-                  <a:lnTo>
-                    <a:pt x="3246474" y="53783"/>
-                  </a:lnTo>
-                  <a:lnTo>
-                    <a:pt x="3283711" y="81882"/>
-                  </a:lnTo>
-                  <a:lnTo>
-                    <a:pt x="3316637" y="114808"/>
-                  </a:lnTo>
-                  <a:lnTo>
-                    <a:pt x="3344736" y="152045"/>
-                  </a:lnTo>
-                  <a:lnTo>
-                    <a:pt x="3367491" y="193075"/>
-                  </a:lnTo>
-                  <a:lnTo>
-                    <a:pt x="3384384" y="237381"/>
-                  </a:lnTo>
-                  <a:lnTo>
-                    <a:pt x="3394900" y="284447"/>
-                  </a:lnTo>
-                  <a:lnTo>
-                    <a:pt x="3398520" y="333756"/>
-                  </a:lnTo>
-                  <a:lnTo>
-                    <a:pt x="3398520" y="4344911"/>
-                  </a:lnTo>
-                  <a:lnTo>
-                    <a:pt x="3394900" y="4394234"/>
-                  </a:lnTo>
-                  <a:lnTo>
-                    <a:pt x="3384384" y="4441309"/>
-                  </a:lnTo>
-                  <a:lnTo>
-                    <a:pt x="3367491" y="4485621"/>
-                  </a:lnTo>
-                  <a:lnTo>
-                    <a:pt x="3344736" y="4526654"/>
-                  </a:lnTo>
-                  <a:lnTo>
-                    <a:pt x="3316637" y="4563890"/>
-                  </a:lnTo>
-                  <a:lnTo>
-                    <a:pt x="3283711" y="4596813"/>
-                  </a:lnTo>
-                  <a:lnTo>
-                    <a:pt x="3246474" y="4624909"/>
-                  </a:lnTo>
-                  <a:lnTo>
-                    <a:pt x="3205444" y="4647659"/>
-                  </a:lnTo>
-                  <a:lnTo>
-                    <a:pt x="3161138" y="4664548"/>
-                  </a:lnTo>
-                  <a:lnTo>
-                    <a:pt x="3114072" y="4675061"/>
-                  </a:lnTo>
-                  <a:lnTo>
-                    <a:pt x="3064764" y="4678680"/>
-                  </a:lnTo>
-                  <a:lnTo>
-                    <a:pt x="333755" y="4678680"/>
-                  </a:lnTo>
-                  <a:lnTo>
-                    <a:pt x="284447" y="4675061"/>
-                  </a:lnTo>
-                  <a:lnTo>
-                    <a:pt x="237381" y="4664548"/>
-                  </a:lnTo>
-                  <a:lnTo>
-                    <a:pt x="193075" y="4647659"/>
-                  </a:lnTo>
-                  <a:lnTo>
-                    <a:pt x="152045" y="4624909"/>
-                  </a:lnTo>
-                  <a:lnTo>
-                    <a:pt x="114808" y="4596813"/>
-                  </a:lnTo>
-                  <a:lnTo>
-                    <a:pt x="81882" y="4563890"/>
-                  </a:lnTo>
-                  <a:lnTo>
-                    <a:pt x="53783" y="4526654"/>
-                  </a:lnTo>
-                  <a:lnTo>
-                    <a:pt x="31028" y="4485621"/>
-                  </a:lnTo>
-                  <a:lnTo>
-                    <a:pt x="14135" y="4441309"/>
-                  </a:lnTo>
-                  <a:lnTo>
-                    <a:pt x="3619" y="4394234"/>
-                  </a:lnTo>
-                  <a:lnTo>
-                    <a:pt x="0" y="4344911"/>
-                  </a:lnTo>
-                  <a:lnTo>
-                    <a:pt x="0" y="333756"/>
-                  </a:lnTo>
-                  <a:close/>
-                </a:path>
-              </a:pathLst>
-            </a:custGeom>
-            <a:ln w="9144">
-              <a:solidFill>
-                <a:srgbClr val="520977"/>
-              </a:solidFill>
-            </a:ln>
-          </p:spPr>
-          <p:txBody>
-            <a:bodyPr wrap="square" lIns="0" tIns="0" rIns="0" bIns="0" rtlCol="0"/>
-            <a:lstStyle/>
-            <a:p/>
-          </p:txBody>
-        </p:sp>
-        <p:sp>
-          <p:nvSpPr>
-            <p:cNvPr id="6" name="object 6"/>
-            <p:cNvSpPr/>
-            <p:nvPr/>
-          </p:nvSpPr>
-          <p:spPr>
-            <a:xfrm>
-              <a:off x="8368283" y="1522475"/>
-              <a:ext cx="3249295" cy="4678680"/>
-            </a:xfrm>
-            <a:custGeom>
-              <a:avLst/>
-              <a:gdLst/>
-              <a:ahLst/>
-              <a:cxnLst/>
-              <a:rect l="l" t="t" r="r" b="b"/>
-              <a:pathLst>
-                <a:path w="3249295" h="4678680">
-                  <a:moveTo>
-                    <a:pt x="2930017" y="0"/>
-                  </a:moveTo>
-                  <a:lnTo>
-                    <a:pt x="319150" y="0"/>
-                  </a:lnTo>
-                  <a:lnTo>
-                    <a:pt x="271986" y="3460"/>
-                  </a:lnTo>
-                  <a:lnTo>
-                    <a:pt x="226970" y="13511"/>
-                  </a:lnTo>
-                  <a:lnTo>
-                    <a:pt x="184599" y="29660"/>
-                  </a:lnTo>
-                  <a:lnTo>
-                    <a:pt x="145363" y="51413"/>
-                  </a:lnTo>
-                  <a:lnTo>
-                    <a:pt x="109758" y="78277"/>
-                  </a:lnTo>
-                  <a:lnTo>
-                    <a:pt x="78277" y="109758"/>
-                  </a:lnTo>
-                  <a:lnTo>
-                    <a:pt x="51413" y="145363"/>
-                  </a:lnTo>
-                  <a:lnTo>
-                    <a:pt x="29660" y="184599"/>
-                  </a:lnTo>
-                  <a:lnTo>
-                    <a:pt x="13511" y="226970"/>
-                  </a:lnTo>
-                  <a:lnTo>
-                    <a:pt x="3460" y="271986"/>
-                  </a:lnTo>
-                  <a:lnTo>
-                    <a:pt x="0" y="319150"/>
-                  </a:lnTo>
-                  <a:lnTo>
-                    <a:pt x="0" y="4359579"/>
-                  </a:lnTo>
-                  <a:lnTo>
-                    <a:pt x="3460" y="4406734"/>
-                  </a:lnTo>
-                  <a:lnTo>
-                    <a:pt x="13511" y="4451741"/>
-                  </a:lnTo>
-                  <a:lnTo>
-                    <a:pt x="29660" y="4494106"/>
-                  </a:lnTo>
-                  <a:lnTo>
-                    <a:pt x="51413" y="4533334"/>
-                  </a:lnTo>
-                  <a:lnTo>
-                    <a:pt x="78277" y="4568934"/>
-                  </a:lnTo>
-                  <a:lnTo>
-                    <a:pt x="109758" y="4600411"/>
-                  </a:lnTo>
-                  <a:lnTo>
-                    <a:pt x="145363" y="4627271"/>
-                  </a:lnTo>
-                  <a:lnTo>
-                    <a:pt x="184599" y="4649022"/>
-                  </a:lnTo>
-                  <a:lnTo>
-                    <a:pt x="226970" y="4665169"/>
-                  </a:lnTo>
-                  <a:lnTo>
-                    <a:pt x="271986" y="4675220"/>
-                  </a:lnTo>
-                  <a:lnTo>
-                    <a:pt x="319150" y="4678680"/>
-                  </a:lnTo>
-                  <a:lnTo>
-                    <a:pt x="2930017" y="4678680"/>
-                  </a:lnTo>
-                  <a:lnTo>
-                    <a:pt x="2977181" y="4675220"/>
-                  </a:lnTo>
-                  <a:lnTo>
-                    <a:pt x="3022197" y="4665169"/>
-                  </a:lnTo>
-                  <a:lnTo>
-                    <a:pt x="3064568" y="4649022"/>
-                  </a:lnTo>
-                  <a:lnTo>
-                    <a:pt x="3103804" y="4627271"/>
-                  </a:lnTo>
-                  <a:lnTo>
-                    <a:pt x="3139409" y="4600411"/>
-                  </a:lnTo>
-                  <a:lnTo>
-                    <a:pt x="3170890" y="4568934"/>
-                  </a:lnTo>
-                  <a:lnTo>
-                    <a:pt x="3197754" y="4533334"/>
-                  </a:lnTo>
-                  <a:lnTo>
-                    <a:pt x="3219507" y="4494106"/>
-                  </a:lnTo>
-                  <a:lnTo>
-                    <a:pt x="3235656" y="4451741"/>
-                  </a:lnTo>
-                  <a:lnTo>
-                    <a:pt x="3245707" y="4406734"/>
-                  </a:lnTo>
-                  <a:lnTo>
-                    <a:pt x="3249168" y="4359579"/>
-                  </a:lnTo>
-                  <a:lnTo>
-                    <a:pt x="3249168" y="319150"/>
-                  </a:lnTo>
-                  <a:lnTo>
-                    <a:pt x="3245707" y="271986"/>
-                  </a:lnTo>
-                  <a:lnTo>
-                    <a:pt x="3235656" y="226970"/>
-                  </a:lnTo>
-                  <a:lnTo>
-                    <a:pt x="3219507" y="184599"/>
-                  </a:lnTo>
-                  <a:lnTo>
-                    <a:pt x="3197754" y="145363"/>
-                  </a:lnTo>
-                  <a:lnTo>
-                    <a:pt x="3170890" y="109758"/>
-                  </a:lnTo>
-                  <a:lnTo>
-                    <a:pt x="3139409" y="78277"/>
-                  </a:lnTo>
-                  <a:lnTo>
-                    <a:pt x="3103804" y="51413"/>
-                  </a:lnTo>
-                  <a:lnTo>
-                    <a:pt x="3064568" y="29660"/>
-                  </a:lnTo>
-                  <a:lnTo>
-                    <a:pt x="3022197" y="13511"/>
-                  </a:lnTo>
-                  <a:lnTo>
-                    <a:pt x="2977181" y="3460"/>
-                  </a:lnTo>
-                  <a:lnTo>
-                    <a:pt x="2930017" y="0"/>
-                  </a:lnTo>
-                  <a:close/>
-                </a:path>
-              </a:pathLst>
-            </a:custGeom>
-            <a:solidFill>
-              <a:srgbClr val="FFFFFF"/>
-            </a:solidFill>
-          </p:spPr>
-          <p:txBody>
-            <a:bodyPr wrap="square" lIns="0" tIns="0" rIns="0" bIns="0" rtlCol="0"/>
-            <a:lstStyle/>
-            <a:p/>
-          </p:txBody>
-        </p:sp>
-        <p:sp>
-          <p:nvSpPr>
-            <p:cNvPr id="7" name="object 7"/>
-            <p:cNvSpPr/>
-            <p:nvPr/>
-          </p:nvSpPr>
-          <p:spPr>
-            <a:xfrm>
-              <a:off x="8368283" y="1522475"/>
-              <a:ext cx="3249295" cy="4678680"/>
-            </a:xfrm>
-            <a:custGeom>
-              <a:avLst/>
-              <a:gdLst/>
-              <a:ahLst/>
-              <a:cxnLst/>
-              <a:rect l="l" t="t" r="r" b="b"/>
-              <a:pathLst>
-                <a:path w="3249295" h="4678680">
-                  <a:moveTo>
-                    <a:pt x="0" y="319150"/>
-                  </a:moveTo>
-                  <a:lnTo>
-                    <a:pt x="3460" y="271986"/>
-                  </a:lnTo>
-                  <a:lnTo>
-                    <a:pt x="13511" y="226970"/>
-                  </a:lnTo>
-                  <a:lnTo>
-                    <a:pt x="29660" y="184599"/>
-                  </a:lnTo>
-                  <a:lnTo>
-                    <a:pt x="51413" y="145363"/>
-                  </a:lnTo>
-                  <a:lnTo>
-                    <a:pt x="78277" y="109758"/>
-                  </a:lnTo>
-                  <a:lnTo>
-                    <a:pt x="109758" y="78277"/>
-                  </a:lnTo>
-                  <a:lnTo>
-                    <a:pt x="145363" y="51413"/>
-                  </a:lnTo>
-                  <a:lnTo>
-                    <a:pt x="184599" y="29660"/>
-                  </a:lnTo>
-                  <a:lnTo>
-                    <a:pt x="226970" y="13511"/>
-                  </a:lnTo>
-                  <a:lnTo>
-                    <a:pt x="271986" y="3460"/>
-                  </a:lnTo>
-                  <a:lnTo>
-                    <a:pt x="319150" y="0"/>
-                  </a:lnTo>
-                  <a:lnTo>
-                    <a:pt x="2930017" y="0"/>
-                  </a:lnTo>
-                  <a:lnTo>
-                    <a:pt x="2977181" y="3460"/>
-                  </a:lnTo>
-                  <a:lnTo>
-                    <a:pt x="3022197" y="13511"/>
-                  </a:lnTo>
-                  <a:lnTo>
-                    <a:pt x="3064568" y="29660"/>
-                  </a:lnTo>
-                  <a:lnTo>
-                    <a:pt x="3103804" y="51413"/>
-                  </a:lnTo>
-                  <a:lnTo>
-                    <a:pt x="3139409" y="78277"/>
-                  </a:lnTo>
-                  <a:lnTo>
-                    <a:pt x="3170890" y="109758"/>
-                  </a:lnTo>
-                  <a:lnTo>
-                    <a:pt x="3197754" y="145363"/>
-                  </a:lnTo>
-                  <a:lnTo>
-                    <a:pt x="3219507" y="184599"/>
-                  </a:lnTo>
-                  <a:lnTo>
-                    <a:pt x="3235656" y="226970"/>
-                  </a:lnTo>
-                  <a:lnTo>
-                    <a:pt x="3245707" y="271986"/>
-                  </a:lnTo>
-                  <a:lnTo>
-                    <a:pt x="3249168" y="319150"/>
-                  </a:lnTo>
-                  <a:lnTo>
-                    <a:pt x="3249168" y="4359579"/>
-                  </a:lnTo>
-                  <a:lnTo>
-                    <a:pt x="3245707" y="4406734"/>
-                  </a:lnTo>
-                  <a:lnTo>
-                    <a:pt x="3235656" y="4451741"/>
-                  </a:lnTo>
-                  <a:lnTo>
-                    <a:pt x="3219507" y="4494106"/>
-                  </a:lnTo>
-                  <a:lnTo>
-                    <a:pt x="3197754" y="4533334"/>
-                  </a:lnTo>
-                  <a:lnTo>
-                    <a:pt x="3170890" y="4568934"/>
-                  </a:lnTo>
-                  <a:lnTo>
-                    <a:pt x="3139409" y="4600411"/>
-                  </a:lnTo>
-                  <a:lnTo>
-                    <a:pt x="3103804" y="4627271"/>
-                  </a:lnTo>
-                  <a:lnTo>
-                    <a:pt x="3064568" y="4649022"/>
-                  </a:lnTo>
-                  <a:lnTo>
-                    <a:pt x="3022197" y="4665169"/>
-                  </a:lnTo>
-                  <a:lnTo>
-                    <a:pt x="2977181" y="4675220"/>
-                  </a:lnTo>
-                  <a:lnTo>
-                    <a:pt x="2930017" y="4678680"/>
-                  </a:lnTo>
-                  <a:lnTo>
-                    <a:pt x="319150" y="4678680"/>
-                  </a:lnTo>
-                  <a:lnTo>
-                    <a:pt x="271986" y="4675220"/>
-                  </a:lnTo>
-                  <a:lnTo>
-                    <a:pt x="226970" y="4665169"/>
-                  </a:lnTo>
-                  <a:lnTo>
-                    <a:pt x="184599" y="4649022"/>
-                  </a:lnTo>
-                  <a:lnTo>
-                    <a:pt x="145363" y="4627271"/>
-                  </a:lnTo>
-                  <a:lnTo>
-                    <a:pt x="109758" y="4600411"/>
-                  </a:lnTo>
-                  <a:lnTo>
-                    <a:pt x="78277" y="4568934"/>
-                  </a:lnTo>
-                  <a:lnTo>
-                    <a:pt x="51413" y="4533334"/>
-                  </a:lnTo>
-                  <a:lnTo>
-                    <a:pt x="29660" y="4494106"/>
-                  </a:lnTo>
-                  <a:lnTo>
-                    <a:pt x="13511" y="4451741"/>
-                  </a:lnTo>
-                  <a:lnTo>
-                    <a:pt x="3460" y="4406734"/>
-                  </a:lnTo>
-                  <a:lnTo>
-                    <a:pt x="0" y="4359579"/>
-                  </a:lnTo>
-                  <a:lnTo>
-                    <a:pt x="0" y="319150"/>
-                  </a:lnTo>
-                  <a:close/>
-                </a:path>
-              </a:pathLst>
-            </a:custGeom>
-            <a:ln w="9144">
-              <a:solidFill>
-                <a:srgbClr val="520977"/>
-              </a:solidFill>
-            </a:ln>
-          </p:spPr>
-          <p:txBody>
-            <a:bodyPr wrap="square" lIns="0" tIns="0" rIns="0" bIns="0" rtlCol="0"/>
-            <a:lstStyle/>
-            <a:p/>
-          </p:txBody>
-        </p:sp>
-        <p:sp>
-          <p:nvSpPr>
-            <p:cNvPr id="8" name="object 8"/>
-            <p:cNvSpPr/>
-            <p:nvPr/>
-          </p:nvSpPr>
-          <p:spPr>
-            <a:xfrm>
-              <a:off x="626363" y="1522475"/>
-              <a:ext cx="3246120" cy="4678680"/>
-            </a:xfrm>
-            <a:custGeom>
-              <a:avLst/>
-              <a:gdLst/>
-              <a:ahLst/>
-              <a:cxnLst/>
-              <a:rect l="l" t="t" r="r" b="b"/>
-              <a:pathLst>
-                <a:path w="3246120" h="4678680">
-                  <a:moveTo>
-                    <a:pt x="2927350" y="0"/>
-                  </a:moveTo>
-                  <a:lnTo>
-                    <a:pt x="318795" y="0"/>
-                  </a:lnTo>
-                  <a:lnTo>
-                    <a:pt x="271687" y="3456"/>
-                  </a:lnTo>
-                  <a:lnTo>
-                    <a:pt x="226725" y="13498"/>
-                  </a:lnTo>
-                  <a:lnTo>
-                    <a:pt x="184401" y="29632"/>
-                  </a:lnTo>
-                  <a:lnTo>
-                    <a:pt x="145210" y="51363"/>
-                  </a:lnTo>
-                  <a:lnTo>
-                    <a:pt x="109644" y="78198"/>
-                  </a:lnTo>
-                  <a:lnTo>
-                    <a:pt x="78197" y="109645"/>
-                  </a:lnTo>
-                  <a:lnTo>
-                    <a:pt x="51361" y="145209"/>
-                  </a:lnTo>
-                  <a:lnTo>
-                    <a:pt x="29630" y="184397"/>
-                  </a:lnTo>
-                  <a:lnTo>
-                    <a:pt x="13497" y="226715"/>
-                  </a:lnTo>
-                  <a:lnTo>
-                    <a:pt x="3456" y="271671"/>
-                  </a:lnTo>
-                  <a:lnTo>
-                    <a:pt x="0" y="318770"/>
-                  </a:lnTo>
-                  <a:lnTo>
-                    <a:pt x="0" y="4359884"/>
-                  </a:lnTo>
-                  <a:lnTo>
-                    <a:pt x="3456" y="4406992"/>
-                  </a:lnTo>
-                  <a:lnTo>
-                    <a:pt x="13497" y="4451954"/>
-                  </a:lnTo>
-                  <a:lnTo>
-                    <a:pt x="29630" y="4494278"/>
-                  </a:lnTo>
-                  <a:lnTo>
-                    <a:pt x="51361" y="4533469"/>
-                  </a:lnTo>
-                  <a:lnTo>
-                    <a:pt x="78197" y="4569035"/>
-                  </a:lnTo>
-                  <a:lnTo>
-                    <a:pt x="109644" y="4600482"/>
-                  </a:lnTo>
-                  <a:lnTo>
-                    <a:pt x="145210" y="4627318"/>
-                  </a:lnTo>
-                  <a:lnTo>
-                    <a:pt x="184401" y="4649049"/>
-                  </a:lnTo>
-                  <a:lnTo>
-                    <a:pt x="226725" y="4665182"/>
-                  </a:lnTo>
-                  <a:lnTo>
-                    <a:pt x="271687" y="4675223"/>
-                  </a:lnTo>
-                  <a:lnTo>
-                    <a:pt x="318795" y="4678680"/>
-                  </a:lnTo>
-                  <a:lnTo>
-                    <a:pt x="2927350" y="4678680"/>
-                  </a:lnTo>
-                  <a:lnTo>
-                    <a:pt x="2974448" y="4675223"/>
-                  </a:lnTo>
-                  <a:lnTo>
-                    <a:pt x="3019404" y="4665182"/>
-                  </a:lnTo>
-                  <a:lnTo>
-                    <a:pt x="3061722" y="4649049"/>
-                  </a:lnTo>
-                  <a:lnTo>
-                    <a:pt x="3100910" y="4627318"/>
-                  </a:lnTo>
-                  <a:lnTo>
-                    <a:pt x="3136474" y="4600482"/>
-                  </a:lnTo>
-                  <a:lnTo>
-                    <a:pt x="3167921" y="4569035"/>
-                  </a:lnTo>
-                  <a:lnTo>
-                    <a:pt x="3194756" y="4533469"/>
-                  </a:lnTo>
-                  <a:lnTo>
-                    <a:pt x="3216487" y="4494278"/>
-                  </a:lnTo>
-                  <a:lnTo>
-                    <a:pt x="3232621" y="4451954"/>
-                  </a:lnTo>
-                  <a:lnTo>
-                    <a:pt x="3242663" y="4406992"/>
-                  </a:lnTo>
-                  <a:lnTo>
-                    <a:pt x="3246120" y="4359884"/>
-                  </a:lnTo>
-                  <a:lnTo>
-                    <a:pt x="3246120" y="318770"/>
-                  </a:lnTo>
-                  <a:lnTo>
-                    <a:pt x="3242663" y="271671"/>
-                  </a:lnTo>
-                  <a:lnTo>
-                    <a:pt x="3232621" y="226715"/>
-                  </a:lnTo>
-                  <a:lnTo>
-                    <a:pt x="3216487" y="184397"/>
-                  </a:lnTo>
-                  <a:lnTo>
-                    <a:pt x="3194756" y="145209"/>
-                  </a:lnTo>
-                  <a:lnTo>
-                    <a:pt x="3167921" y="109645"/>
-                  </a:lnTo>
-                  <a:lnTo>
-                    <a:pt x="3136474" y="78198"/>
-                  </a:lnTo>
-                  <a:lnTo>
-                    <a:pt x="3100910" y="51363"/>
-                  </a:lnTo>
-                  <a:lnTo>
-                    <a:pt x="3061722" y="29632"/>
-                  </a:lnTo>
-                  <a:lnTo>
-                    <a:pt x="3019404" y="13498"/>
-                  </a:lnTo>
-                  <a:lnTo>
-                    <a:pt x="2974448" y="3456"/>
-                  </a:lnTo>
-                  <a:lnTo>
-                    <a:pt x="2927350" y="0"/>
-                  </a:lnTo>
-                  <a:close/>
-                </a:path>
-              </a:pathLst>
-            </a:custGeom>
-            <a:solidFill>
-              <a:srgbClr val="FFFFFF"/>
-            </a:solidFill>
-          </p:spPr>
-          <p:txBody>
-            <a:bodyPr wrap="square" lIns="0" tIns="0" rIns="0" bIns="0" rtlCol="0"/>
-            <a:lstStyle/>
-            <a:p/>
-          </p:txBody>
-        </p:sp>
-        <p:sp>
-          <p:nvSpPr>
-            <p:cNvPr id="9" name="object 9"/>
-            <p:cNvSpPr/>
-            <p:nvPr/>
-          </p:nvSpPr>
-          <p:spPr>
-            <a:xfrm>
-              <a:off x="626363" y="1522475"/>
-              <a:ext cx="3246120" cy="4678680"/>
-            </a:xfrm>
-            <a:custGeom>
-              <a:avLst/>
-              <a:gdLst/>
-              <a:ahLst/>
-              <a:cxnLst/>
-              <a:rect l="l" t="t" r="r" b="b"/>
-              <a:pathLst>
-                <a:path w="3246120" h="4678680">
-                  <a:moveTo>
-                    <a:pt x="0" y="318770"/>
-                  </a:moveTo>
-                  <a:lnTo>
-                    <a:pt x="3456" y="271671"/>
-                  </a:lnTo>
-                  <a:lnTo>
-                    <a:pt x="13497" y="226715"/>
-                  </a:lnTo>
-                  <a:lnTo>
-                    <a:pt x="29630" y="184397"/>
-                  </a:lnTo>
-                  <a:lnTo>
-                    <a:pt x="51361" y="145209"/>
-                  </a:lnTo>
-                  <a:lnTo>
-                    <a:pt x="78197" y="109645"/>
-                  </a:lnTo>
-                  <a:lnTo>
-                    <a:pt x="109644" y="78198"/>
-                  </a:lnTo>
-                  <a:lnTo>
-                    <a:pt x="145210" y="51363"/>
-                  </a:lnTo>
-                  <a:lnTo>
-                    <a:pt x="184401" y="29632"/>
-                  </a:lnTo>
-                  <a:lnTo>
-                    <a:pt x="226725" y="13498"/>
-                  </a:lnTo>
-                  <a:lnTo>
-                    <a:pt x="271687" y="3456"/>
-                  </a:lnTo>
-                  <a:lnTo>
-                    <a:pt x="318795" y="0"/>
-                  </a:lnTo>
-                  <a:lnTo>
-                    <a:pt x="2927350" y="0"/>
-                  </a:lnTo>
-                  <a:lnTo>
-                    <a:pt x="2974448" y="3456"/>
-                  </a:lnTo>
-                  <a:lnTo>
-                    <a:pt x="3019404" y="13498"/>
-                  </a:lnTo>
-                  <a:lnTo>
-                    <a:pt x="3061722" y="29632"/>
-                  </a:lnTo>
-                  <a:lnTo>
-                    <a:pt x="3100910" y="51363"/>
-                  </a:lnTo>
-                  <a:lnTo>
-                    <a:pt x="3136474" y="78198"/>
-                  </a:lnTo>
-                  <a:lnTo>
-                    <a:pt x="3167921" y="109645"/>
-                  </a:lnTo>
-                  <a:lnTo>
-                    <a:pt x="3194756" y="145209"/>
-                  </a:lnTo>
-                  <a:lnTo>
-                    <a:pt x="3216487" y="184397"/>
-                  </a:lnTo>
-                  <a:lnTo>
-                    <a:pt x="3232621" y="226715"/>
-                  </a:lnTo>
-                  <a:lnTo>
-                    <a:pt x="3242663" y="271671"/>
-                  </a:lnTo>
-                  <a:lnTo>
-                    <a:pt x="3246120" y="318770"/>
-                  </a:lnTo>
-                  <a:lnTo>
-                    <a:pt x="3246120" y="4359884"/>
-                  </a:lnTo>
-                  <a:lnTo>
-                    <a:pt x="3242663" y="4406992"/>
-                  </a:lnTo>
-                  <a:lnTo>
-                    <a:pt x="3232621" y="4451954"/>
-                  </a:lnTo>
-                  <a:lnTo>
-                    <a:pt x="3216487" y="4494278"/>
-                  </a:lnTo>
-                  <a:lnTo>
-                    <a:pt x="3194756" y="4533469"/>
-                  </a:lnTo>
-                  <a:lnTo>
-                    <a:pt x="3167921" y="4569035"/>
-                  </a:lnTo>
-                  <a:lnTo>
-                    <a:pt x="3136474" y="4600482"/>
-                  </a:lnTo>
-                  <a:lnTo>
-                    <a:pt x="3100910" y="4627318"/>
-                  </a:lnTo>
-                  <a:lnTo>
-                    <a:pt x="3061722" y="4649049"/>
-                  </a:lnTo>
-                  <a:lnTo>
-                    <a:pt x="3019404" y="4665182"/>
-                  </a:lnTo>
-                  <a:lnTo>
-                    <a:pt x="2974448" y="4675223"/>
-                  </a:lnTo>
-                  <a:lnTo>
-                    <a:pt x="2927350" y="4678680"/>
-                  </a:lnTo>
-                  <a:lnTo>
-                    <a:pt x="318795" y="4678680"/>
-                  </a:lnTo>
-                  <a:lnTo>
-                    <a:pt x="271687" y="4675223"/>
-                  </a:lnTo>
-                  <a:lnTo>
-                    <a:pt x="226725" y="4665182"/>
-                  </a:lnTo>
-                  <a:lnTo>
-                    <a:pt x="184401" y="4649049"/>
-                  </a:lnTo>
-                  <a:lnTo>
-                    <a:pt x="145210" y="4627318"/>
-                  </a:lnTo>
-                  <a:lnTo>
-                    <a:pt x="109644" y="4600482"/>
-                  </a:lnTo>
-                  <a:lnTo>
-                    <a:pt x="78197" y="4569035"/>
-                  </a:lnTo>
-                  <a:lnTo>
-                    <a:pt x="51361" y="4533469"/>
-                  </a:lnTo>
-                  <a:lnTo>
-                    <a:pt x="29630" y="4494278"/>
-                  </a:lnTo>
-                  <a:lnTo>
-                    <a:pt x="13497" y="4451954"/>
-                  </a:lnTo>
-                  <a:lnTo>
-                    <a:pt x="3456" y="4406992"/>
-                  </a:lnTo>
-                  <a:lnTo>
-                    <a:pt x="0" y="4359884"/>
-                  </a:lnTo>
-                  <a:lnTo>
-                    <a:pt x="0" y="318770"/>
-                  </a:lnTo>
-                  <a:close/>
-                </a:path>
-              </a:pathLst>
-            </a:custGeom>
-            <a:ln w="9144">
-              <a:solidFill>
-                <a:srgbClr val="520977"/>
-              </a:solidFill>
-            </a:ln>
-          </p:spPr>
-          <p:txBody>
-            <a:bodyPr wrap="square" lIns="0" tIns="0" rIns="0" bIns="0" rtlCol="0"/>
-            <a:lstStyle/>
-            <a:p/>
-          </p:txBody>
-        </p:sp>
       </p:grpSp>
       <p:sp>
         <p:nvSpPr>
@@ -5548,10 +3723,13 @@
           </p:nvPr>
         </p:nvSpPr>
         <p:spPr>
+          <a:xfrm>
+            <a:ext cx="548640" cy="0"/>
+          </a:xfrm>
           <a:prstGeom prst="rect"/>
         </p:spPr>
         <p:txBody>
-          <a:bodyPr wrap="square" lIns="0" tIns="43180" rIns="0" bIns="0" rtlCol="0" vert="horz">
+          <a:bodyPr wrap="none" lIns="0" tIns="43180" rIns="0" bIns="0" rtlCol="0" vert="horz">
             <a:spAutoFit/>
           </a:bodyPr>
           <a:lstStyle/>
@@ -5584,7 +3762,7 @@
         </p:nvSpPr>
         <p:spPr>
           <a:xfrm>
-            <a:off x="621792" y="868680"/>
+            <a:off x="347472" y="320040"/>
             <a:ext cx="4206240" cy="475488"/>
           </a:xfrm>
           <a:prstGeom prst="roundRect">
@@ -5633,14 +3811,60 @@
       </p:sp>
       <p:sp>
         <p:nvSpPr>
-          <p:cNvPr id="12" name="TextBox 11"/>
+          <p:cNvPr id="12" name="Rounded Rectangle 11"/>
+          <p:cNvSpPr/>
+          <p:nvPr/>
+        </p:nvSpPr>
+        <p:spPr>
+          <a:xfrm>
+            <a:off x="502920" y="1371600"/>
+            <a:ext cx="5632704" cy="2103120"/>
+          </a:xfrm>
+          <a:prstGeom prst="roundRect">
+            <a:avLst>
+              <a:gd name="adj" fmla="val 6000"/>
+            </a:avLst>
+          </a:prstGeom>
+          <a:solidFill>
+            <a:srgbClr val="F7F4FA"/>
+          </a:solidFill>
+          <a:ln>
+            <a:noFill/>
+          </a:ln>
+          <a:effectLst/>
+        </p:spPr>
+        <p:style>
+          <a:lnRef idx="1">
+            <a:schemeClr val="accent1"/>
+          </a:lnRef>
+          <a:fillRef idx="3">
+            <a:schemeClr val="accent1"/>
+          </a:fillRef>
+          <a:effectRef idx="2">
+            <a:schemeClr val="accent1"/>
+          </a:effectRef>
+          <a:fontRef idx="minor">
+            <a:schemeClr val="lt1"/>
+          </a:fontRef>
+        </p:style>
+        <p:txBody>
+          <a:bodyPr rtlCol="0" anchor="ctr"/>
+          <a:lstStyle/>
+          <a:p>
+            <a:pPr algn="ctr"/>
+          </a:p>
+        </p:txBody>
+      </p:sp>
+      <p:sp>
+        <p:nvSpPr>
+          <p:cNvPr id="13" name="TextBox 12"/>
           <p:cNvSpPr txBox="1"/>
           <p:nvPr/>
         </p:nvSpPr>
         <p:spPr>
           <a:xfrm>
-            <a:off x="822960" y="1600200"/>
-            <a:ext cx="4992624" cy="457200"/>
+            <a:off x="777240" y="1572768"/>
+            <a:ext cx="5029200" cy="411480"/>
           </a:xfrm>
           <a:prstGeom prst="rect">
             <a:avLst/>
@@ -5662,7 +3886,7 @@
               </a:spcAft>
             </a:pPr>
             <a:r>
-              <a:rPr sz="1500" b="1">
+              <a:rPr sz="1400" b="1">
                 <a:solidFill>
                   <a:srgbClr val="520978"/>
                 </a:solidFill>
@@ -5675,14 +3899,14 @@
       </p:sp>
       <p:sp>
         <p:nvSpPr>
-          <p:cNvPr id="13" name="TextBox 12"/>
+          <p:cNvPr id="14" name="TextBox 13"/>
           <p:cNvSpPr txBox="1"/>
           <p:nvPr/>
         </p:nvSpPr>
         <p:spPr>
           <a:xfrm>
-            <a:off x="822960" y="2148840"/>
-            <a:ext cx="4992624" cy="1371600"/>
+            <a:off x="777240" y="2121408"/>
+            <a:ext cx="5029200" cy="1234440"/>
           </a:xfrm>
           <a:prstGeom prst="rect">
             <a:avLst/>
@@ -5697,10 +3921,10 @@
           <a:p>
             <a:pPr algn="l">
               <a:lnSpc>
-                <a:spcPct val="112000"/>
-              </a:lnSpc>
-              <a:spcAft>
-                <a:spcPts val="1000"/>
+                <a:spcPct val="118000"/>
+              </a:lnSpc>
+              <a:spcAft>
+                <a:spcPts val="600"/>
               </a:spcAft>
             </a:pPr>
             <a:r>
@@ -5716,10 +3940,10 @@
           <a:p>
             <a:pPr algn="l">
               <a:lnSpc>
-                <a:spcPct val="112000"/>
-              </a:lnSpc>
-              <a:spcAft>
-                <a:spcPts val="1000"/>
+                <a:spcPct val="118000"/>
+              </a:lnSpc>
+              <a:spcAft>
+                <a:spcPts val="600"/>
               </a:spcAft>
             </a:pPr>
             <a:r>
@@ -5735,10 +3959,10 @@
           <a:p>
             <a:pPr algn="l">
               <a:lnSpc>
-                <a:spcPct val="112000"/>
-              </a:lnSpc>
-              <a:spcAft>
-                <a:spcPts val="1000"/>
+                <a:spcPct val="118000"/>
+              </a:lnSpc>
+              <a:spcAft>
+                <a:spcPts val="600"/>
               </a:spcAft>
             </a:pPr>
             <a:r>
@@ -5755,14 +3979,60 @@
       </p:sp>
       <p:sp>
         <p:nvSpPr>
-          <p:cNvPr id="14" name="TextBox 13"/>
+          <p:cNvPr id="15" name="Rounded Rectangle 14"/>
+          <p:cNvSpPr/>
+          <p:nvPr/>
+        </p:nvSpPr>
+        <p:spPr>
+          <a:xfrm>
+            <a:off x="6172200" y="1371600"/>
+            <a:ext cx="5632704" cy="2103120"/>
+          </a:xfrm>
+          <a:prstGeom prst="roundRect">
+            <a:avLst>
+              <a:gd name="adj" fmla="val 6000"/>
+            </a:avLst>
+          </a:prstGeom>
+          <a:solidFill>
+            <a:srgbClr val="F7F4FA"/>
+          </a:solidFill>
+          <a:ln>
+            <a:noFill/>
+          </a:ln>
+          <a:effectLst/>
+        </p:spPr>
+        <p:style>
+          <a:lnRef idx="1">
+            <a:schemeClr val="accent1"/>
+          </a:lnRef>
+          <a:fillRef idx="3">
+            <a:schemeClr val="accent1"/>
+          </a:fillRef>
+          <a:effectRef idx="2">
+            <a:schemeClr val="accent1"/>
+          </a:effectRef>
+          <a:fontRef idx="minor">
+            <a:schemeClr val="lt1"/>
+          </a:fontRef>
+        </p:style>
+        <p:txBody>
+          <a:bodyPr rtlCol="0" anchor="ctr"/>
+          <a:lstStyle/>
+          <a:p>
+            <a:pPr algn="ctr"/>
+          </a:p>
+        </p:txBody>
+      </p:sp>
+      <p:sp>
+        <p:nvSpPr>
+          <p:cNvPr id="16" name="TextBox 15"/>
           <p:cNvSpPr txBox="1"/>
           <p:nvPr/>
         </p:nvSpPr>
         <p:spPr>
           <a:xfrm>
-            <a:off x="6373368" y="1600200"/>
-            <a:ext cx="4992624" cy="457200"/>
+            <a:off x="6446520" y="1572768"/>
+            <a:ext cx="5029200" cy="411480"/>
           </a:xfrm>
           <a:prstGeom prst="rect">
             <a:avLst/>
@@ -5784,7 +4054,7 @@
               </a:spcAft>
             </a:pPr>
             <a:r>
-              <a:rPr sz="1500" b="1">
+              <a:rPr sz="1400" b="1">
                 <a:solidFill>
                   <a:srgbClr val="520978"/>
                 </a:solidFill>
@@ -5797,14 +4067,14 @@
       </p:sp>
       <p:sp>
         <p:nvSpPr>
-          <p:cNvPr id="15" name="TextBox 14"/>
+          <p:cNvPr id="17" name="TextBox 16"/>
           <p:cNvSpPr txBox="1"/>
           <p:nvPr/>
         </p:nvSpPr>
         <p:spPr>
           <a:xfrm>
-            <a:off x="6373368" y="2148840"/>
-            <a:ext cx="4992624" cy="1371600"/>
+            <a:off x="6446520" y="2121408"/>
+            <a:ext cx="5029200" cy="1234440"/>
           </a:xfrm>
           <a:prstGeom prst="rect">
             <a:avLst/>
@@ -5819,10 +4089,10 @@
           <a:p>
             <a:pPr algn="l">
               <a:lnSpc>
-                <a:spcPct val="112000"/>
-              </a:lnSpc>
-              <a:spcAft>
-                <a:spcPts val="1000"/>
+                <a:spcPct val="118000"/>
+              </a:lnSpc>
+              <a:spcAft>
+                <a:spcPts val="600"/>
               </a:spcAft>
             </a:pPr>
             <a:r>
@@ -5838,10 +4108,10 @@
           <a:p>
             <a:pPr algn="l">
               <a:lnSpc>
-                <a:spcPct val="112000"/>
-              </a:lnSpc>
-              <a:spcAft>
-                <a:spcPts val="1000"/>
+                <a:spcPct val="118000"/>
+              </a:lnSpc>
+              <a:spcAft>
+                <a:spcPts val="600"/>
               </a:spcAft>
             </a:pPr>
             <a:r>
@@ -5857,10 +4127,10 @@
           <a:p>
             <a:pPr algn="l">
               <a:lnSpc>
-                <a:spcPct val="112000"/>
-              </a:lnSpc>
-              <a:spcAft>
-                <a:spcPts val="1000"/>
+                <a:spcPct val="118000"/>
+              </a:lnSpc>
+              <a:spcAft>
+                <a:spcPts val="600"/>
               </a:spcAft>
             </a:pPr>
             <a:r>
@@ -5877,14 +4147,60 @@
       </p:sp>
       <p:sp>
         <p:nvSpPr>
-          <p:cNvPr id="16" name="TextBox 15"/>
+          <p:cNvPr id="18" name="Rounded Rectangle 17"/>
+          <p:cNvSpPr/>
+          <p:nvPr/>
+        </p:nvSpPr>
+        <p:spPr>
+          <a:xfrm>
+            <a:off x="502920" y="3675887"/>
+            <a:ext cx="5632704" cy="2103120"/>
+          </a:xfrm>
+          <a:prstGeom prst="roundRect">
+            <a:avLst>
+              <a:gd name="adj" fmla="val 6000"/>
+            </a:avLst>
+          </a:prstGeom>
+          <a:solidFill>
+            <a:srgbClr val="F7F4FA"/>
+          </a:solidFill>
+          <a:ln>
+            <a:noFill/>
+          </a:ln>
+          <a:effectLst/>
+        </p:spPr>
+        <p:style>
+          <a:lnRef idx="1">
+            <a:schemeClr val="accent1"/>
+          </a:lnRef>
+          <a:fillRef idx="3">
+            <a:schemeClr val="accent1"/>
+          </a:fillRef>
+          <a:effectRef idx="2">
+            <a:schemeClr val="accent1"/>
+          </a:effectRef>
+          <a:fontRef idx="minor">
+            <a:schemeClr val="lt1"/>
+          </a:fontRef>
+        </p:style>
+        <p:txBody>
+          <a:bodyPr rtlCol="0" anchor="ctr"/>
+          <a:lstStyle/>
+          <a:p>
+            <a:pPr algn="ctr"/>
+          </a:p>
+        </p:txBody>
+      </p:sp>
+      <p:sp>
+        <p:nvSpPr>
+          <p:cNvPr id="19" name="TextBox 18"/>
           <p:cNvSpPr txBox="1"/>
           <p:nvPr/>
         </p:nvSpPr>
         <p:spPr>
           <a:xfrm>
-            <a:off x="822960" y="3657600"/>
-            <a:ext cx="4992624" cy="457200"/>
+            <a:off x="777240" y="3877055"/>
+            <a:ext cx="5029200" cy="411480"/>
           </a:xfrm>
           <a:prstGeom prst="rect">
             <a:avLst/>
@@ -5906,7 +4222,7 @@
               </a:spcAft>
             </a:pPr>
             <a:r>
-              <a:rPr sz="1500" b="1">
+              <a:rPr sz="1400" b="1">
                 <a:solidFill>
                   <a:srgbClr val="520978"/>
                 </a:solidFill>
@@ -5919,14 +4235,14 @@
       </p:sp>
       <p:sp>
         <p:nvSpPr>
-          <p:cNvPr id="17" name="TextBox 16"/>
+          <p:cNvPr id="20" name="TextBox 19"/>
           <p:cNvSpPr txBox="1"/>
           <p:nvPr/>
         </p:nvSpPr>
         <p:spPr>
           <a:xfrm>
-            <a:off x="822960" y="4206240"/>
-            <a:ext cx="4992624" cy="1371600"/>
+            <a:off x="777240" y="4425696"/>
+            <a:ext cx="5029200" cy="1234440"/>
           </a:xfrm>
           <a:prstGeom prst="rect">
             <a:avLst/>
@@ -5941,10 +4257,10 @@
           <a:p>
             <a:pPr algn="l">
               <a:lnSpc>
-                <a:spcPct val="112000"/>
-              </a:lnSpc>
-              <a:spcAft>
-                <a:spcPts val="1000"/>
+                <a:spcPct val="118000"/>
+              </a:lnSpc>
+              <a:spcAft>
+                <a:spcPts val="600"/>
               </a:spcAft>
             </a:pPr>
             <a:r>
@@ -5960,10 +4276,10 @@
           <a:p>
             <a:pPr algn="l">
               <a:lnSpc>
-                <a:spcPct val="112000"/>
-              </a:lnSpc>
-              <a:spcAft>
-                <a:spcPts val="1000"/>
+                <a:spcPct val="118000"/>
+              </a:lnSpc>
+              <a:spcAft>
+                <a:spcPts val="600"/>
               </a:spcAft>
             </a:pPr>
             <a:r>
@@ -5979,10 +4295,10 @@
           <a:p>
             <a:pPr algn="l">
               <a:lnSpc>
-                <a:spcPct val="112000"/>
-              </a:lnSpc>
-              <a:spcAft>
-                <a:spcPts val="1000"/>
+                <a:spcPct val="118000"/>
+              </a:lnSpc>
+              <a:spcAft>
+                <a:spcPts val="600"/>
               </a:spcAft>
             </a:pPr>
             <a:r>
@@ -5999,14 +4315,60 @@
       </p:sp>
       <p:sp>
         <p:nvSpPr>
-          <p:cNvPr id="18" name="TextBox 17"/>
+          <p:cNvPr id="21" name="Rounded Rectangle 20"/>
+          <p:cNvSpPr/>
+          <p:nvPr/>
+        </p:nvSpPr>
+        <p:spPr>
+          <a:xfrm>
+            <a:off x="6172200" y="3675887"/>
+            <a:ext cx="5632704" cy="2103120"/>
+          </a:xfrm>
+          <a:prstGeom prst="roundRect">
+            <a:avLst>
+              <a:gd name="adj" fmla="val 6000"/>
+            </a:avLst>
+          </a:prstGeom>
+          <a:solidFill>
+            <a:srgbClr val="F7F4FA"/>
+          </a:solidFill>
+          <a:ln>
+            <a:noFill/>
+          </a:ln>
+          <a:effectLst/>
+        </p:spPr>
+        <p:style>
+          <a:lnRef idx="1">
+            <a:schemeClr val="accent1"/>
+          </a:lnRef>
+          <a:fillRef idx="3">
+            <a:schemeClr val="accent1"/>
+          </a:fillRef>
+          <a:effectRef idx="2">
+            <a:schemeClr val="accent1"/>
+          </a:effectRef>
+          <a:fontRef idx="minor">
+            <a:schemeClr val="lt1"/>
+          </a:fontRef>
+        </p:style>
+        <p:txBody>
+          <a:bodyPr rtlCol="0" anchor="ctr"/>
+          <a:lstStyle/>
+          <a:p>
+            <a:pPr algn="ctr"/>
+          </a:p>
+        </p:txBody>
+      </p:sp>
+      <p:sp>
+        <p:nvSpPr>
+          <p:cNvPr id="22" name="TextBox 21"/>
           <p:cNvSpPr txBox="1"/>
           <p:nvPr/>
         </p:nvSpPr>
         <p:spPr>
           <a:xfrm>
-            <a:off x="6373368" y="3657600"/>
-            <a:ext cx="4992624" cy="457200"/>
+            <a:off x="6446520" y="3877055"/>
+            <a:ext cx="5029200" cy="411480"/>
           </a:xfrm>
           <a:prstGeom prst="rect">
             <a:avLst/>
@@ -6028,7 +4390,7 @@
               </a:spcAft>
             </a:pPr>
             <a:r>
-              <a:rPr sz="1500" b="1">
+              <a:rPr sz="1400" b="1">
                 <a:solidFill>
                   <a:srgbClr val="520978"/>
                 </a:solidFill>
@@ -6041,14 +4403,14 @@
       </p:sp>
       <p:sp>
         <p:nvSpPr>
-          <p:cNvPr id="19" name="TextBox 18"/>
+          <p:cNvPr id="23" name="TextBox 22"/>
           <p:cNvSpPr txBox="1"/>
           <p:nvPr/>
         </p:nvSpPr>
         <p:spPr>
           <a:xfrm>
-            <a:off x="6373368" y="4206240"/>
-            <a:ext cx="4992624" cy="1371600"/>
+            <a:off x="6446520" y="4425696"/>
+            <a:ext cx="5029200" cy="1234440"/>
           </a:xfrm>
           <a:prstGeom prst="rect">
             <a:avLst/>
@@ -6063,10 +4425,10 @@
           <a:p>
             <a:pPr algn="l">
               <a:lnSpc>
-                <a:spcPct val="112000"/>
-              </a:lnSpc>
-              <a:spcAft>
-                <a:spcPts val="1000"/>
+                <a:spcPct val="118000"/>
+              </a:lnSpc>
+              <a:spcAft>
+                <a:spcPts val="600"/>
               </a:spcAft>
             </a:pPr>
             <a:r>
@@ -6082,10 +4444,10 @@
           <a:p>
             <a:pPr algn="l">
               <a:lnSpc>
-                <a:spcPct val="112000"/>
-              </a:lnSpc>
-              <a:spcAft>
-                <a:spcPts val="1000"/>
+                <a:spcPct val="118000"/>
+              </a:lnSpc>
+              <a:spcAft>
+                <a:spcPts val="600"/>
               </a:spcAft>
             </a:pPr>
             <a:r>
@@ -6101,10 +4463,10 @@
           <a:p>
             <a:pPr algn="l">
               <a:lnSpc>
-                <a:spcPct val="112000"/>
-              </a:lnSpc>
-              <a:spcAft>
-                <a:spcPts val="1000"/>
+                <a:spcPct val="118000"/>
+              </a:lnSpc>
+              <a:spcAft>
+                <a:spcPts val="600"/>
               </a:spcAft>
             </a:pPr>
             <a:r>
@@ -6180,368 +4542,6 @@
             </a:prstGeom>
           </p:spPr>
         </p:pic>
-        <p:sp>
-          <p:nvSpPr>
-            <p:cNvPr id="4" name="object 4"/>
-            <p:cNvSpPr/>
-            <p:nvPr/>
-          </p:nvSpPr>
-          <p:spPr>
-            <a:xfrm>
-              <a:off x="347472" y="323088"/>
-              <a:ext cx="3108960" cy="622300"/>
-            </a:xfrm>
-            <a:custGeom>
-              <a:avLst/>
-              <a:gdLst/>
-              <a:ahLst/>
-              <a:cxnLst/>
-              <a:rect l="l" t="t" r="r" b="b"/>
-              <a:pathLst>
-                <a:path w="3108960" h="622300">
-                  <a:moveTo>
-                    <a:pt x="2992628" y="0"/>
-                  </a:moveTo>
-                  <a:lnTo>
-                    <a:pt x="116319" y="0"/>
-                  </a:lnTo>
-                  <a:lnTo>
-                    <a:pt x="71039" y="9140"/>
-                  </a:lnTo>
-                  <a:lnTo>
-                    <a:pt x="34066" y="34067"/>
-                  </a:lnTo>
-                  <a:lnTo>
-                    <a:pt x="9139" y="71044"/>
-                  </a:lnTo>
-                  <a:lnTo>
-                    <a:pt x="0" y="116331"/>
-                  </a:lnTo>
-                  <a:lnTo>
-                    <a:pt x="0" y="505459"/>
-                  </a:lnTo>
-                  <a:lnTo>
-                    <a:pt x="9139" y="550747"/>
-                  </a:lnTo>
-                  <a:lnTo>
-                    <a:pt x="34066" y="587724"/>
-                  </a:lnTo>
-                  <a:lnTo>
-                    <a:pt x="71039" y="612651"/>
-                  </a:lnTo>
-                  <a:lnTo>
-                    <a:pt x="116319" y="621791"/>
-                  </a:lnTo>
-                  <a:lnTo>
-                    <a:pt x="2992628" y="621791"/>
-                  </a:lnTo>
-                  <a:lnTo>
-                    <a:pt x="3037915" y="612651"/>
-                  </a:lnTo>
-                  <a:lnTo>
-                    <a:pt x="3074892" y="587724"/>
-                  </a:lnTo>
-                  <a:lnTo>
-                    <a:pt x="3099819" y="550747"/>
-                  </a:lnTo>
-                  <a:lnTo>
-                    <a:pt x="3108960" y="505459"/>
-                  </a:lnTo>
-                  <a:lnTo>
-                    <a:pt x="3108960" y="116331"/>
-                  </a:lnTo>
-                  <a:lnTo>
-                    <a:pt x="3099819" y="71044"/>
-                  </a:lnTo>
-                  <a:lnTo>
-                    <a:pt x="3074892" y="34067"/>
-                  </a:lnTo>
-                  <a:lnTo>
-                    <a:pt x="3037915" y="9140"/>
-                  </a:lnTo>
-                  <a:lnTo>
-                    <a:pt x="2992628" y="0"/>
-                  </a:lnTo>
-                  <a:close/>
-                </a:path>
-              </a:pathLst>
-            </a:custGeom>
-            <a:solidFill>
-              <a:srgbClr val="520977"/>
-            </a:solidFill>
-          </p:spPr>
-          <p:txBody>
-            <a:bodyPr wrap="square" lIns="0" tIns="0" rIns="0" bIns="0" rtlCol="0"/>
-            <a:lstStyle/>
-            <a:p/>
-          </p:txBody>
-        </p:sp>
-        <p:sp>
-          <p:nvSpPr>
-            <p:cNvPr id="5" name="object 5"/>
-            <p:cNvSpPr/>
-            <p:nvPr/>
-          </p:nvSpPr>
-          <p:spPr>
-            <a:xfrm>
-              <a:off x="348995" y="1016508"/>
-              <a:ext cx="6806565" cy="2030095"/>
-            </a:xfrm>
-            <a:custGeom>
-              <a:avLst/>
-              <a:gdLst/>
-              <a:ahLst/>
-              <a:cxnLst/>
-              <a:rect l="l" t="t" r="r" b="b"/>
-              <a:pathLst>
-                <a:path w="6806565" h="2030095">
-                  <a:moveTo>
-                    <a:pt x="6600571" y="0"/>
-                  </a:moveTo>
-                  <a:lnTo>
-                    <a:pt x="205587" y="0"/>
-                  </a:lnTo>
-                  <a:lnTo>
-                    <a:pt x="158449" y="5431"/>
-                  </a:lnTo>
-                  <a:lnTo>
-                    <a:pt x="115177" y="20902"/>
-                  </a:lnTo>
-                  <a:lnTo>
-                    <a:pt x="77005" y="45176"/>
-                  </a:lnTo>
-                  <a:lnTo>
-                    <a:pt x="45166" y="77020"/>
-                  </a:lnTo>
-                  <a:lnTo>
-                    <a:pt x="20897" y="115197"/>
-                  </a:lnTo>
-                  <a:lnTo>
-                    <a:pt x="5429" y="158473"/>
-                  </a:lnTo>
-                  <a:lnTo>
-                    <a:pt x="0" y="205612"/>
-                  </a:lnTo>
-                  <a:lnTo>
-                    <a:pt x="0" y="1824354"/>
-                  </a:lnTo>
-                  <a:lnTo>
-                    <a:pt x="5429" y="1871494"/>
-                  </a:lnTo>
-                  <a:lnTo>
-                    <a:pt x="20897" y="1914770"/>
-                  </a:lnTo>
-                  <a:lnTo>
-                    <a:pt x="45166" y="1952947"/>
-                  </a:lnTo>
-                  <a:lnTo>
-                    <a:pt x="77005" y="1984791"/>
-                  </a:lnTo>
-                  <a:lnTo>
-                    <a:pt x="115177" y="2009065"/>
-                  </a:lnTo>
-                  <a:lnTo>
-                    <a:pt x="158449" y="2024536"/>
-                  </a:lnTo>
-                  <a:lnTo>
-                    <a:pt x="205587" y="2029967"/>
-                  </a:lnTo>
-                  <a:lnTo>
-                    <a:pt x="6600571" y="2029967"/>
-                  </a:lnTo>
-                  <a:lnTo>
-                    <a:pt x="6647710" y="2024536"/>
-                  </a:lnTo>
-                  <a:lnTo>
-                    <a:pt x="6690986" y="2009065"/>
-                  </a:lnTo>
-                  <a:lnTo>
-                    <a:pt x="6729163" y="1984791"/>
-                  </a:lnTo>
-                  <a:lnTo>
-                    <a:pt x="6761007" y="1952947"/>
-                  </a:lnTo>
-                  <a:lnTo>
-                    <a:pt x="6785281" y="1914770"/>
-                  </a:lnTo>
-                  <a:lnTo>
-                    <a:pt x="6800752" y="1871494"/>
-                  </a:lnTo>
-                  <a:lnTo>
-                    <a:pt x="6806183" y="1824354"/>
-                  </a:lnTo>
-                  <a:lnTo>
-                    <a:pt x="6806183" y="205612"/>
-                  </a:lnTo>
-                  <a:lnTo>
-                    <a:pt x="6800752" y="158473"/>
-                  </a:lnTo>
-                  <a:lnTo>
-                    <a:pt x="6785281" y="115197"/>
-                  </a:lnTo>
-                  <a:lnTo>
-                    <a:pt x="6761007" y="77020"/>
-                  </a:lnTo>
-                  <a:lnTo>
-                    <a:pt x="6729163" y="45176"/>
-                  </a:lnTo>
-                  <a:lnTo>
-                    <a:pt x="6690986" y="20902"/>
-                  </a:lnTo>
-                  <a:lnTo>
-                    <a:pt x="6647710" y="5431"/>
-                  </a:lnTo>
-                  <a:lnTo>
-                    <a:pt x="6600571" y="0"/>
-                  </a:lnTo>
-                  <a:close/>
-                </a:path>
-              </a:pathLst>
-            </a:custGeom>
-            <a:solidFill>
-              <a:srgbClr val="FFFFFF"/>
-            </a:solidFill>
-          </p:spPr>
-          <p:txBody>
-            <a:bodyPr wrap="square" lIns="0" tIns="0" rIns="0" bIns="0" rtlCol="0"/>
-            <a:lstStyle/>
-            <a:p/>
-          </p:txBody>
-        </p:sp>
-        <p:sp>
-          <p:nvSpPr>
-            <p:cNvPr id="6" name="object 6"/>
-            <p:cNvSpPr/>
-            <p:nvPr/>
-          </p:nvSpPr>
-          <p:spPr>
-            <a:xfrm>
-              <a:off x="348995" y="1016508"/>
-              <a:ext cx="6806565" cy="2030095"/>
-            </a:xfrm>
-            <a:custGeom>
-              <a:avLst/>
-              <a:gdLst/>
-              <a:ahLst/>
-              <a:cxnLst/>
-              <a:rect l="l" t="t" r="r" b="b"/>
-              <a:pathLst>
-                <a:path w="6806565" h="2030095">
-                  <a:moveTo>
-                    <a:pt x="0" y="205612"/>
-                  </a:moveTo>
-                  <a:lnTo>
-                    <a:pt x="5429" y="158473"/>
-                  </a:lnTo>
-                  <a:lnTo>
-                    <a:pt x="20897" y="115197"/>
-                  </a:lnTo>
-                  <a:lnTo>
-                    <a:pt x="45166" y="77020"/>
-                  </a:lnTo>
-                  <a:lnTo>
-                    <a:pt x="77005" y="45176"/>
-                  </a:lnTo>
-                  <a:lnTo>
-                    <a:pt x="115177" y="20902"/>
-                  </a:lnTo>
-                  <a:lnTo>
-                    <a:pt x="158449" y="5431"/>
-                  </a:lnTo>
-                  <a:lnTo>
-                    <a:pt x="205587" y="0"/>
-                  </a:lnTo>
-                  <a:lnTo>
-                    <a:pt x="6600571" y="0"/>
-                  </a:lnTo>
-                  <a:lnTo>
-                    <a:pt x="6647710" y="5431"/>
-                  </a:lnTo>
-                  <a:lnTo>
-                    <a:pt x="6690986" y="20902"/>
-                  </a:lnTo>
-                  <a:lnTo>
-                    <a:pt x="6729163" y="45176"/>
-                  </a:lnTo>
-                  <a:lnTo>
-                    <a:pt x="6761007" y="77020"/>
-                  </a:lnTo>
-                  <a:lnTo>
-                    <a:pt x="6785281" y="115197"/>
-                  </a:lnTo>
-                  <a:lnTo>
-                    <a:pt x="6800752" y="158473"/>
-                  </a:lnTo>
-                  <a:lnTo>
-                    <a:pt x="6806183" y="205612"/>
-                  </a:lnTo>
-                  <a:lnTo>
-                    <a:pt x="6806183" y="1824354"/>
-                  </a:lnTo>
-                  <a:lnTo>
-                    <a:pt x="6800752" y="1871494"/>
-                  </a:lnTo>
-                  <a:lnTo>
-                    <a:pt x="6785281" y="1914770"/>
-                  </a:lnTo>
-                  <a:lnTo>
-                    <a:pt x="6761007" y="1952947"/>
-                  </a:lnTo>
-                  <a:lnTo>
-                    <a:pt x="6729163" y="1984791"/>
-                  </a:lnTo>
-                  <a:lnTo>
-                    <a:pt x="6690986" y="2009065"/>
-                  </a:lnTo>
-                  <a:lnTo>
-                    <a:pt x="6647710" y="2024536"/>
-                  </a:lnTo>
-                  <a:lnTo>
-                    <a:pt x="6600571" y="2029967"/>
-                  </a:lnTo>
-                  <a:lnTo>
-                    <a:pt x="205587" y="2029967"/>
-                  </a:lnTo>
-                  <a:lnTo>
-                    <a:pt x="158449" y="2024536"/>
-                  </a:lnTo>
-                  <a:lnTo>
-                    <a:pt x="115177" y="2009065"/>
-                  </a:lnTo>
-                  <a:lnTo>
-                    <a:pt x="77005" y="1984791"/>
-                  </a:lnTo>
-                  <a:lnTo>
-                    <a:pt x="45166" y="1952947"/>
-                  </a:lnTo>
-                  <a:lnTo>
-                    <a:pt x="20897" y="1914770"/>
-                  </a:lnTo>
-                  <a:lnTo>
-                    <a:pt x="5429" y="1871494"/>
-                  </a:lnTo>
-                  <a:lnTo>
-                    <a:pt x="0" y="1824354"/>
-                  </a:lnTo>
-                  <a:lnTo>
-                    <a:pt x="0" y="205612"/>
-                  </a:lnTo>
-                  <a:close/>
-                </a:path>
-              </a:pathLst>
-            </a:custGeom>
-            <a:ln w="9144">
-              <a:solidFill>
-                <a:srgbClr val="520977"/>
-              </a:solidFill>
-            </a:ln>
-          </p:spPr>
-          <p:txBody>
-            <a:bodyPr wrap="square" lIns="0" tIns="0" rIns="0" bIns="0" rtlCol="0"/>
-            <a:lstStyle/>
-            <a:p/>
-          </p:txBody>
-        </p:sp>
       </p:grpSp>
       <p:sp>
         <p:nvSpPr>
@@ -6554,10 +4554,13 @@
           </p:nvPr>
         </p:nvSpPr>
         <p:spPr>
+          <a:xfrm>
+            <a:ext cx="548640" cy="0"/>
+          </a:xfrm>
           <a:prstGeom prst="rect"/>
         </p:spPr>
         <p:txBody>
-          <a:bodyPr wrap="square" lIns="0" tIns="43180" rIns="0" bIns="0" rtlCol="0" vert="horz">
+          <a:bodyPr wrap="none" lIns="0" tIns="43180" rIns="0" bIns="0" rtlCol="0" vert="horz">
             <a:spAutoFit/>
           </a:bodyPr>
           <a:lstStyle/>
@@ -6645,8 +4648,8 @@
         </p:nvSpPr>
         <p:spPr>
           <a:xfrm>
-            <a:off x="347472" y="1014984"/>
-            <a:ext cx="11384280" cy="2029968"/>
+            <a:off x="502920" y="1371600"/>
+            <a:ext cx="5632704" cy="3291840"/>
           </a:xfrm>
           <a:prstGeom prst="roundRect">
             <a:avLst>
@@ -6656,8 +4659,10 @@
           <a:solidFill>
             <a:srgbClr val="FFFFFF"/>
           </a:solidFill>
-          <a:ln>
-            <a:noFill/>
+          <a:ln w="12700">
+            <a:solidFill>
+              <a:srgbClr val="F7F4FA"/>
+            </a:solidFill>
           </a:ln>
           <a:effectLst/>
         </p:spPr>
@@ -6691,8 +4696,8 @@
         </p:nvSpPr>
         <p:spPr>
           <a:xfrm>
-            <a:off x="603504" y="1225296"/>
-            <a:ext cx="5120640" cy="1645920"/>
+            <a:off x="795528" y="1645920"/>
+            <a:ext cx="5047488" cy="457200"/>
           </a:xfrm>
           <a:prstGeom prst="rect">
             <a:avLst/>
@@ -6710,36 +4715,17 @@
                 <a:spcPct val="112000"/>
               </a:lnSpc>
               <a:spcAft>
-                <a:spcPts val="600"/>
-              </a:spcAft>
-            </a:pPr>
-            <a:r>
-              <a:rPr sz="1300" b="1">
+                <a:spcPts val="0"/>
+              </a:spcAft>
+            </a:pPr>
+            <a:r>
+              <a:rPr sz="1500" b="1">
                 <a:solidFill>
                   <a:srgbClr val="520978"/>
                 </a:solidFill>
                 <a:latin typeface="Montserrat"/>
               </a:rPr>
               <a:t>Потребность</a:t>
-            </a:r>
-          </a:p>
-          <a:p>
-            <a:pPr algn="l">
-              <a:lnSpc>
-                <a:spcPct val="112000"/>
-              </a:lnSpc>
-              <a:spcAft>
-                <a:spcPts val="400"/>
-              </a:spcAft>
-            </a:pPr>
-            <a:r>
-              <a:rPr sz="1150" b="0">
-                <a:solidFill>
-                  <a:srgbClr val="1C1D22"/>
-                </a:solidFill>
-                <a:latin typeface="Montserrat"/>
-              </a:rPr>
-              <a:t>ИТ Школа ведёт десятки вузов-партнёров. Статус взаимодействия и договорённости разбросаны по таблицам и чатам, из-за чего теряются сроки и история.</a:t>
             </a:r>
           </a:p>
         </p:txBody>
@@ -6752,8 +4738,8 @@
         </p:nvSpPr>
         <p:spPr>
           <a:xfrm>
-            <a:off x="6035040" y="1225296"/>
-            <a:ext cx="5486400" cy="1645920"/>
+            <a:off x="795528" y="2286000"/>
+            <a:ext cx="5047488" cy="2194560"/>
           </a:xfrm>
           <a:prstGeom prst="rect">
             <a:avLst/>
@@ -6768,14 +4754,104 @@
           <a:p>
             <a:pPr algn="l">
               <a:lnSpc>
+                <a:spcPct val="130000"/>
+              </a:lnSpc>
+              <a:spcAft>
+                <a:spcPts val="0"/>
+              </a:spcAft>
+            </a:pPr>
+            <a:r>
+              <a:rPr sz="1300" b="0">
+                <a:solidFill>
+                  <a:srgbClr val="1C1D22"/>
+                </a:solidFill>
+                <a:latin typeface="Montserrat"/>
+              </a:rPr>
+              <a:t>ИТ Школа ведёт десятки вузов-партнёров. Статус взаимодействия и договорённости разбросаны по таблицам и чатам, из-за чего теряются сроки и история.</a:t>
+            </a:r>
+          </a:p>
+        </p:txBody>
+      </p:sp>
+      <p:sp>
+        <p:nvSpPr>
+          <p:cNvPr id="12" name="Rounded Rectangle 11"/>
+          <p:cNvSpPr/>
+          <p:nvPr/>
+        </p:nvSpPr>
+        <p:spPr>
+          <a:xfrm>
+            <a:off x="6172200" y="1371600"/>
+            <a:ext cx="5632704" cy="3291840"/>
+          </a:xfrm>
+          <a:prstGeom prst="roundRect">
+            <a:avLst>
+              <a:gd name="adj" fmla="val 6000"/>
+            </a:avLst>
+          </a:prstGeom>
+          <a:solidFill>
+            <a:srgbClr val="FFFFFF"/>
+          </a:solidFill>
+          <a:ln w="12700">
+            <a:solidFill>
+              <a:srgbClr val="F7F4FA"/>
+            </a:solidFill>
+          </a:ln>
+          <a:effectLst/>
+        </p:spPr>
+        <p:style>
+          <a:lnRef idx="1">
+            <a:schemeClr val="accent1"/>
+          </a:lnRef>
+          <a:fillRef idx="3">
+            <a:schemeClr val="accent1"/>
+          </a:fillRef>
+          <a:effectRef idx="2">
+            <a:schemeClr val="accent1"/>
+          </a:effectRef>
+          <a:fontRef idx="minor">
+            <a:schemeClr val="lt1"/>
+          </a:fontRef>
+        </p:style>
+        <p:txBody>
+          <a:bodyPr rtlCol="0" anchor="ctr"/>
+          <a:lstStyle/>
+          <a:p>
+            <a:pPr algn="ctr"/>
+          </a:p>
+        </p:txBody>
+      </p:sp>
+      <p:sp>
+        <p:nvSpPr>
+          <p:cNvPr id="13" name="TextBox 12"/>
+          <p:cNvSpPr txBox="1"/>
+          <p:nvPr/>
+        </p:nvSpPr>
+        <p:spPr>
+          <a:xfrm>
+            <a:off x="6464808" y="1645920"/>
+            <a:ext cx="5047488" cy="457200"/>
+          </a:xfrm>
+          <a:prstGeom prst="rect">
+            <a:avLst/>
+          </a:prstGeom>
+          <a:noFill/>
+        </p:spPr>
+        <p:txBody>
+          <a:bodyPr wrap="square">
+            <a:spAutoFit/>
+          </a:bodyPr>
+          <a:lstStyle/>
+          <a:p>
+            <a:pPr algn="l">
+              <a:lnSpc>
                 <a:spcPct val="112000"/>
               </a:lnSpc>
               <a:spcAft>
-                <a:spcPts val="600"/>
-              </a:spcAft>
-            </a:pPr>
-            <a:r>
-              <a:rPr sz="1300" b="1">
+                <a:spcPts val="0"/>
+              </a:spcAft>
+            </a:pPr>
+            <a:r>
+              <a:rPr sz="1500" b="1">
                 <a:solidFill>
                   <a:srgbClr val="520978"/>
                 </a:solidFill>
@@ -6784,17 +4860,40 @@
               <a:t>Продвижение и развитие</a:t>
             </a:r>
           </a:p>
+        </p:txBody>
+      </p:sp>
+      <p:sp>
+        <p:nvSpPr>
+          <p:cNvPr id="14" name="TextBox 13"/>
+          <p:cNvSpPr txBox="1"/>
+          <p:nvPr/>
+        </p:nvSpPr>
+        <p:spPr>
+          <a:xfrm>
+            <a:off x="6464808" y="2286000"/>
+            <a:ext cx="5047488" cy="2194560"/>
+          </a:xfrm>
+          <a:prstGeom prst="rect">
+            <a:avLst/>
+          </a:prstGeom>
+          <a:noFill/>
+        </p:spPr>
+        <p:txBody>
+          <a:bodyPr wrap="square">
+            <a:spAutoFit/>
+          </a:bodyPr>
+          <a:lstStyle/>
           <a:p>
             <a:pPr algn="l">
               <a:lnSpc>
-                <a:spcPct val="112000"/>
-              </a:lnSpc>
-              <a:spcAft>
-                <a:spcPts val="400"/>
-              </a:spcAft>
-            </a:pPr>
-            <a:r>
-              <a:rPr sz="1150" b="0">
+                <a:spcPct val="130000"/>
+              </a:lnSpc>
+              <a:spcAft>
+                <a:spcPts val="0"/>
+              </a:spcAft>
+            </a:pPr>
+            <a:r>
+              <a:rPr sz="1300" b="0">
                 <a:solidFill>
                   <a:srgbClr val="1C1D22"/>
                 </a:solidFill>
@@ -6866,1290 +4965,6 @@
             </a:prstGeom>
           </p:spPr>
         </p:pic>
-        <p:sp>
-          <p:nvSpPr>
-            <p:cNvPr id="4" name="object 4"/>
-            <p:cNvSpPr/>
-            <p:nvPr/>
-          </p:nvSpPr>
-          <p:spPr>
-            <a:xfrm>
-              <a:off x="347472" y="323088"/>
-              <a:ext cx="3108960" cy="622300"/>
-            </a:xfrm>
-            <a:custGeom>
-              <a:avLst/>
-              <a:gdLst/>
-              <a:ahLst/>
-              <a:cxnLst/>
-              <a:rect l="l" t="t" r="r" b="b"/>
-              <a:pathLst>
-                <a:path w="3108960" h="622300">
-                  <a:moveTo>
-                    <a:pt x="2992628" y="0"/>
-                  </a:moveTo>
-                  <a:lnTo>
-                    <a:pt x="116319" y="0"/>
-                  </a:lnTo>
-                  <a:lnTo>
-                    <a:pt x="71039" y="9140"/>
-                  </a:lnTo>
-                  <a:lnTo>
-                    <a:pt x="34066" y="34067"/>
-                  </a:lnTo>
-                  <a:lnTo>
-                    <a:pt x="9139" y="71044"/>
-                  </a:lnTo>
-                  <a:lnTo>
-                    <a:pt x="0" y="116331"/>
-                  </a:lnTo>
-                  <a:lnTo>
-                    <a:pt x="0" y="505459"/>
-                  </a:lnTo>
-                  <a:lnTo>
-                    <a:pt x="9139" y="550747"/>
-                  </a:lnTo>
-                  <a:lnTo>
-                    <a:pt x="34066" y="587724"/>
-                  </a:lnTo>
-                  <a:lnTo>
-                    <a:pt x="71039" y="612651"/>
-                  </a:lnTo>
-                  <a:lnTo>
-                    <a:pt x="116319" y="621791"/>
-                  </a:lnTo>
-                  <a:lnTo>
-                    <a:pt x="2992628" y="621791"/>
-                  </a:lnTo>
-                  <a:lnTo>
-                    <a:pt x="3037915" y="612651"/>
-                  </a:lnTo>
-                  <a:lnTo>
-                    <a:pt x="3074892" y="587724"/>
-                  </a:lnTo>
-                  <a:lnTo>
-                    <a:pt x="3099819" y="550747"/>
-                  </a:lnTo>
-                  <a:lnTo>
-                    <a:pt x="3108960" y="505459"/>
-                  </a:lnTo>
-                  <a:lnTo>
-                    <a:pt x="3108960" y="116331"/>
-                  </a:lnTo>
-                  <a:lnTo>
-                    <a:pt x="3099819" y="71044"/>
-                  </a:lnTo>
-                  <a:lnTo>
-                    <a:pt x="3074892" y="34067"/>
-                  </a:lnTo>
-                  <a:lnTo>
-                    <a:pt x="3037915" y="9140"/>
-                  </a:lnTo>
-                  <a:lnTo>
-                    <a:pt x="2992628" y="0"/>
-                  </a:lnTo>
-                  <a:close/>
-                </a:path>
-              </a:pathLst>
-            </a:custGeom>
-            <a:solidFill>
-              <a:srgbClr val="520977"/>
-            </a:solidFill>
-          </p:spPr>
-          <p:txBody>
-            <a:bodyPr wrap="square" lIns="0" tIns="0" rIns="0" bIns="0" rtlCol="0"/>
-            <a:lstStyle/>
-            <a:p/>
-          </p:txBody>
-        </p:sp>
-        <p:sp>
-          <p:nvSpPr>
-            <p:cNvPr id="5" name="object 5"/>
-            <p:cNvSpPr/>
-            <p:nvPr/>
-          </p:nvSpPr>
-          <p:spPr>
-            <a:xfrm>
-              <a:off x="5954267" y="1367027"/>
-              <a:ext cx="5904230" cy="792480"/>
-            </a:xfrm>
-            <a:custGeom>
-              <a:avLst/>
-              <a:gdLst/>
-              <a:ahLst/>
-              <a:cxnLst/>
-              <a:rect l="l" t="t" r="r" b="b"/>
-              <a:pathLst>
-                <a:path w="5904230" h="792480">
-                  <a:moveTo>
-                    <a:pt x="5774436" y="0"/>
-                  </a:moveTo>
-                  <a:lnTo>
-                    <a:pt x="129540" y="0"/>
-                  </a:lnTo>
-                  <a:lnTo>
-                    <a:pt x="79081" y="10167"/>
-                  </a:lnTo>
-                  <a:lnTo>
-                    <a:pt x="37909" y="37909"/>
-                  </a:lnTo>
-                  <a:lnTo>
-                    <a:pt x="10167" y="79081"/>
-                  </a:lnTo>
-                  <a:lnTo>
-                    <a:pt x="0" y="129539"/>
-                  </a:lnTo>
-                  <a:lnTo>
-                    <a:pt x="0" y="662939"/>
-                  </a:lnTo>
-                  <a:lnTo>
-                    <a:pt x="10167" y="713398"/>
-                  </a:lnTo>
-                  <a:lnTo>
-                    <a:pt x="37909" y="754570"/>
-                  </a:lnTo>
-                  <a:lnTo>
-                    <a:pt x="79081" y="782312"/>
-                  </a:lnTo>
-                  <a:lnTo>
-                    <a:pt x="129540" y="792480"/>
-                  </a:lnTo>
-                  <a:lnTo>
-                    <a:pt x="5774436" y="792480"/>
-                  </a:lnTo>
-                  <a:lnTo>
-                    <a:pt x="5824894" y="782312"/>
-                  </a:lnTo>
-                  <a:lnTo>
-                    <a:pt x="5866066" y="754570"/>
-                  </a:lnTo>
-                  <a:lnTo>
-                    <a:pt x="5893808" y="713398"/>
-                  </a:lnTo>
-                  <a:lnTo>
-                    <a:pt x="5903976" y="662939"/>
-                  </a:lnTo>
-                  <a:lnTo>
-                    <a:pt x="5903976" y="129539"/>
-                  </a:lnTo>
-                  <a:lnTo>
-                    <a:pt x="5893808" y="79081"/>
-                  </a:lnTo>
-                  <a:lnTo>
-                    <a:pt x="5866066" y="37909"/>
-                  </a:lnTo>
-                  <a:lnTo>
-                    <a:pt x="5824894" y="10167"/>
-                  </a:lnTo>
-                  <a:lnTo>
-                    <a:pt x="5774436" y="0"/>
-                  </a:lnTo>
-                  <a:close/>
-                </a:path>
-              </a:pathLst>
-            </a:custGeom>
-            <a:solidFill>
-              <a:srgbClr val="FFFFFF"/>
-            </a:solidFill>
-          </p:spPr>
-          <p:txBody>
-            <a:bodyPr wrap="square" lIns="0" tIns="0" rIns="0" bIns="0" rtlCol="0"/>
-            <a:lstStyle/>
-            <a:p/>
-          </p:txBody>
-        </p:sp>
-        <p:sp>
-          <p:nvSpPr>
-            <p:cNvPr id="6" name="object 6"/>
-            <p:cNvSpPr/>
-            <p:nvPr/>
-          </p:nvSpPr>
-          <p:spPr>
-            <a:xfrm>
-              <a:off x="5954267" y="1367027"/>
-              <a:ext cx="5904230" cy="792480"/>
-            </a:xfrm>
-            <a:custGeom>
-              <a:avLst/>
-              <a:gdLst/>
-              <a:ahLst/>
-              <a:cxnLst/>
-              <a:rect l="l" t="t" r="r" b="b"/>
-              <a:pathLst>
-                <a:path w="5904230" h="792480">
-                  <a:moveTo>
-                    <a:pt x="0" y="129539"/>
-                  </a:moveTo>
-                  <a:lnTo>
-                    <a:pt x="10167" y="79081"/>
-                  </a:lnTo>
-                  <a:lnTo>
-                    <a:pt x="37909" y="37909"/>
-                  </a:lnTo>
-                  <a:lnTo>
-                    <a:pt x="79081" y="10167"/>
-                  </a:lnTo>
-                  <a:lnTo>
-                    <a:pt x="129540" y="0"/>
-                  </a:lnTo>
-                  <a:lnTo>
-                    <a:pt x="5774436" y="0"/>
-                  </a:lnTo>
-                  <a:lnTo>
-                    <a:pt x="5824894" y="10167"/>
-                  </a:lnTo>
-                  <a:lnTo>
-                    <a:pt x="5866066" y="37909"/>
-                  </a:lnTo>
-                  <a:lnTo>
-                    <a:pt x="5893808" y="79081"/>
-                  </a:lnTo>
-                  <a:lnTo>
-                    <a:pt x="5903976" y="129539"/>
-                  </a:lnTo>
-                  <a:lnTo>
-                    <a:pt x="5903976" y="662939"/>
-                  </a:lnTo>
-                  <a:lnTo>
-                    <a:pt x="5893808" y="713398"/>
-                  </a:lnTo>
-                  <a:lnTo>
-                    <a:pt x="5866066" y="754570"/>
-                  </a:lnTo>
-                  <a:lnTo>
-                    <a:pt x="5824894" y="782312"/>
-                  </a:lnTo>
-                  <a:lnTo>
-                    <a:pt x="5774436" y="792480"/>
-                  </a:lnTo>
-                  <a:lnTo>
-                    <a:pt x="129540" y="792480"/>
-                  </a:lnTo>
-                  <a:lnTo>
-                    <a:pt x="79081" y="782312"/>
-                  </a:lnTo>
-                  <a:lnTo>
-                    <a:pt x="37909" y="754570"/>
-                  </a:lnTo>
-                  <a:lnTo>
-                    <a:pt x="10167" y="713398"/>
-                  </a:lnTo>
-                  <a:lnTo>
-                    <a:pt x="0" y="662939"/>
-                  </a:lnTo>
-                  <a:lnTo>
-                    <a:pt x="0" y="129539"/>
-                  </a:lnTo>
-                  <a:close/>
-                </a:path>
-              </a:pathLst>
-            </a:custGeom>
-            <a:ln w="9144">
-              <a:solidFill>
-                <a:srgbClr val="520977"/>
-              </a:solidFill>
-            </a:ln>
-          </p:spPr>
-          <p:txBody>
-            <a:bodyPr wrap="square" lIns="0" tIns="0" rIns="0" bIns="0" rtlCol="0"/>
-            <a:lstStyle/>
-            <a:p/>
-          </p:txBody>
-        </p:sp>
-        <p:sp>
-          <p:nvSpPr>
-            <p:cNvPr id="7" name="object 7"/>
-            <p:cNvSpPr/>
-            <p:nvPr/>
-          </p:nvSpPr>
-          <p:spPr>
-            <a:xfrm>
-              <a:off x="5954267" y="2378964"/>
-              <a:ext cx="5904230" cy="792480"/>
-            </a:xfrm>
-            <a:custGeom>
-              <a:avLst/>
-              <a:gdLst/>
-              <a:ahLst/>
-              <a:cxnLst/>
-              <a:rect l="l" t="t" r="r" b="b"/>
-              <a:pathLst>
-                <a:path w="5904230" h="792480">
-                  <a:moveTo>
-                    <a:pt x="5774436" y="0"/>
-                  </a:moveTo>
-                  <a:lnTo>
-                    <a:pt x="129540" y="0"/>
-                  </a:lnTo>
-                  <a:lnTo>
-                    <a:pt x="79081" y="10167"/>
-                  </a:lnTo>
-                  <a:lnTo>
-                    <a:pt x="37909" y="37909"/>
-                  </a:lnTo>
-                  <a:lnTo>
-                    <a:pt x="10167" y="79081"/>
-                  </a:lnTo>
-                  <a:lnTo>
-                    <a:pt x="0" y="129539"/>
-                  </a:lnTo>
-                  <a:lnTo>
-                    <a:pt x="0" y="662939"/>
-                  </a:lnTo>
-                  <a:lnTo>
-                    <a:pt x="10167" y="713398"/>
-                  </a:lnTo>
-                  <a:lnTo>
-                    <a:pt x="37909" y="754570"/>
-                  </a:lnTo>
-                  <a:lnTo>
-                    <a:pt x="79081" y="782312"/>
-                  </a:lnTo>
-                  <a:lnTo>
-                    <a:pt x="129540" y="792480"/>
-                  </a:lnTo>
-                  <a:lnTo>
-                    <a:pt x="5774436" y="792480"/>
-                  </a:lnTo>
-                  <a:lnTo>
-                    <a:pt x="5824894" y="782312"/>
-                  </a:lnTo>
-                  <a:lnTo>
-                    <a:pt x="5866066" y="754570"/>
-                  </a:lnTo>
-                  <a:lnTo>
-                    <a:pt x="5893808" y="713398"/>
-                  </a:lnTo>
-                  <a:lnTo>
-                    <a:pt x="5903976" y="662939"/>
-                  </a:lnTo>
-                  <a:lnTo>
-                    <a:pt x="5903976" y="129539"/>
-                  </a:lnTo>
-                  <a:lnTo>
-                    <a:pt x="5893808" y="79081"/>
-                  </a:lnTo>
-                  <a:lnTo>
-                    <a:pt x="5866066" y="37909"/>
-                  </a:lnTo>
-                  <a:lnTo>
-                    <a:pt x="5824894" y="10167"/>
-                  </a:lnTo>
-                  <a:lnTo>
-                    <a:pt x="5774436" y="0"/>
-                  </a:lnTo>
-                  <a:close/>
-                </a:path>
-              </a:pathLst>
-            </a:custGeom>
-            <a:solidFill>
-              <a:srgbClr val="FFFFFF"/>
-            </a:solidFill>
-          </p:spPr>
-          <p:txBody>
-            <a:bodyPr wrap="square" lIns="0" tIns="0" rIns="0" bIns="0" rtlCol="0"/>
-            <a:lstStyle/>
-            <a:p/>
-          </p:txBody>
-        </p:sp>
-        <p:sp>
-          <p:nvSpPr>
-            <p:cNvPr id="8" name="object 8"/>
-            <p:cNvSpPr/>
-            <p:nvPr/>
-          </p:nvSpPr>
-          <p:spPr>
-            <a:xfrm>
-              <a:off x="5954267" y="2378964"/>
-              <a:ext cx="5904230" cy="792480"/>
-            </a:xfrm>
-            <a:custGeom>
-              <a:avLst/>
-              <a:gdLst/>
-              <a:ahLst/>
-              <a:cxnLst/>
-              <a:rect l="l" t="t" r="r" b="b"/>
-              <a:pathLst>
-                <a:path w="5904230" h="792480">
-                  <a:moveTo>
-                    <a:pt x="0" y="129539"/>
-                  </a:moveTo>
-                  <a:lnTo>
-                    <a:pt x="10167" y="79081"/>
-                  </a:lnTo>
-                  <a:lnTo>
-                    <a:pt x="37909" y="37909"/>
-                  </a:lnTo>
-                  <a:lnTo>
-                    <a:pt x="79081" y="10167"/>
-                  </a:lnTo>
-                  <a:lnTo>
-                    <a:pt x="129540" y="0"/>
-                  </a:lnTo>
-                  <a:lnTo>
-                    <a:pt x="5774436" y="0"/>
-                  </a:lnTo>
-                  <a:lnTo>
-                    <a:pt x="5824894" y="10167"/>
-                  </a:lnTo>
-                  <a:lnTo>
-                    <a:pt x="5866066" y="37909"/>
-                  </a:lnTo>
-                  <a:lnTo>
-                    <a:pt x="5893808" y="79081"/>
-                  </a:lnTo>
-                  <a:lnTo>
-                    <a:pt x="5903976" y="129539"/>
-                  </a:lnTo>
-                  <a:lnTo>
-                    <a:pt x="5903976" y="662939"/>
-                  </a:lnTo>
-                  <a:lnTo>
-                    <a:pt x="5893808" y="713398"/>
-                  </a:lnTo>
-                  <a:lnTo>
-                    <a:pt x="5866066" y="754570"/>
-                  </a:lnTo>
-                  <a:lnTo>
-                    <a:pt x="5824894" y="782312"/>
-                  </a:lnTo>
-                  <a:lnTo>
-                    <a:pt x="5774436" y="792480"/>
-                  </a:lnTo>
-                  <a:lnTo>
-                    <a:pt x="129540" y="792480"/>
-                  </a:lnTo>
-                  <a:lnTo>
-                    <a:pt x="79081" y="782312"/>
-                  </a:lnTo>
-                  <a:lnTo>
-                    <a:pt x="37909" y="754570"/>
-                  </a:lnTo>
-                  <a:lnTo>
-                    <a:pt x="10167" y="713398"/>
-                  </a:lnTo>
-                  <a:lnTo>
-                    <a:pt x="0" y="662939"/>
-                  </a:lnTo>
-                  <a:lnTo>
-                    <a:pt x="0" y="129539"/>
-                  </a:lnTo>
-                  <a:close/>
-                </a:path>
-              </a:pathLst>
-            </a:custGeom>
-            <a:ln w="9144">
-              <a:solidFill>
-                <a:srgbClr val="520977"/>
-              </a:solidFill>
-            </a:ln>
-          </p:spPr>
-          <p:txBody>
-            <a:bodyPr wrap="square" lIns="0" tIns="0" rIns="0" bIns="0" rtlCol="0"/>
-            <a:lstStyle/>
-            <a:p/>
-          </p:txBody>
-        </p:sp>
-        <p:sp>
-          <p:nvSpPr>
-            <p:cNvPr id="9" name="object 9"/>
-            <p:cNvSpPr/>
-            <p:nvPr/>
-          </p:nvSpPr>
-          <p:spPr>
-            <a:xfrm>
-              <a:off x="5954267" y="3387852"/>
-              <a:ext cx="5904230" cy="792480"/>
-            </a:xfrm>
-            <a:custGeom>
-              <a:avLst/>
-              <a:gdLst/>
-              <a:ahLst/>
-              <a:cxnLst/>
-              <a:rect l="l" t="t" r="r" b="b"/>
-              <a:pathLst>
-                <a:path w="5904230" h="792479">
-                  <a:moveTo>
-                    <a:pt x="5774436" y="0"/>
-                  </a:moveTo>
-                  <a:lnTo>
-                    <a:pt x="129540" y="0"/>
-                  </a:lnTo>
-                  <a:lnTo>
-                    <a:pt x="79081" y="10167"/>
-                  </a:lnTo>
-                  <a:lnTo>
-                    <a:pt x="37909" y="37909"/>
-                  </a:lnTo>
-                  <a:lnTo>
-                    <a:pt x="10167" y="79081"/>
-                  </a:lnTo>
-                  <a:lnTo>
-                    <a:pt x="0" y="129539"/>
-                  </a:lnTo>
-                  <a:lnTo>
-                    <a:pt x="0" y="662940"/>
-                  </a:lnTo>
-                  <a:lnTo>
-                    <a:pt x="10167" y="713398"/>
-                  </a:lnTo>
-                  <a:lnTo>
-                    <a:pt x="37909" y="754570"/>
-                  </a:lnTo>
-                  <a:lnTo>
-                    <a:pt x="79081" y="782312"/>
-                  </a:lnTo>
-                  <a:lnTo>
-                    <a:pt x="129540" y="792480"/>
-                  </a:lnTo>
-                  <a:lnTo>
-                    <a:pt x="5774436" y="792480"/>
-                  </a:lnTo>
-                  <a:lnTo>
-                    <a:pt x="5824894" y="782312"/>
-                  </a:lnTo>
-                  <a:lnTo>
-                    <a:pt x="5866066" y="754570"/>
-                  </a:lnTo>
-                  <a:lnTo>
-                    <a:pt x="5893808" y="713398"/>
-                  </a:lnTo>
-                  <a:lnTo>
-                    <a:pt x="5903976" y="662940"/>
-                  </a:lnTo>
-                  <a:lnTo>
-                    <a:pt x="5903976" y="129539"/>
-                  </a:lnTo>
-                  <a:lnTo>
-                    <a:pt x="5893808" y="79081"/>
-                  </a:lnTo>
-                  <a:lnTo>
-                    <a:pt x="5866066" y="37909"/>
-                  </a:lnTo>
-                  <a:lnTo>
-                    <a:pt x="5824894" y="10167"/>
-                  </a:lnTo>
-                  <a:lnTo>
-                    <a:pt x="5774436" y="0"/>
-                  </a:lnTo>
-                  <a:close/>
-                </a:path>
-              </a:pathLst>
-            </a:custGeom>
-            <a:solidFill>
-              <a:srgbClr val="FFFFFF"/>
-            </a:solidFill>
-          </p:spPr>
-          <p:txBody>
-            <a:bodyPr wrap="square" lIns="0" tIns="0" rIns="0" bIns="0" rtlCol="0"/>
-            <a:lstStyle/>
-            <a:p/>
-          </p:txBody>
-        </p:sp>
-        <p:sp>
-          <p:nvSpPr>
-            <p:cNvPr id="10" name="object 10"/>
-            <p:cNvSpPr/>
-            <p:nvPr/>
-          </p:nvSpPr>
-          <p:spPr>
-            <a:xfrm>
-              <a:off x="5954267" y="3387852"/>
-              <a:ext cx="5904230" cy="792480"/>
-            </a:xfrm>
-            <a:custGeom>
-              <a:avLst/>
-              <a:gdLst/>
-              <a:ahLst/>
-              <a:cxnLst/>
-              <a:rect l="l" t="t" r="r" b="b"/>
-              <a:pathLst>
-                <a:path w="5904230" h="792479">
-                  <a:moveTo>
-                    <a:pt x="0" y="129539"/>
-                  </a:moveTo>
-                  <a:lnTo>
-                    <a:pt x="10167" y="79081"/>
-                  </a:lnTo>
-                  <a:lnTo>
-                    <a:pt x="37909" y="37909"/>
-                  </a:lnTo>
-                  <a:lnTo>
-                    <a:pt x="79081" y="10167"/>
-                  </a:lnTo>
-                  <a:lnTo>
-                    <a:pt x="129540" y="0"/>
-                  </a:lnTo>
-                  <a:lnTo>
-                    <a:pt x="5774436" y="0"/>
-                  </a:lnTo>
-                  <a:lnTo>
-                    <a:pt x="5824894" y="10167"/>
-                  </a:lnTo>
-                  <a:lnTo>
-                    <a:pt x="5866066" y="37909"/>
-                  </a:lnTo>
-                  <a:lnTo>
-                    <a:pt x="5893808" y="79081"/>
-                  </a:lnTo>
-                  <a:lnTo>
-                    <a:pt x="5903976" y="129539"/>
-                  </a:lnTo>
-                  <a:lnTo>
-                    <a:pt x="5903976" y="662940"/>
-                  </a:lnTo>
-                  <a:lnTo>
-                    <a:pt x="5893808" y="713398"/>
-                  </a:lnTo>
-                  <a:lnTo>
-                    <a:pt x="5866066" y="754570"/>
-                  </a:lnTo>
-                  <a:lnTo>
-                    <a:pt x="5824894" y="782312"/>
-                  </a:lnTo>
-                  <a:lnTo>
-                    <a:pt x="5774436" y="792480"/>
-                  </a:lnTo>
-                  <a:lnTo>
-                    <a:pt x="129540" y="792480"/>
-                  </a:lnTo>
-                  <a:lnTo>
-                    <a:pt x="79081" y="782312"/>
-                  </a:lnTo>
-                  <a:lnTo>
-                    <a:pt x="37909" y="754570"/>
-                  </a:lnTo>
-                  <a:lnTo>
-                    <a:pt x="10167" y="713398"/>
-                  </a:lnTo>
-                  <a:lnTo>
-                    <a:pt x="0" y="662940"/>
-                  </a:lnTo>
-                  <a:lnTo>
-                    <a:pt x="0" y="129539"/>
-                  </a:lnTo>
-                  <a:close/>
-                </a:path>
-              </a:pathLst>
-            </a:custGeom>
-            <a:ln w="9144">
-              <a:solidFill>
-                <a:srgbClr val="520977"/>
-              </a:solidFill>
-            </a:ln>
-          </p:spPr>
-          <p:txBody>
-            <a:bodyPr wrap="square" lIns="0" tIns="0" rIns="0" bIns="0" rtlCol="0"/>
-            <a:lstStyle/>
-            <a:p/>
-          </p:txBody>
-        </p:sp>
-        <p:sp>
-          <p:nvSpPr>
-            <p:cNvPr id="11" name="object 11"/>
-            <p:cNvSpPr/>
-            <p:nvPr/>
-          </p:nvSpPr>
-          <p:spPr>
-            <a:xfrm>
-              <a:off x="5954267" y="4399788"/>
-              <a:ext cx="5904230" cy="792480"/>
-            </a:xfrm>
-            <a:custGeom>
-              <a:avLst/>
-              <a:gdLst/>
-              <a:ahLst/>
-              <a:cxnLst/>
-              <a:rect l="l" t="t" r="r" b="b"/>
-              <a:pathLst>
-                <a:path w="5904230" h="792479">
-                  <a:moveTo>
-                    <a:pt x="5774436" y="0"/>
-                  </a:moveTo>
-                  <a:lnTo>
-                    <a:pt x="129540" y="0"/>
-                  </a:lnTo>
-                  <a:lnTo>
-                    <a:pt x="79081" y="10167"/>
-                  </a:lnTo>
-                  <a:lnTo>
-                    <a:pt x="37909" y="37909"/>
-                  </a:lnTo>
-                  <a:lnTo>
-                    <a:pt x="10167" y="79081"/>
-                  </a:lnTo>
-                  <a:lnTo>
-                    <a:pt x="0" y="129539"/>
-                  </a:lnTo>
-                  <a:lnTo>
-                    <a:pt x="0" y="662939"/>
-                  </a:lnTo>
-                  <a:lnTo>
-                    <a:pt x="10167" y="713398"/>
-                  </a:lnTo>
-                  <a:lnTo>
-                    <a:pt x="37909" y="754570"/>
-                  </a:lnTo>
-                  <a:lnTo>
-                    <a:pt x="79081" y="782312"/>
-                  </a:lnTo>
-                  <a:lnTo>
-                    <a:pt x="129540" y="792480"/>
-                  </a:lnTo>
-                  <a:lnTo>
-                    <a:pt x="5774436" y="792480"/>
-                  </a:lnTo>
-                  <a:lnTo>
-                    <a:pt x="5824894" y="782312"/>
-                  </a:lnTo>
-                  <a:lnTo>
-                    <a:pt x="5866066" y="754570"/>
-                  </a:lnTo>
-                  <a:lnTo>
-                    <a:pt x="5893808" y="713398"/>
-                  </a:lnTo>
-                  <a:lnTo>
-                    <a:pt x="5903976" y="662939"/>
-                  </a:lnTo>
-                  <a:lnTo>
-                    <a:pt x="5903976" y="129539"/>
-                  </a:lnTo>
-                  <a:lnTo>
-                    <a:pt x="5893808" y="79081"/>
-                  </a:lnTo>
-                  <a:lnTo>
-                    <a:pt x="5866066" y="37909"/>
-                  </a:lnTo>
-                  <a:lnTo>
-                    <a:pt x="5824894" y="10167"/>
-                  </a:lnTo>
-                  <a:lnTo>
-                    <a:pt x="5774436" y="0"/>
-                  </a:lnTo>
-                  <a:close/>
-                </a:path>
-              </a:pathLst>
-            </a:custGeom>
-            <a:solidFill>
-              <a:srgbClr val="FFFFFF"/>
-            </a:solidFill>
-          </p:spPr>
-          <p:txBody>
-            <a:bodyPr wrap="square" lIns="0" tIns="0" rIns="0" bIns="0" rtlCol="0"/>
-            <a:lstStyle/>
-            <a:p/>
-          </p:txBody>
-        </p:sp>
-        <p:sp>
-          <p:nvSpPr>
-            <p:cNvPr id="12" name="object 12"/>
-            <p:cNvSpPr/>
-            <p:nvPr/>
-          </p:nvSpPr>
-          <p:spPr>
-            <a:xfrm>
-              <a:off x="5954267" y="4399788"/>
-              <a:ext cx="5904230" cy="792480"/>
-            </a:xfrm>
-            <a:custGeom>
-              <a:avLst/>
-              <a:gdLst/>
-              <a:ahLst/>
-              <a:cxnLst/>
-              <a:rect l="l" t="t" r="r" b="b"/>
-              <a:pathLst>
-                <a:path w="5904230" h="792479">
-                  <a:moveTo>
-                    <a:pt x="0" y="129539"/>
-                  </a:moveTo>
-                  <a:lnTo>
-                    <a:pt x="10167" y="79081"/>
-                  </a:lnTo>
-                  <a:lnTo>
-                    <a:pt x="37909" y="37909"/>
-                  </a:lnTo>
-                  <a:lnTo>
-                    <a:pt x="79081" y="10167"/>
-                  </a:lnTo>
-                  <a:lnTo>
-                    <a:pt x="129540" y="0"/>
-                  </a:lnTo>
-                  <a:lnTo>
-                    <a:pt x="5774436" y="0"/>
-                  </a:lnTo>
-                  <a:lnTo>
-                    <a:pt x="5824894" y="10167"/>
-                  </a:lnTo>
-                  <a:lnTo>
-                    <a:pt x="5866066" y="37909"/>
-                  </a:lnTo>
-                  <a:lnTo>
-                    <a:pt x="5893808" y="79081"/>
-                  </a:lnTo>
-                  <a:lnTo>
-                    <a:pt x="5903976" y="129539"/>
-                  </a:lnTo>
-                  <a:lnTo>
-                    <a:pt x="5903976" y="662939"/>
-                  </a:lnTo>
-                  <a:lnTo>
-                    <a:pt x="5893808" y="713398"/>
-                  </a:lnTo>
-                  <a:lnTo>
-                    <a:pt x="5866066" y="754570"/>
-                  </a:lnTo>
-                  <a:lnTo>
-                    <a:pt x="5824894" y="782312"/>
-                  </a:lnTo>
-                  <a:lnTo>
-                    <a:pt x="5774436" y="792480"/>
-                  </a:lnTo>
-                  <a:lnTo>
-                    <a:pt x="129540" y="792480"/>
-                  </a:lnTo>
-                  <a:lnTo>
-                    <a:pt x="79081" y="782312"/>
-                  </a:lnTo>
-                  <a:lnTo>
-                    <a:pt x="37909" y="754570"/>
-                  </a:lnTo>
-                  <a:lnTo>
-                    <a:pt x="10167" y="713398"/>
-                  </a:lnTo>
-                  <a:lnTo>
-                    <a:pt x="0" y="662939"/>
-                  </a:lnTo>
-                  <a:lnTo>
-                    <a:pt x="0" y="129539"/>
-                  </a:lnTo>
-                  <a:close/>
-                </a:path>
-              </a:pathLst>
-            </a:custGeom>
-            <a:ln w="9144">
-              <a:solidFill>
-                <a:srgbClr val="520977"/>
-              </a:solidFill>
-            </a:ln>
-          </p:spPr>
-          <p:txBody>
-            <a:bodyPr wrap="square" lIns="0" tIns="0" rIns="0" bIns="0" rtlCol="0"/>
-            <a:lstStyle/>
-            <a:p/>
-          </p:txBody>
-        </p:sp>
-        <p:sp>
-          <p:nvSpPr>
-            <p:cNvPr id="13" name="object 13"/>
-            <p:cNvSpPr/>
-            <p:nvPr/>
-          </p:nvSpPr>
-          <p:spPr>
-            <a:xfrm>
-              <a:off x="5954267" y="5411723"/>
-              <a:ext cx="5904230" cy="789940"/>
-            </a:xfrm>
-            <a:custGeom>
-              <a:avLst/>
-              <a:gdLst/>
-              <a:ahLst/>
-              <a:cxnLst/>
-              <a:rect l="l" t="t" r="r" b="b"/>
-              <a:pathLst>
-                <a:path w="5904230" h="789939">
-                  <a:moveTo>
-                    <a:pt x="5774944" y="0"/>
-                  </a:moveTo>
-                  <a:lnTo>
-                    <a:pt x="129032" y="0"/>
-                  </a:lnTo>
-                  <a:lnTo>
-                    <a:pt x="78813" y="10142"/>
-                  </a:lnTo>
-                  <a:lnTo>
-                    <a:pt x="37798" y="37798"/>
-                  </a:lnTo>
-                  <a:lnTo>
-                    <a:pt x="10142" y="78813"/>
-                  </a:lnTo>
-                  <a:lnTo>
-                    <a:pt x="0" y="129031"/>
-                  </a:lnTo>
-                  <a:lnTo>
-                    <a:pt x="0" y="660450"/>
-                  </a:lnTo>
-                  <a:lnTo>
-                    <a:pt x="10142" y="710656"/>
-                  </a:lnTo>
-                  <a:lnTo>
-                    <a:pt x="37798" y="751654"/>
-                  </a:lnTo>
-                  <a:lnTo>
-                    <a:pt x="78813" y="779296"/>
-                  </a:lnTo>
-                  <a:lnTo>
-                    <a:pt x="129032" y="789432"/>
-                  </a:lnTo>
-                  <a:lnTo>
-                    <a:pt x="5774944" y="789432"/>
-                  </a:lnTo>
-                  <a:lnTo>
-                    <a:pt x="5825162" y="779296"/>
-                  </a:lnTo>
-                  <a:lnTo>
-                    <a:pt x="5866177" y="751654"/>
-                  </a:lnTo>
-                  <a:lnTo>
-                    <a:pt x="5893833" y="710656"/>
-                  </a:lnTo>
-                  <a:lnTo>
-                    <a:pt x="5903976" y="660450"/>
-                  </a:lnTo>
-                  <a:lnTo>
-                    <a:pt x="5903976" y="129031"/>
-                  </a:lnTo>
-                  <a:lnTo>
-                    <a:pt x="5893833" y="78813"/>
-                  </a:lnTo>
-                  <a:lnTo>
-                    <a:pt x="5866177" y="37798"/>
-                  </a:lnTo>
-                  <a:lnTo>
-                    <a:pt x="5825162" y="10142"/>
-                  </a:lnTo>
-                  <a:lnTo>
-                    <a:pt x="5774944" y="0"/>
-                  </a:lnTo>
-                  <a:close/>
-                </a:path>
-              </a:pathLst>
-            </a:custGeom>
-            <a:solidFill>
-              <a:srgbClr val="FFFFFF"/>
-            </a:solidFill>
-          </p:spPr>
-          <p:txBody>
-            <a:bodyPr wrap="square" lIns="0" tIns="0" rIns="0" bIns="0" rtlCol="0"/>
-            <a:lstStyle/>
-            <a:p/>
-          </p:txBody>
-        </p:sp>
-        <p:sp>
-          <p:nvSpPr>
-            <p:cNvPr id="14" name="object 14"/>
-            <p:cNvSpPr/>
-            <p:nvPr/>
-          </p:nvSpPr>
-          <p:spPr>
-            <a:xfrm>
-              <a:off x="5954267" y="5411723"/>
-              <a:ext cx="5904230" cy="789940"/>
-            </a:xfrm>
-            <a:custGeom>
-              <a:avLst/>
-              <a:gdLst/>
-              <a:ahLst/>
-              <a:cxnLst/>
-              <a:rect l="l" t="t" r="r" b="b"/>
-              <a:pathLst>
-                <a:path w="5904230" h="789939">
-                  <a:moveTo>
-                    <a:pt x="0" y="129031"/>
-                  </a:moveTo>
-                  <a:lnTo>
-                    <a:pt x="10142" y="78813"/>
-                  </a:lnTo>
-                  <a:lnTo>
-                    <a:pt x="37798" y="37798"/>
-                  </a:lnTo>
-                  <a:lnTo>
-                    <a:pt x="78813" y="10142"/>
-                  </a:lnTo>
-                  <a:lnTo>
-                    <a:pt x="129032" y="0"/>
-                  </a:lnTo>
-                  <a:lnTo>
-                    <a:pt x="5774944" y="0"/>
-                  </a:lnTo>
-                  <a:lnTo>
-                    <a:pt x="5825162" y="10142"/>
-                  </a:lnTo>
-                  <a:lnTo>
-                    <a:pt x="5866177" y="37798"/>
-                  </a:lnTo>
-                  <a:lnTo>
-                    <a:pt x="5893833" y="78813"/>
-                  </a:lnTo>
-                  <a:lnTo>
-                    <a:pt x="5903976" y="129031"/>
-                  </a:lnTo>
-                  <a:lnTo>
-                    <a:pt x="5903976" y="660450"/>
-                  </a:lnTo>
-                  <a:lnTo>
-                    <a:pt x="5893833" y="710656"/>
-                  </a:lnTo>
-                  <a:lnTo>
-                    <a:pt x="5866177" y="751654"/>
-                  </a:lnTo>
-                  <a:lnTo>
-                    <a:pt x="5825162" y="779296"/>
-                  </a:lnTo>
-                  <a:lnTo>
-                    <a:pt x="5774944" y="789432"/>
-                  </a:lnTo>
-                  <a:lnTo>
-                    <a:pt x="129032" y="789432"/>
-                  </a:lnTo>
-                  <a:lnTo>
-                    <a:pt x="78813" y="779296"/>
-                  </a:lnTo>
-                  <a:lnTo>
-                    <a:pt x="37798" y="751654"/>
-                  </a:lnTo>
-                  <a:lnTo>
-                    <a:pt x="10142" y="710656"/>
-                  </a:lnTo>
-                  <a:lnTo>
-                    <a:pt x="0" y="660450"/>
-                  </a:lnTo>
-                  <a:lnTo>
-                    <a:pt x="0" y="129031"/>
-                  </a:lnTo>
-                  <a:close/>
-                </a:path>
-              </a:pathLst>
-            </a:custGeom>
-            <a:ln w="9144">
-              <a:solidFill>
-                <a:srgbClr val="520977"/>
-              </a:solidFill>
-            </a:ln>
-          </p:spPr>
-          <p:txBody>
-            <a:bodyPr wrap="square" lIns="0" tIns="0" rIns="0" bIns="0" rtlCol="0"/>
-            <a:lstStyle/>
-            <a:p/>
-          </p:txBody>
-        </p:sp>
-        <p:sp>
-          <p:nvSpPr>
-            <p:cNvPr id="15" name="object 15"/>
-            <p:cNvSpPr/>
-            <p:nvPr/>
-          </p:nvSpPr>
-          <p:spPr>
-            <a:xfrm>
-              <a:off x="348995" y="1367027"/>
-              <a:ext cx="5389245" cy="4834255"/>
-            </a:xfrm>
-            <a:custGeom>
-              <a:avLst/>
-              <a:gdLst/>
-              <a:ahLst/>
-              <a:cxnLst/>
-              <a:rect l="l" t="t" r="r" b="b"/>
-              <a:pathLst>
-                <a:path w="5389245" h="4834255">
-                  <a:moveTo>
-                    <a:pt x="5247767" y="0"/>
-                  </a:moveTo>
-                  <a:lnTo>
-                    <a:pt x="141109" y="0"/>
-                  </a:lnTo>
-                  <a:lnTo>
-                    <a:pt x="96510" y="7188"/>
-                  </a:lnTo>
-                  <a:lnTo>
-                    <a:pt x="57774" y="27208"/>
-                  </a:lnTo>
-                  <a:lnTo>
-                    <a:pt x="27227" y="57744"/>
-                  </a:lnTo>
-                  <a:lnTo>
-                    <a:pt x="7194" y="96479"/>
-                  </a:lnTo>
-                  <a:lnTo>
-                    <a:pt x="0" y="141097"/>
-                  </a:lnTo>
-                  <a:lnTo>
-                    <a:pt x="0" y="4693018"/>
-                  </a:lnTo>
-                  <a:lnTo>
-                    <a:pt x="7194" y="4737617"/>
-                  </a:lnTo>
-                  <a:lnTo>
-                    <a:pt x="27227" y="4776353"/>
-                  </a:lnTo>
-                  <a:lnTo>
-                    <a:pt x="57774" y="4806900"/>
-                  </a:lnTo>
-                  <a:lnTo>
-                    <a:pt x="96510" y="4826933"/>
-                  </a:lnTo>
-                  <a:lnTo>
-                    <a:pt x="141109" y="4834128"/>
-                  </a:lnTo>
-                  <a:lnTo>
-                    <a:pt x="5247767" y="4834128"/>
-                  </a:lnTo>
-                  <a:lnTo>
-                    <a:pt x="5292384" y="4826933"/>
-                  </a:lnTo>
-                  <a:lnTo>
-                    <a:pt x="5331119" y="4806900"/>
-                  </a:lnTo>
-                  <a:lnTo>
-                    <a:pt x="5361655" y="4776353"/>
-                  </a:lnTo>
-                  <a:lnTo>
-                    <a:pt x="5381675" y="4737617"/>
-                  </a:lnTo>
-                  <a:lnTo>
-                    <a:pt x="5388864" y="4693018"/>
-                  </a:lnTo>
-                  <a:lnTo>
-                    <a:pt x="5388864" y="141097"/>
-                  </a:lnTo>
-                  <a:lnTo>
-                    <a:pt x="5381675" y="96479"/>
-                  </a:lnTo>
-                  <a:lnTo>
-                    <a:pt x="5361655" y="57744"/>
-                  </a:lnTo>
-                  <a:lnTo>
-                    <a:pt x="5331119" y="27208"/>
-                  </a:lnTo>
-                  <a:lnTo>
-                    <a:pt x="5292384" y="7188"/>
-                  </a:lnTo>
-                  <a:lnTo>
-                    <a:pt x="5247767" y="0"/>
-                  </a:lnTo>
-                  <a:close/>
-                </a:path>
-              </a:pathLst>
-            </a:custGeom>
-            <a:solidFill>
-              <a:srgbClr val="FFFFFF"/>
-            </a:solidFill>
-          </p:spPr>
-          <p:txBody>
-            <a:bodyPr wrap="square" lIns="0" tIns="0" rIns="0" bIns="0" rtlCol="0"/>
-            <a:lstStyle/>
-            <a:p/>
-          </p:txBody>
-        </p:sp>
-        <p:sp>
-          <p:nvSpPr>
-            <p:cNvPr id="16" name="object 16"/>
-            <p:cNvSpPr/>
-            <p:nvPr/>
-          </p:nvSpPr>
-          <p:spPr>
-            <a:xfrm>
-              <a:off x="348995" y="1367027"/>
-              <a:ext cx="5389245" cy="4834255"/>
-            </a:xfrm>
-            <a:custGeom>
-              <a:avLst/>
-              <a:gdLst/>
-              <a:ahLst/>
-              <a:cxnLst/>
-              <a:rect l="l" t="t" r="r" b="b"/>
-              <a:pathLst>
-                <a:path w="5389245" h="4834255">
-                  <a:moveTo>
-                    <a:pt x="0" y="141097"/>
-                  </a:moveTo>
-                  <a:lnTo>
-                    <a:pt x="7194" y="96479"/>
-                  </a:lnTo>
-                  <a:lnTo>
-                    <a:pt x="27227" y="57744"/>
-                  </a:lnTo>
-                  <a:lnTo>
-                    <a:pt x="57774" y="27208"/>
-                  </a:lnTo>
-                  <a:lnTo>
-                    <a:pt x="96510" y="7188"/>
-                  </a:lnTo>
-                  <a:lnTo>
-                    <a:pt x="141109" y="0"/>
-                  </a:lnTo>
-                  <a:lnTo>
-                    <a:pt x="5247767" y="0"/>
-                  </a:lnTo>
-                  <a:lnTo>
-                    <a:pt x="5292384" y="7188"/>
-                  </a:lnTo>
-                  <a:lnTo>
-                    <a:pt x="5331119" y="27208"/>
-                  </a:lnTo>
-                  <a:lnTo>
-                    <a:pt x="5361655" y="57744"/>
-                  </a:lnTo>
-                  <a:lnTo>
-                    <a:pt x="5381675" y="96479"/>
-                  </a:lnTo>
-                  <a:lnTo>
-                    <a:pt x="5388864" y="141097"/>
-                  </a:lnTo>
-                  <a:lnTo>
-                    <a:pt x="5388864" y="4693018"/>
-                  </a:lnTo>
-                  <a:lnTo>
-                    <a:pt x="5381675" y="4737617"/>
-                  </a:lnTo>
-                  <a:lnTo>
-                    <a:pt x="5361655" y="4776353"/>
-                  </a:lnTo>
-                  <a:lnTo>
-                    <a:pt x="5331119" y="4806900"/>
-                  </a:lnTo>
-                  <a:lnTo>
-                    <a:pt x="5292384" y="4826933"/>
-                  </a:lnTo>
-                  <a:lnTo>
-                    <a:pt x="5247767" y="4834128"/>
-                  </a:lnTo>
-                  <a:lnTo>
-                    <a:pt x="141109" y="4834128"/>
-                  </a:lnTo>
-                  <a:lnTo>
-                    <a:pt x="96510" y="4826933"/>
-                  </a:lnTo>
-                  <a:lnTo>
-                    <a:pt x="57774" y="4806900"/>
-                  </a:lnTo>
-                  <a:lnTo>
-                    <a:pt x="27227" y="4776353"/>
-                  </a:lnTo>
-                  <a:lnTo>
-                    <a:pt x="7194" y="4737617"/>
-                  </a:lnTo>
-                  <a:lnTo>
-                    <a:pt x="0" y="4693018"/>
-                  </a:lnTo>
-                  <a:lnTo>
-                    <a:pt x="0" y="141097"/>
-                  </a:lnTo>
-                  <a:close/>
-                </a:path>
-              </a:pathLst>
-            </a:custGeom>
-            <a:ln w="9144">
-              <a:solidFill>
-                <a:srgbClr val="520977"/>
-              </a:solidFill>
-            </a:ln>
-          </p:spPr>
-          <p:txBody>
-            <a:bodyPr wrap="square" lIns="0" tIns="0" rIns="0" bIns="0" rtlCol="0"/>
-            <a:lstStyle/>
-            <a:p/>
-          </p:txBody>
-        </p:sp>
       </p:grpSp>
       <p:sp>
         <p:nvSpPr>
@@ -8160,14 +4975,14 @@
         <p:spPr>
           <a:xfrm>
             <a:off x="11815953" y="6449170"/>
-            <a:ext cx="196215" cy="196215"/>
+            <a:ext cx="548640" cy="196215"/>
           </a:xfrm>
           <a:prstGeom prst="rect">
             <a:avLst/>
           </a:prstGeom>
         </p:spPr>
         <p:txBody>
-          <a:bodyPr wrap="square" lIns="0" tIns="0" rIns="0" bIns="0" rtlCol="0" vert="horz">
+          <a:bodyPr wrap="none" lIns="0" tIns="0" rIns="0" bIns="0" rtlCol="0" vert="horz">
             <a:spAutoFit/>
           </a:bodyPr>
           <a:lstStyle/>
@@ -8256,8 +5071,8 @@
         </p:nvSpPr>
         <p:spPr>
           <a:xfrm>
-            <a:off x="347472" y="1362456"/>
-            <a:ext cx="5385816" cy="4837176"/>
+            <a:off x="502920" y="1371600"/>
+            <a:ext cx="4754880" cy="4663440"/>
           </a:xfrm>
           <a:prstGeom prst="roundRect">
             <a:avLst>
@@ -8267,8 +5082,10 @@
           <a:solidFill>
             <a:srgbClr val="FFFFFF"/>
           </a:solidFill>
-          <a:ln>
-            <a:noFill/>
+          <a:ln w="12700">
+            <a:solidFill>
+              <a:srgbClr val="F7F4FA"/>
+            </a:solidFill>
           </a:ln>
           <a:effectLst/>
         </p:spPr>
@@ -8302,8 +5119,8 @@
         </p:nvSpPr>
         <p:spPr>
           <a:xfrm>
-            <a:off x="603504" y="1627632"/>
-            <a:ext cx="4846320" cy="4297680"/>
+            <a:off x="777240" y="1627632"/>
+            <a:ext cx="4206240" cy="4114800"/>
           </a:xfrm>
           <a:prstGeom prst="rect">
             <a:avLst/>
@@ -8321,17 +5138,36 @@
                 <a:spcPct val="112000"/>
               </a:lnSpc>
               <a:spcAft>
+                <a:spcPts val="1200"/>
+              </a:spcAft>
+            </a:pPr>
+            <a:r>
+              <a:rPr sz="1500" b="1">
+                <a:solidFill>
+                  <a:srgbClr val="520978"/>
+                </a:solidFill>
+                <a:latin typeface="Montserrat"/>
+              </a:rPr>
+              <a:t>Эффект для ИТ Школы</a:t>
+            </a:r>
+          </a:p>
+          <a:p>
+            <a:pPr algn="l">
+              <a:lnSpc>
+                <a:spcPct val="112000"/>
+              </a:lnSpc>
+              <a:spcAft>
                 <a:spcPts val="1000"/>
               </a:spcAft>
             </a:pPr>
             <a:r>
-              <a:rPr sz="1500" b="1">
-                <a:solidFill>
-                  <a:srgbClr val="520978"/>
-                </a:solidFill>
-                <a:latin typeface="Montserrat"/>
-              </a:rPr>
-              <a:t>Эффект для ИТ Школы</a:t>
+              <a:rPr sz="1250" b="0">
+                <a:solidFill>
+                  <a:srgbClr val="1C1D22"/>
+                </a:solidFill>
+                <a:latin typeface="Montserrat"/>
+              </a:rPr>
+              <a:t>•  Единый контур вместо таблиц и чатов</a:t>
             </a:r>
           </a:p>
           <a:p>
@@ -8340,88 +5176,69 @@
                 <a:spcPct val="112000"/>
               </a:lnSpc>
               <a:spcAft>
-                <a:spcPts val="800"/>
+                <a:spcPts val="1000"/>
+              </a:spcAft>
+            </a:pPr>
+            <a:r>
+              <a:rPr sz="1250" b="0">
+                <a:solidFill>
+                  <a:srgbClr val="1C1D22"/>
+                </a:solidFill>
+                <a:latin typeface="Montserrat"/>
+              </a:rPr>
+              <a:t>•  Прозрачные этапы и ответственные</a:t>
+            </a:r>
+          </a:p>
+          <a:p>
+            <a:pPr algn="l">
+              <a:lnSpc>
+                <a:spcPct val="112000"/>
+              </a:lnSpc>
+              <a:spcAft>
+                <a:spcPts val="1000"/>
+              </a:spcAft>
+            </a:pPr>
+            <a:r>
+              <a:rPr sz="1250" b="0">
+                <a:solidFill>
+                  <a:srgbClr val="1C1D22"/>
+                </a:solidFill>
+                <a:latin typeface="Montserrat"/>
+              </a:rPr>
+              <a:t>•  Отчёт руководителю за секунды, а не за день</a:t>
+            </a:r>
+          </a:p>
+          <a:p>
+            <a:pPr algn="l">
+              <a:lnSpc>
+                <a:spcPct val="112000"/>
+              </a:lnSpc>
+              <a:spcAft>
+                <a:spcPts val="1000"/>
+              </a:spcAft>
+            </a:pPr>
+            <a:r>
+              <a:rPr sz="1250" b="0">
+                <a:solidFill>
+                  <a:srgbClr val="1C1D22"/>
+                </a:solidFill>
+                <a:latin typeface="Montserrat"/>
+              </a:rPr>
+              <a:t>•  Сохранённая история взаимодействий</a:t>
+            </a:r>
+          </a:p>
+          <a:p>
+            <a:pPr algn="l">
+              <a:lnSpc>
+                <a:spcPct val="125000"/>
+              </a:lnSpc>
+              <a:spcAft>
+                <a:spcPts val="0"/>
               </a:spcAft>
             </a:pPr>
             <a:r>
               <a:rPr sz="1200" b="0">
                 <a:solidFill>
-                  <a:srgbClr val="1C1D22"/>
-                </a:solidFill>
-                <a:latin typeface="Montserrat"/>
-              </a:rPr>
-              <a:t>•  Единый контур вместо таблиц и чатов</a:t>
-            </a:r>
-          </a:p>
-          <a:p>
-            <a:pPr algn="l">
-              <a:lnSpc>
-                <a:spcPct val="112000"/>
-              </a:lnSpc>
-              <a:spcAft>
-                <a:spcPts val="800"/>
-              </a:spcAft>
-            </a:pPr>
-            <a:r>
-              <a:rPr sz="1200" b="0">
-                <a:solidFill>
-                  <a:srgbClr val="1C1D22"/>
-                </a:solidFill>
-                <a:latin typeface="Montserrat"/>
-              </a:rPr>
-              <a:t>•  Прозрачные этапы и ответственные</a:t>
-            </a:r>
-          </a:p>
-          <a:p>
-            <a:pPr algn="l">
-              <a:lnSpc>
-                <a:spcPct val="112000"/>
-              </a:lnSpc>
-              <a:spcAft>
-                <a:spcPts val="800"/>
-              </a:spcAft>
-            </a:pPr>
-            <a:r>
-              <a:rPr sz="1200" b="0">
-                <a:solidFill>
-                  <a:srgbClr val="1C1D22"/>
-                </a:solidFill>
-                <a:latin typeface="Montserrat"/>
-              </a:rPr>
-              <a:t>•  Отчёт руководителю за секунды, а не за день</a:t>
-            </a:r>
-          </a:p>
-          <a:p>
-            <a:pPr algn="l">
-              <a:lnSpc>
-                <a:spcPct val="112000"/>
-              </a:lnSpc>
-              <a:spcAft>
-                <a:spcPts val="800"/>
-              </a:spcAft>
-            </a:pPr>
-            <a:r>
-              <a:rPr sz="1200" b="0">
-                <a:solidFill>
-                  <a:srgbClr val="1C1D22"/>
-                </a:solidFill>
-                <a:latin typeface="Montserrat"/>
-              </a:rPr>
-              <a:t>•  Сохранённая история взаимодействий</a:t>
-            </a:r>
-          </a:p>
-          <a:p>
-            <a:pPr algn="l">
-              <a:lnSpc>
-                <a:spcPct val="112000"/>
-              </a:lnSpc>
-              <a:spcAft>
-                <a:spcPts val="0"/>
-              </a:spcAft>
-            </a:pPr>
-            <a:r>
-              <a:rPr sz="1100" b="0">
-                <a:solidFill>
                   <a:srgbClr val="6B5B78"/>
                 </a:solidFill>
                 <a:latin typeface="Montserrat"/>
@@ -8433,56 +5250,14 @@
       </p:sp>
       <p:sp>
         <p:nvSpPr>
-          <p:cNvPr id="21" name="TextBox 20"/>
-          <p:cNvSpPr txBox="1"/>
-          <p:nvPr/>
-        </p:nvSpPr>
-        <p:spPr>
-          <a:xfrm>
-            <a:off x="5952744" y="1362456"/>
-            <a:ext cx="5907024" cy="457200"/>
-          </a:xfrm>
-          <a:prstGeom prst="rect">
-            <a:avLst/>
-          </a:prstGeom>
-          <a:noFill/>
-        </p:spPr>
-        <p:txBody>
-          <a:bodyPr wrap="square">
-            <a:spAutoFit/>
-          </a:bodyPr>
-          <a:lstStyle/>
-          <a:p>
-            <a:pPr algn="l">
-              <a:lnSpc>
-                <a:spcPct val="112000"/>
-              </a:lnSpc>
-              <a:spcAft>
-                <a:spcPts val="0"/>
-              </a:spcAft>
-            </a:pPr>
-            <a:r>
-              <a:rPr sz="1300" b="1">
-                <a:solidFill>
-                  <a:srgbClr val="520978"/>
-                </a:solidFill>
-                <a:latin typeface="Montserrat"/>
-              </a:rPr>
-              <a:t>Показатели</a:t>
-            </a:r>
-          </a:p>
-        </p:txBody>
-      </p:sp>
-      <p:sp>
-        <p:nvSpPr>
-          <p:cNvPr id="22" name="Rounded Rectangle 21"/>
+          <p:cNvPr id="21" name="Rounded Rectangle 20"/>
           <p:cNvSpPr/>
           <p:nvPr/>
         </p:nvSpPr>
         <p:spPr>
           <a:xfrm>
-            <a:off x="5952744" y="1847088"/>
-            <a:ext cx="5907024" cy="749808"/>
+            <a:off x="5760720" y="1371600"/>
+            <a:ext cx="6035040" cy="822960"/>
           </a:xfrm>
           <a:prstGeom prst="roundRect">
             <a:avLst>
@@ -8521,14 +5296,14 @@
       </p:sp>
       <p:sp>
         <p:nvSpPr>
-          <p:cNvPr id="23" name="TextBox 22"/>
+          <p:cNvPr id="22" name="TextBox 21"/>
           <p:cNvSpPr txBox="1"/>
           <p:nvPr/>
         </p:nvSpPr>
         <p:spPr>
           <a:xfrm>
-            <a:off x="6172200" y="1965960"/>
-            <a:ext cx="2377440" cy="502920"/>
+            <a:off x="6035040" y="1591056"/>
+            <a:ext cx="2651760" cy="411480"/>
           </a:xfrm>
           <a:prstGeom prst="rect">
             <a:avLst/>
@@ -8563,14 +5338,14 @@
       </p:sp>
       <p:sp>
         <p:nvSpPr>
-          <p:cNvPr id="24" name="TextBox 23"/>
+          <p:cNvPr id="23" name="TextBox 22"/>
           <p:cNvSpPr txBox="1"/>
           <p:nvPr/>
         </p:nvSpPr>
         <p:spPr>
           <a:xfrm>
-            <a:off x="8549640" y="2029968"/>
-            <a:ext cx="3108960" cy="457200"/>
+            <a:off x="8778240" y="1645920"/>
+            <a:ext cx="2834640" cy="365760"/>
           </a:xfrm>
           <a:prstGeom prst="rect">
             <a:avLst/>
@@ -8592,7 +5367,7 @@
               </a:spcAft>
             </a:pPr>
             <a:r>
-              <a:rPr sz="1100" b="0">
+              <a:rPr sz="1150" b="0">
                 <a:solidFill>
                   <a:srgbClr val="6B5B78"/>
                 </a:solidFill>
@@ -8605,14 +5380,14 @@
       </p:sp>
       <p:sp>
         <p:nvSpPr>
-          <p:cNvPr id="25" name="Rounded Rectangle 24"/>
+          <p:cNvPr id="24" name="Rounded Rectangle 23"/>
           <p:cNvSpPr/>
           <p:nvPr/>
         </p:nvSpPr>
         <p:spPr>
           <a:xfrm>
-            <a:off x="5952744" y="2816352"/>
-            <a:ext cx="5907024" cy="749808"/>
+            <a:off x="5760720" y="2331720"/>
+            <a:ext cx="6035040" cy="822960"/>
           </a:xfrm>
           <a:prstGeom prst="roundRect">
             <a:avLst>
@@ -8651,14 +5426,14 @@
       </p:sp>
       <p:sp>
         <p:nvSpPr>
-          <p:cNvPr id="26" name="TextBox 25"/>
+          <p:cNvPr id="25" name="TextBox 24"/>
           <p:cNvSpPr txBox="1"/>
           <p:nvPr/>
         </p:nvSpPr>
         <p:spPr>
           <a:xfrm>
-            <a:off x="6172200" y="2935224"/>
-            <a:ext cx="2377440" cy="502920"/>
+            <a:off x="6035040" y="2551176"/>
+            <a:ext cx="2651760" cy="411480"/>
           </a:xfrm>
           <a:prstGeom prst="rect">
             <a:avLst/>
@@ -8693,14 +5468,14 @@
       </p:sp>
       <p:sp>
         <p:nvSpPr>
-          <p:cNvPr id="27" name="TextBox 26"/>
+          <p:cNvPr id="26" name="TextBox 25"/>
           <p:cNvSpPr txBox="1"/>
           <p:nvPr/>
         </p:nvSpPr>
         <p:spPr>
           <a:xfrm>
-            <a:off x="8549640" y="2999232"/>
-            <a:ext cx="3108960" cy="457200"/>
+            <a:off x="8778240" y="2606039"/>
+            <a:ext cx="2834640" cy="365760"/>
           </a:xfrm>
           <a:prstGeom prst="rect">
             <a:avLst/>
@@ -8722,7 +5497,7 @@
               </a:spcAft>
             </a:pPr>
             <a:r>
-              <a:rPr sz="1100" b="0">
+              <a:rPr sz="1150" b="0">
                 <a:solidFill>
                   <a:srgbClr val="6B5B78"/>
                 </a:solidFill>
@@ -8735,14 +5510,14 @@
       </p:sp>
       <p:sp>
         <p:nvSpPr>
-          <p:cNvPr id="28" name="Rounded Rectangle 27"/>
+          <p:cNvPr id="27" name="Rounded Rectangle 26"/>
           <p:cNvSpPr/>
           <p:nvPr/>
         </p:nvSpPr>
         <p:spPr>
           <a:xfrm>
-            <a:off x="5952744" y="3785616"/>
-            <a:ext cx="5907024" cy="749808"/>
+            <a:off x="5760720" y="3291839"/>
+            <a:ext cx="6035040" cy="822960"/>
           </a:xfrm>
           <a:prstGeom prst="roundRect">
             <a:avLst>
@@ -8781,14 +5556,14 @@
       </p:sp>
       <p:sp>
         <p:nvSpPr>
-          <p:cNvPr id="29" name="TextBox 28"/>
+          <p:cNvPr id="28" name="TextBox 27"/>
           <p:cNvSpPr txBox="1"/>
           <p:nvPr/>
         </p:nvSpPr>
         <p:spPr>
           <a:xfrm>
-            <a:off x="6172200" y="3904488"/>
-            <a:ext cx="2377440" cy="502920"/>
+            <a:off x="6035040" y="3511296"/>
+            <a:ext cx="2651760" cy="411480"/>
           </a:xfrm>
           <a:prstGeom prst="rect">
             <a:avLst/>
@@ -8823,14 +5598,14 @@
       </p:sp>
       <p:sp>
         <p:nvSpPr>
-          <p:cNvPr id="30" name="TextBox 29"/>
+          <p:cNvPr id="29" name="TextBox 28"/>
           <p:cNvSpPr txBox="1"/>
           <p:nvPr/>
         </p:nvSpPr>
         <p:spPr>
           <a:xfrm>
-            <a:off x="8549640" y="3968496"/>
-            <a:ext cx="3108960" cy="457200"/>
+            <a:off x="8778240" y="3566159"/>
+            <a:ext cx="2834640" cy="365760"/>
           </a:xfrm>
           <a:prstGeom prst="rect">
             <a:avLst/>
@@ -8852,7 +5627,7 @@
               </a:spcAft>
             </a:pPr>
             <a:r>
-              <a:rPr sz="1100" b="0">
+              <a:rPr sz="1150" b="0">
                 <a:solidFill>
                   <a:srgbClr val="6B5B78"/>
                 </a:solidFill>
@@ -8865,14 +5640,14 @@
       </p:sp>
       <p:sp>
         <p:nvSpPr>
-          <p:cNvPr id="31" name="Rounded Rectangle 30"/>
+          <p:cNvPr id="30" name="Rounded Rectangle 29"/>
           <p:cNvSpPr/>
           <p:nvPr/>
         </p:nvSpPr>
         <p:spPr>
           <a:xfrm>
-            <a:off x="5952744" y="4754880"/>
-            <a:ext cx="5907024" cy="749808"/>
+            <a:off x="5760720" y="4251959"/>
+            <a:ext cx="6035040" cy="822960"/>
           </a:xfrm>
           <a:prstGeom prst="roundRect">
             <a:avLst>
@@ -8911,14 +5686,14 @@
       </p:sp>
       <p:sp>
         <p:nvSpPr>
-          <p:cNvPr id="32" name="TextBox 31"/>
+          <p:cNvPr id="31" name="TextBox 30"/>
           <p:cNvSpPr txBox="1"/>
           <p:nvPr/>
         </p:nvSpPr>
         <p:spPr>
           <a:xfrm>
-            <a:off x="6172200" y="4873752"/>
-            <a:ext cx="2377440" cy="502920"/>
+            <a:off x="6035040" y="4471416"/>
+            <a:ext cx="2651760" cy="411480"/>
           </a:xfrm>
           <a:prstGeom prst="rect">
             <a:avLst/>
@@ -8953,14 +5728,14 @@
       </p:sp>
       <p:sp>
         <p:nvSpPr>
-          <p:cNvPr id="33" name="TextBox 32"/>
+          <p:cNvPr id="32" name="TextBox 31"/>
           <p:cNvSpPr txBox="1"/>
           <p:nvPr/>
         </p:nvSpPr>
         <p:spPr>
           <a:xfrm>
-            <a:off x="8549640" y="4937760"/>
-            <a:ext cx="3108960" cy="457200"/>
+            <a:off x="8778240" y="4526279"/>
+            <a:ext cx="2834640" cy="365760"/>
           </a:xfrm>
           <a:prstGeom prst="rect">
             <a:avLst/>
@@ -8982,7 +5757,7 @@
               </a:spcAft>
             </a:pPr>
             <a:r>
-              <a:rPr sz="1100" b="0">
+              <a:rPr sz="1150" b="0">
                 <a:solidFill>
                   <a:srgbClr val="6B5B78"/>
                 </a:solidFill>
@@ -8995,14 +5770,14 @@
       </p:sp>
       <p:sp>
         <p:nvSpPr>
-          <p:cNvPr id="34" name="Rounded Rectangle 33"/>
+          <p:cNvPr id="33" name="Rounded Rectangle 32"/>
           <p:cNvSpPr/>
           <p:nvPr/>
         </p:nvSpPr>
         <p:spPr>
           <a:xfrm>
-            <a:off x="5952744" y="5724144"/>
-            <a:ext cx="5907024" cy="749808"/>
+            <a:off x="5760720" y="5212079"/>
+            <a:ext cx="6035040" cy="822960"/>
           </a:xfrm>
           <a:prstGeom prst="roundRect">
             <a:avLst>
@@ -9041,14 +5816,14 @@
       </p:sp>
       <p:sp>
         <p:nvSpPr>
-          <p:cNvPr id="35" name="TextBox 34"/>
+          <p:cNvPr id="34" name="TextBox 33"/>
           <p:cNvSpPr txBox="1"/>
           <p:nvPr/>
         </p:nvSpPr>
         <p:spPr>
           <a:xfrm>
-            <a:off x="6172200" y="5843016"/>
-            <a:ext cx="2377440" cy="502920"/>
+            <a:off x="6035040" y="5431536"/>
+            <a:ext cx="2651760" cy="411480"/>
           </a:xfrm>
           <a:prstGeom prst="rect">
             <a:avLst/>
@@ -9083,14 +5858,14 @@
       </p:sp>
       <p:sp>
         <p:nvSpPr>
-          <p:cNvPr id="36" name="TextBox 35"/>
+          <p:cNvPr id="35" name="TextBox 34"/>
           <p:cNvSpPr txBox="1"/>
           <p:nvPr/>
         </p:nvSpPr>
         <p:spPr>
           <a:xfrm>
-            <a:off x="8549640" y="5907024"/>
-            <a:ext cx="3108960" cy="457200"/>
+            <a:off x="8778240" y="5486399"/>
+            <a:ext cx="2834640" cy="365760"/>
           </a:xfrm>
           <a:prstGeom prst="rect">
             <a:avLst/>
@@ -9112,7 +5887,7 @@
               </a:spcAft>
             </a:pPr>
             <a:r>
-              <a:rPr sz="1100" b="0">
+              <a:rPr sz="1150" b="0">
                 <a:solidFill>
                   <a:srgbClr val="6B5B78"/>
                 </a:solidFill>
@@ -9184,102 +5959,6 @@
             </a:prstGeom>
           </p:spPr>
         </p:pic>
-        <p:sp>
-          <p:nvSpPr>
-            <p:cNvPr id="4" name="object 4"/>
-            <p:cNvSpPr/>
-            <p:nvPr/>
-          </p:nvSpPr>
-          <p:spPr>
-            <a:xfrm>
-              <a:off x="347472" y="323088"/>
-              <a:ext cx="3108960" cy="622300"/>
-            </a:xfrm>
-            <a:custGeom>
-              <a:avLst/>
-              <a:gdLst/>
-              <a:ahLst/>
-              <a:cxnLst/>
-              <a:rect l="l" t="t" r="r" b="b"/>
-              <a:pathLst>
-                <a:path w="3108960" h="622300">
-                  <a:moveTo>
-                    <a:pt x="2992628" y="0"/>
-                  </a:moveTo>
-                  <a:lnTo>
-                    <a:pt x="116319" y="0"/>
-                  </a:lnTo>
-                  <a:lnTo>
-                    <a:pt x="71039" y="9140"/>
-                  </a:lnTo>
-                  <a:lnTo>
-                    <a:pt x="34066" y="34067"/>
-                  </a:lnTo>
-                  <a:lnTo>
-                    <a:pt x="9139" y="71044"/>
-                  </a:lnTo>
-                  <a:lnTo>
-                    <a:pt x="0" y="116331"/>
-                  </a:lnTo>
-                  <a:lnTo>
-                    <a:pt x="0" y="505459"/>
-                  </a:lnTo>
-                  <a:lnTo>
-                    <a:pt x="9139" y="550747"/>
-                  </a:lnTo>
-                  <a:lnTo>
-                    <a:pt x="34066" y="587724"/>
-                  </a:lnTo>
-                  <a:lnTo>
-                    <a:pt x="71039" y="612651"/>
-                  </a:lnTo>
-                  <a:lnTo>
-                    <a:pt x="116319" y="621791"/>
-                  </a:lnTo>
-                  <a:lnTo>
-                    <a:pt x="2992628" y="621791"/>
-                  </a:lnTo>
-                  <a:lnTo>
-                    <a:pt x="3037915" y="612651"/>
-                  </a:lnTo>
-                  <a:lnTo>
-                    <a:pt x="3074892" y="587724"/>
-                  </a:lnTo>
-                  <a:lnTo>
-                    <a:pt x="3099819" y="550747"/>
-                  </a:lnTo>
-                  <a:lnTo>
-                    <a:pt x="3108960" y="505459"/>
-                  </a:lnTo>
-                  <a:lnTo>
-                    <a:pt x="3108960" y="116331"/>
-                  </a:lnTo>
-                  <a:lnTo>
-                    <a:pt x="3099819" y="71044"/>
-                  </a:lnTo>
-                  <a:lnTo>
-                    <a:pt x="3074892" y="34067"/>
-                  </a:lnTo>
-                  <a:lnTo>
-                    <a:pt x="3037915" y="9140"/>
-                  </a:lnTo>
-                  <a:lnTo>
-                    <a:pt x="2992628" y="0"/>
-                  </a:lnTo>
-                  <a:close/>
-                </a:path>
-              </a:pathLst>
-            </a:custGeom>
-            <a:solidFill>
-              <a:srgbClr val="520977"/>
-            </a:solidFill>
-          </p:spPr>
-          <p:txBody>
-            <a:bodyPr wrap="square" lIns="0" tIns="0" rIns="0" bIns="0" rtlCol="0"/>
-            <a:lstStyle/>
-            <a:p/>
-          </p:txBody>
-        </p:sp>
         <p:pic>
           <p:nvPicPr>
             <p:cNvPr id="5" name="object 5"/>
@@ -9302,819 +5981,6 @@
             </a:prstGeom>
           </p:spPr>
         </p:pic>
-        <p:sp>
-          <p:nvSpPr>
-            <p:cNvPr id="6" name="object 6"/>
-            <p:cNvSpPr/>
-            <p:nvPr/>
-          </p:nvSpPr>
-          <p:spPr>
-            <a:xfrm>
-              <a:off x="1149096" y="1149096"/>
-              <a:ext cx="4267200" cy="2822575"/>
-            </a:xfrm>
-            <a:custGeom>
-              <a:avLst/>
-              <a:gdLst/>
-              <a:ahLst/>
-              <a:cxnLst/>
-              <a:rect l="l" t="t" r="r" b="b"/>
-              <a:pathLst>
-                <a:path w="4267200" h="2822575">
-                  <a:moveTo>
-                    <a:pt x="4230751" y="0"/>
-                  </a:moveTo>
-                  <a:lnTo>
-                    <a:pt x="36461" y="0"/>
-                  </a:lnTo>
-                  <a:lnTo>
-                    <a:pt x="22272" y="2873"/>
-                  </a:lnTo>
-                  <a:lnTo>
-                    <a:pt x="10682" y="10699"/>
-                  </a:lnTo>
-                  <a:lnTo>
-                    <a:pt x="2866" y="22288"/>
-                  </a:lnTo>
-                  <a:lnTo>
-                    <a:pt x="0" y="36449"/>
-                  </a:lnTo>
-                  <a:lnTo>
-                    <a:pt x="0" y="2785998"/>
-                  </a:lnTo>
-                  <a:lnTo>
-                    <a:pt x="2866" y="2800159"/>
-                  </a:lnTo>
-                  <a:lnTo>
-                    <a:pt x="10682" y="2811748"/>
-                  </a:lnTo>
-                  <a:lnTo>
-                    <a:pt x="22272" y="2819574"/>
-                  </a:lnTo>
-                  <a:lnTo>
-                    <a:pt x="36461" y="2822447"/>
-                  </a:lnTo>
-                  <a:lnTo>
-                    <a:pt x="4230751" y="2822447"/>
-                  </a:lnTo>
-                  <a:lnTo>
-                    <a:pt x="4244911" y="2819574"/>
-                  </a:lnTo>
-                  <a:lnTo>
-                    <a:pt x="4256500" y="2811748"/>
-                  </a:lnTo>
-                  <a:lnTo>
-                    <a:pt x="4264326" y="2800159"/>
-                  </a:lnTo>
-                  <a:lnTo>
-                    <a:pt x="4267200" y="2785998"/>
-                  </a:lnTo>
-                  <a:lnTo>
-                    <a:pt x="4267200" y="36449"/>
-                  </a:lnTo>
-                  <a:lnTo>
-                    <a:pt x="4264326" y="22288"/>
-                  </a:lnTo>
-                  <a:lnTo>
-                    <a:pt x="4256500" y="10699"/>
-                  </a:lnTo>
-                  <a:lnTo>
-                    <a:pt x="4244911" y="2873"/>
-                  </a:lnTo>
-                  <a:lnTo>
-                    <a:pt x="4230751" y="0"/>
-                  </a:lnTo>
-                  <a:close/>
-                </a:path>
-              </a:pathLst>
-            </a:custGeom>
-            <a:solidFill>
-              <a:srgbClr val="520977"/>
-            </a:solidFill>
-          </p:spPr>
-          <p:txBody>
-            <a:bodyPr wrap="square" lIns="0" tIns="0" rIns="0" bIns="0" rtlCol="0"/>
-            <a:lstStyle/>
-            <a:p/>
-          </p:txBody>
-        </p:sp>
-        <p:sp>
-          <p:nvSpPr>
-            <p:cNvPr id="7" name="object 7"/>
-            <p:cNvSpPr/>
-            <p:nvPr/>
-          </p:nvSpPr>
-          <p:spPr>
-            <a:xfrm>
-              <a:off x="1149096" y="1203959"/>
-              <a:ext cx="4267200" cy="353695"/>
-            </a:xfrm>
-            <a:custGeom>
-              <a:avLst/>
-              <a:gdLst/>
-              <a:ahLst/>
-              <a:cxnLst/>
-              <a:rect l="l" t="t" r="r" b="b"/>
-              <a:pathLst>
-                <a:path w="4267200" h="353694">
-                  <a:moveTo>
-                    <a:pt x="4267200" y="155448"/>
-                  </a:moveTo>
-                  <a:lnTo>
-                    <a:pt x="2340864" y="155448"/>
-                  </a:lnTo>
-                  <a:lnTo>
-                    <a:pt x="2340864" y="42418"/>
-                  </a:lnTo>
-                  <a:lnTo>
-                    <a:pt x="2337536" y="25882"/>
-                  </a:lnTo>
-                  <a:lnTo>
-                    <a:pt x="2328456" y="12407"/>
-                  </a:lnTo>
-                  <a:lnTo>
-                    <a:pt x="2314981" y="3327"/>
-                  </a:lnTo>
-                  <a:lnTo>
-                    <a:pt x="2298446" y="0"/>
-                  </a:lnTo>
-                  <a:lnTo>
-                    <a:pt x="676402" y="0"/>
-                  </a:lnTo>
-                  <a:lnTo>
-                    <a:pt x="659853" y="3327"/>
-                  </a:lnTo>
-                  <a:lnTo>
-                    <a:pt x="646379" y="12407"/>
-                  </a:lnTo>
-                  <a:lnTo>
-                    <a:pt x="637298" y="25882"/>
-                  </a:lnTo>
-                  <a:lnTo>
-                    <a:pt x="633984" y="42418"/>
-                  </a:lnTo>
-                  <a:lnTo>
-                    <a:pt x="633984" y="155448"/>
-                  </a:lnTo>
-                  <a:lnTo>
-                    <a:pt x="0" y="155448"/>
-                  </a:lnTo>
-                  <a:lnTo>
-                    <a:pt x="0" y="353568"/>
-                  </a:lnTo>
-                  <a:lnTo>
-                    <a:pt x="676402" y="353568"/>
-                  </a:lnTo>
-                  <a:lnTo>
-                    <a:pt x="2298446" y="353568"/>
-                  </a:lnTo>
-                  <a:lnTo>
-                    <a:pt x="4267200" y="353568"/>
-                  </a:lnTo>
-                  <a:lnTo>
-                    <a:pt x="4267200" y="155448"/>
-                  </a:lnTo>
-                  <a:close/>
-                </a:path>
-              </a:pathLst>
-            </a:custGeom>
-            <a:solidFill>
-              <a:srgbClr val="160928"/>
-            </a:solidFill>
-          </p:spPr>
-          <p:txBody>
-            <a:bodyPr wrap="square" lIns="0" tIns="0" rIns="0" bIns="0" rtlCol="0"/>
-            <a:lstStyle/>
-            <a:p/>
-          </p:txBody>
-        </p:sp>
-        <p:sp>
-          <p:nvSpPr>
-            <p:cNvPr id="8" name="object 8"/>
-            <p:cNvSpPr/>
-            <p:nvPr/>
-          </p:nvSpPr>
-          <p:spPr>
-            <a:xfrm>
-              <a:off x="1219200" y="1225296"/>
-              <a:ext cx="60960" cy="60960"/>
-            </a:xfrm>
-            <a:custGeom>
-              <a:avLst/>
-              <a:gdLst/>
-              <a:ahLst/>
-              <a:cxnLst/>
-              <a:rect l="l" t="t" r="r" b="b"/>
-              <a:pathLst>
-                <a:path w="60959" h="60959">
-                  <a:moveTo>
-                    <a:pt x="30480" y="0"/>
-                  </a:moveTo>
-                  <a:lnTo>
-                    <a:pt x="18618" y="2387"/>
-                  </a:lnTo>
-                  <a:lnTo>
-                    <a:pt x="8929" y="8905"/>
-                  </a:lnTo>
-                  <a:lnTo>
-                    <a:pt x="2396" y="18591"/>
-                  </a:lnTo>
-                  <a:lnTo>
-                    <a:pt x="0" y="30479"/>
-                  </a:lnTo>
-                  <a:lnTo>
-                    <a:pt x="2396" y="42368"/>
-                  </a:lnTo>
-                  <a:lnTo>
-                    <a:pt x="8929" y="52054"/>
-                  </a:lnTo>
-                  <a:lnTo>
-                    <a:pt x="18618" y="58572"/>
-                  </a:lnTo>
-                  <a:lnTo>
-                    <a:pt x="30480" y="60959"/>
-                  </a:lnTo>
-                  <a:lnTo>
-                    <a:pt x="42341" y="58572"/>
-                  </a:lnTo>
-                  <a:lnTo>
-                    <a:pt x="52030" y="52054"/>
-                  </a:lnTo>
-                  <a:lnTo>
-                    <a:pt x="58563" y="42368"/>
-                  </a:lnTo>
-                  <a:lnTo>
-                    <a:pt x="60959" y="30479"/>
-                  </a:lnTo>
-                  <a:lnTo>
-                    <a:pt x="58563" y="18591"/>
-                  </a:lnTo>
-                  <a:lnTo>
-                    <a:pt x="52030" y="8905"/>
-                  </a:lnTo>
-                  <a:lnTo>
-                    <a:pt x="42341" y="2387"/>
-                  </a:lnTo>
-                  <a:lnTo>
-                    <a:pt x="30480" y="0"/>
-                  </a:lnTo>
-                  <a:close/>
-                </a:path>
-              </a:pathLst>
-            </a:custGeom>
-            <a:solidFill>
-              <a:srgbClr val="FFD5E2"/>
-            </a:solidFill>
-          </p:spPr>
-          <p:txBody>
-            <a:bodyPr wrap="square" lIns="0" tIns="0" rIns="0" bIns="0" rtlCol="0"/>
-            <a:lstStyle/>
-            <a:p/>
-          </p:txBody>
-        </p:sp>
-        <p:sp>
-          <p:nvSpPr>
-            <p:cNvPr id="9" name="object 9"/>
-            <p:cNvSpPr/>
-            <p:nvPr/>
-          </p:nvSpPr>
-          <p:spPr>
-            <a:xfrm>
-              <a:off x="1325880" y="1225296"/>
-              <a:ext cx="60960" cy="60960"/>
-            </a:xfrm>
-            <a:custGeom>
-              <a:avLst/>
-              <a:gdLst/>
-              <a:ahLst/>
-              <a:cxnLst/>
-              <a:rect l="l" t="t" r="r" b="b"/>
-              <a:pathLst>
-                <a:path w="60959" h="60959">
-                  <a:moveTo>
-                    <a:pt x="30479" y="0"/>
-                  </a:moveTo>
-                  <a:lnTo>
-                    <a:pt x="18591" y="2387"/>
-                  </a:lnTo>
-                  <a:lnTo>
-                    <a:pt x="8905" y="8905"/>
-                  </a:lnTo>
-                  <a:lnTo>
-                    <a:pt x="2387" y="18591"/>
-                  </a:lnTo>
-                  <a:lnTo>
-                    <a:pt x="0" y="30479"/>
-                  </a:lnTo>
-                  <a:lnTo>
-                    <a:pt x="2387" y="42368"/>
-                  </a:lnTo>
-                  <a:lnTo>
-                    <a:pt x="8905" y="52054"/>
-                  </a:lnTo>
-                  <a:lnTo>
-                    <a:pt x="18591" y="58572"/>
-                  </a:lnTo>
-                  <a:lnTo>
-                    <a:pt x="30479" y="60959"/>
-                  </a:lnTo>
-                  <a:lnTo>
-                    <a:pt x="42368" y="58572"/>
-                  </a:lnTo>
-                  <a:lnTo>
-                    <a:pt x="52054" y="52054"/>
-                  </a:lnTo>
-                  <a:lnTo>
-                    <a:pt x="58572" y="42368"/>
-                  </a:lnTo>
-                  <a:lnTo>
-                    <a:pt x="60959" y="30479"/>
-                  </a:lnTo>
-                  <a:lnTo>
-                    <a:pt x="58572" y="18591"/>
-                  </a:lnTo>
-                  <a:lnTo>
-                    <a:pt x="52054" y="8905"/>
-                  </a:lnTo>
-                  <a:lnTo>
-                    <a:pt x="42368" y="2387"/>
-                  </a:lnTo>
-                  <a:lnTo>
-                    <a:pt x="30479" y="0"/>
-                  </a:lnTo>
-                  <a:close/>
-                </a:path>
-              </a:pathLst>
-            </a:custGeom>
-            <a:solidFill>
-              <a:srgbClr val="FB3777"/>
-            </a:solidFill>
-          </p:spPr>
-          <p:txBody>
-            <a:bodyPr wrap="square" lIns="0" tIns="0" rIns="0" bIns="0" rtlCol="0"/>
-            <a:lstStyle/>
-            <a:p/>
-          </p:txBody>
-        </p:sp>
-        <p:sp>
-          <p:nvSpPr>
-            <p:cNvPr id="10" name="object 10"/>
-            <p:cNvSpPr/>
-            <p:nvPr/>
-          </p:nvSpPr>
-          <p:spPr>
-            <a:xfrm>
-              <a:off x="1432560" y="1225296"/>
-              <a:ext cx="60960" cy="60960"/>
-            </a:xfrm>
-            <a:custGeom>
-              <a:avLst/>
-              <a:gdLst/>
-              <a:ahLst/>
-              <a:cxnLst/>
-              <a:rect l="l" t="t" r="r" b="b"/>
-              <a:pathLst>
-                <a:path w="60959" h="60959">
-                  <a:moveTo>
-                    <a:pt x="30480" y="0"/>
-                  </a:moveTo>
-                  <a:lnTo>
-                    <a:pt x="18591" y="2387"/>
-                  </a:lnTo>
-                  <a:lnTo>
-                    <a:pt x="8905" y="8905"/>
-                  </a:lnTo>
-                  <a:lnTo>
-                    <a:pt x="2387" y="18591"/>
-                  </a:lnTo>
-                  <a:lnTo>
-                    <a:pt x="0" y="30479"/>
-                  </a:lnTo>
-                  <a:lnTo>
-                    <a:pt x="2387" y="42368"/>
-                  </a:lnTo>
-                  <a:lnTo>
-                    <a:pt x="8905" y="52054"/>
-                  </a:lnTo>
-                  <a:lnTo>
-                    <a:pt x="18591" y="58572"/>
-                  </a:lnTo>
-                  <a:lnTo>
-                    <a:pt x="30480" y="60959"/>
-                  </a:lnTo>
-                  <a:lnTo>
-                    <a:pt x="42368" y="58572"/>
-                  </a:lnTo>
-                  <a:lnTo>
-                    <a:pt x="52054" y="52054"/>
-                  </a:lnTo>
-                  <a:lnTo>
-                    <a:pt x="58572" y="42368"/>
-                  </a:lnTo>
-                  <a:lnTo>
-                    <a:pt x="60959" y="30479"/>
-                  </a:lnTo>
-                  <a:lnTo>
-                    <a:pt x="58572" y="18591"/>
-                  </a:lnTo>
-                  <a:lnTo>
-                    <a:pt x="52054" y="8905"/>
-                  </a:lnTo>
-                  <a:lnTo>
-                    <a:pt x="42368" y="2387"/>
-                  </a:lnTo>
-                  <a:lnTo>
-                    <a:pt x="30480" y="0"/>
-                  </a:lnTo>
-                  <a:close/>
-                </a:path>
-              </a:pathLst>
-            </a:custGeom>
-            <a:solidFill>
-              <a:srgbClr val="8983D1"/>
-            </a:solidFill>
-          </p:spPr>
-          <p:txBody>
-            <a:bodyPr wrap="square" lIns="0" tIns="0" rIns="0" bIns="0" rtlCol="0"/>
-            <a:lstStyle/>
-            <a:p/>
-          </p:txBody>
-        </p:sp>
-        <p:sp>
-          <p:nvSpPr>
-            <p:cNvPr id="11" name="object 11"/>
-            <p:cNvSpPr/>
-            <p:nvPr/>
-          </p:nvSpPr>
-          <p:spPr>
-            <a:xfrm>
-              <a:off x="1889760" y="1395983"/>
-              <a:ext cx="3203575" cy="128270"/>
-            </a:xfrm>
-            <a:custGeom>
-              <a:avLst/>
-              <a:gdLst/>
-              <a:ahLst/>
-              <a:cxnLst/>
-              <a:rect l="l" t="t" r="r" b="b"/>
-              <a:pathLst>
-                <a:path w="3203575" h="128269">
-                  <a:moveTo>
-                    <a:pt x="3203448" y="0"/>
-                  </a:moveTo>
-                  <a:lnTo>
-                    <a:pt x="0" y="0"/>
-                  </a:lnTo>
-                  <a:lnTo>
-                    <a:pt x="0" y="128015"/>
-                  </a:lnTo>
-                  <a:lnTo>
-                    <a:pt x="3203448" y="128015"/>
-                  </a:lnTo>
-                  <a:lnTo>
-                    <a:pt x="3203448" y="0"/>
-                  </a:lnTo>
-                  <a:close/>
-                </a:path>
-              </a:pathLst>
-            </a:custGeom>
-            <a:solidFill>
-              <a:srgbClr val="FFFFFF"/>
-            </a:solidFill>
-          </p:spPr>
-          <p:txBody>
-            <a:bodyPr wrap="square" lIns="0" tIns="0" rIns="0" bIns="0" rtlCol="0"/>
-            <a:lstStyle/>
-            <a:p/>
-          </p:txBody>
-        </p:sp>
-        <p:sp>
-          <p:nvSpPr>
-            <p:cNvPr id="12" name="object 12"/>
-            <p:cNvSpPr/>
-            <p:nvPr/>
-          </p:nvSpPr>
-          <p:spPr>
-            <a:xfrm>
-              <a:off x="5209032" y="1203959"/>
-              <a:ext cx="97790" cy="97790"/>
-            </a:xfrm>
-            <a:custGeom>
-              <a:avLst/>
-              <a:gdLst/>
-              <a:ahLst/>
-              <a:cxnLst/>
-              <a:rect l="l" t="t" r="r" b="b"/>
-              <a:pathLst>
-                <a:path w="97789" h="97790">
-                  <a:moveTo>
-                    <a:pt x="24384" y="74549"/>
-                  </a:moveTo>
-                  <a:lnTo>
-                    <a:pt x="22987" y="73152"/>
-                  </a:lnTo>
-                  <a:lnTo>
-                    <a:pt x="21209" y="73152"/>
-                  </a:lnTo>
-                  <a:lnTo>
-                    <a:pt x="1397" y="73152"/>
-                  </a:lnTo>
-                  <a:lnTo>
-                    <a:pt x="0" y="74549"/>
-                  </a:lnTo>
-                  <a:lnTo>
-                    <a:pt x="0" y="96139"/>
-                  </a:lnTo>
-                  <a:lnTo>
-                    <a:pt x="1397" y="97536"/>
-                  </a:lnTo>
-                  <a:lnTo>
-                    <a:pt x="22987" y="97536"/>
-                  </a:lnTo>
-                  <a:lnTo>
-                    <a:pt x="24384" y="96139"/>
-                  </a:lnTo>
-                  <a:lnTo>
-                    <a:pt x="24384" y="74549"/>
-                  </a:lnTo>
-                  <a:close/>
-                </a:path>
-                <a:path w="97789" h="97790">
-                  <a:moveTo>
-                    <a:pt x="24384" y="37973"/>
-                  </a:moveTo>
-                  <a:lnTo>
-                    <a:pt x="22987" y="36576"/>
-                  </a:lnTo>
-                  <a:lnTo>
-                    <a:pt x="21209" y="36576"/>
-                  </a:lnTo>
-                  <a:lnTo>
-                    <a:pt x="1397" y="36576"/>
-                  </a:lnTo>
-                  <a:lnTo>
-                    <a:pt x="0" y="37973"/>
-                  </a:lnTo>
-                  <a:lnTo>
-                    <a:pt x="0" y="59563"/>
-                  </a:lnTo>
-                  <a:lnTo>
-                    <a:pt x="1397" y="60960"/>
-                  </a:lnTo>
-                  <a:lnTo>
-                    <a:pt x="22987" y="60960"/>
-                  </a:lnTo>
-                  <a:lnTo>
-                    <a:pt x="24384" y="59563"/>
-                  </a:lnTo>
-                  <a:lnTo>
-                    <a:pt x="24384" y="37973"/>
-                  </a:lnTo>
-                  <a:close/>
-                </a:path>
-                <a:path w="97789" h="97790">
-                  <a:moveTo>
-                    <a:pt x="24384" y="1397"/>
-                  </a:moveTo>
-                  <a:lnTo>
-                    <a:pt x="22987" y="0"/>
-                  </a:lnTo>
-                  <a:lnTo>
-                    <a:pt x="21209" y="0"/>
-                  </a:lnTo>
-                  <a:lnTo>
-                    <a:pt x="1397" y="0"/>
-                  </a:lnTo>
-                  <a:lnTo>
-                    <a:pt x="0" y="1397"/>
-                  </a:lnTo>
-                  <a:lnTo>
-                    <a:pt x="0" y="23114"/>
-                  </a:lnTo>
-                  <a:lnTo>
-                    <a:pt x="1397" y="24384"/>
-                  </a:lnTo>
-                  <a:lnTo>
-                    <a:pt x="22987" y="24384"/>
-                  </a:lnTo>
-                  <a:lnTo>
-                    <a:pt x="24384" y="23114"/>
-                  </a:lnTo>
-                  <a:lnTo>
-                    <a:pt x="24384" y="1397"/>
-                  </a:lnTo>
-                  <a:close/>
-                </a:path>
-                <a:path w="97789" h="97790">
-                  <a:moveTo>
-                    <a:pt x="60960" y="74549"/>
-                  </a:moveTo>
-                  <a:lnTo>
-                    <a:pt x="59563" y="73152"/>
-                  </a:lnTo>
-                  <a:lnTo>
-                    <a:pt x="57912" y="73152"/>
-                  </a:lnTo>
-                  <a:lnTo>
-                    <a:pt x="37973" y="73152"/>
-                  </a:lnTo>
-                  <a:lnTo>
-                    <a:pt x="36576" y="74549"/>
-                  </a:lnTo>
-                  <a:lnTo>
-                    <a:pt x="36576" y="96139"/>
-                  </a:lnTo>
-                  <a:lnTo>
-                    <a:pt x="37973" y="97536"/>
-                  </a:lnTo>
-                  <a:lnTo>
-                    <a:pt x="59563" y="97536"/>
-                  </a:lnTo>
-                  <a:lnTo>
-                    <a:pt x="60960" y="96139"/>
-                  </a:lnTo>
-                  <a:lnTo>
-                    <a:pt x="60960" y="74549"/>
-                  </a:lnTo>
-                  <a:close/>
-                </a:path>
-                <a:path w="97789" h="97790">
-                  <a:moveTo>
-                    <a:pt x="60960" y="37973"/>
-                  </a:moveTo>
-                  <a:lnTo>
-                    <a:pt x="59563" y="36576"/>
-                  </a:lnTo>
-                  <a:lnTo>
-                    <a:pt x="57912" y="36576"/>
-                  </a:lnTo>
-                  <a:lnTo>
-                    <a:pt x="37973" y="36576"/>
-                  </a:lnTo>
-                  <a:lnTo>
-                    <a:pt x="36576" y="37973"/>
-                  </a:lnTo>
-                  <a:lnTo>
-                    <a:pt x="36576" y="59563"/>
-                  </a:lnTo>
-                  <a:lnTo>
-                    <a:pt x="37973" y="60960"/>
-                  </a:lnTo>
-                  <a:lnTo>
-                    <a:pt x="59563" y="60960"/>
-                  </a:lnTo>
-                  <a:lnTo>
-                    <a:pt x="60960" y="59563"/>
-                  </a:lnTo>
-                  <a:lnTo>
-                    <a:pt x="60960" y="37973"/>
-                  </a:lnTo>
-                  <a:close/>
-                </a:path>
-                <a:path w="97789" h="97790">
-                  <a:moveTo>
-                    <a:pt x="60960" y="1397"/>
-                  </a:moveTo>
-                  <a:lnTo>
-                    <a:pt x="59563" y="0"/>
-                  </a:lnTo>
-                  <a:lnTo>
-                    <a:pt x="57912" y="0"/>
-                  </a:lnTo>
-                  <a:lnTo>
-                    <a:pt x="37973" y="0"/>
-                  </a:lnTo>
-                  <a:lnTo>
-                    <a:pt x="36576" y="1397"/>
-                  </a:lnTo>
-                  <a:lnTo>
-                    <a:pt x="36576" y="23114"/>
-                  </a:lnTo>
-                  <a:lnTo>
-                    <a:pt x="37973" y="24384"/>
-                  </a:lnTo>
-                  <a:lnTo>
-                    <a:pt x="59563" y="24384"/>
-                  </a:lnTo>
-                  <a:lnTo>
-                    <a:pt x="60960" y="23114"/>
-                  </a:lnTo>
-                  <a:lnTo>
-                    <a:pt x="60960" y="1397"/>
-                  </a:lnTo>
-                  <a:close/>
-                </a:path>
-                <a:path w="97789" h="97790">
-                  <a:moveTo>
-                    <a:pt x="97536" y="74549"/>
-                  </a:moveTo>
-                  <a:lnTo>
-                    <a:pt x="96139" y="73152"/>
-                  </a:lnTo>
-                  <a:lnTo>
-                    <a:pt x="94488" y="73152"/>
-                  </a:lnTo>
-                  <a:lnTo>
-                    <a:pt x="74422" y="73152"/>
-                  </a:lnTo>
-                  <a:lnTo>
-                    <a:pt x="73152" y="74549"/>
-                  </a:lnTo>
-                  <a:lnTo>
-                    <a:pt x="73152" y="96139"/>
-                  </a:lnTo>
-                  <a:lnTo>
-                    <a:pt x="74422" y="97536"/>
-                  </a:lnTo>
-                  <a:lnTo>
-                    <a:pt x="96139" y="97536"/>
-                  </a:lnTo>
-                  <a:lnTo>
-                    <a:pt x="97536" y="96139"/>
-                  </a:lnTo>
-                  <a:lnTo>
-                    <a:pt x="97536" y="74549"/>
-                  </a:lnTo>
-                  <a:close/>
-                </a:path>
-                <a:path w="97789" h="97790">
-                  <a:moveTo>
-                    <a:pt x="97536" y="37973"/>
-                  </a:moveTo>
-                  <a:lnTo>
-                    <a:pt x="96139" y="36576"/>
-                  </a:lnTo>
-                  <a:lnTo>
-                    <a:pt x="94488" y="36576"/>
-                  </a:lnTo>
-                  <a:lnTo>
-                    <a:pt x="74422" y="36576"/>
-                  </a:lnTo>
-                  <a:lnTo>
-                    <a:pt x="73152" y="37973"/>
-                  </a:lnTo>
-                  <a:lnTo>
-                    <a:pt x="73152" y="59563"/>
-                  </a:lnTo>
-                  <a:lnTo>
-                    <a:pt x="74422" y="60960"/>
-                  </a:lnTo>
-                  <a:lnTo>
-                    <a:pt x="96139" y="60960"/>
-                  </a:lnTo>
-                  <a:lnTo>
-                    <a:pt x="97536" y="59563"/>
-                  </a:lnTo>
-                  <a:lnTo>
-                    <a:pt x="97536" y="37973"/>
-                  </a:lnTo>
-                  <a:close/>
-                </a:path>
-                <a:path w="97789" h="97790">
-                  <a:moveTo>
-                    <a:pt x="97536" y="1397"/>
-                  </a:moveTo>
-                  <a:lnTo>
-                    <a:pt x="96139" y="0"/>
-                  </a:lnTo>
-                  <a:lnTo>
-                    <a:pt x="94488" y="0"/>
-                  </a:lnTo>
-                  <a:lnTo>
-                    <a:pt x="74422" y="0"/>
-                  </a:lnTo>
-                  <a:lnTo>
-                    <a:pt x="73152" y="1397"/>
-                  </a:lnTo>
-                  <a:lnTo>
-                    <a:pt x="73152" y="23114"/>
-                  </a:lnTo>
-                  <a:lnTo>
-                    <a:pt x="74422" y="24384"/>
-                  </a:lnTo>
-                  <a:lnTo>
-                    <a:pt x="96139" y="24384"/>
-                  </a:lnTo>
-                  <a:lnTo>
-                    <a:pt x="97536" y="23114"/>
-                  </a:lnTo>
-                  <a:lnTo>
-                    <a:pt x="97536" y="1397"/>
-                  </a:lnTo>
-                  <a:close/>
-                </a:path>
-              </a:pathLst>
-            </a:custGeom>
-            <a:solidFill>
-              <a:srgbClr val="7E7E7E"/>
-            </a:solidFill>
-          </p:spPr>
-          <p:txBody>
-            <a:bodyPr wrap="square" lIns="0" tIns="0" rIns="0" bIns="0" rtlCol="0"/>
-            <a:lstStyle/>
-            <a:p/>
-          </p:txBody>
-        </p:sp>
         <p:pic>
           <p:nvPicPr>
             <p:cNvPr id="13" name="object 13"/>
@@ -10137,91 +6003,53 @@
             </a:prstGeom>
           </p:spPr>
         </p:pic>
-        <p:sp>
-          <p:nvSpPr>
-            <p:cNvPr id="14" name="object 14"/>
-            <p:cNvSpPr/>
-            <p:nvPr/>
-          </p:nvSpPr>
-          <p:spPr>
-            <a:xfrm>
-              <a:off x="1542288" y="1225296"/>
-              <a:ext cx="60960" cy="60960"/>
-            </a:xfrm>
-            <a:custGeom>
-              <a:avLst/>
-              <a:gdLst/>
-              <a:ahLst/>
-              <a:cxnLst/>
-              <a:rect l="l" t="t" r="r" b="b"/>
-              <a:pathLst>
-                <a:path w="60959" h="60959">
-                  <a:moveTo>
-                    <a:pt x="30480" y="0"/>
-                  </a:moveTo>
-                  <a:lnTo>
-                    <a:pt x="18591" y="2387"/>
-                  </a:lnTo>
-                  <a:lnTo>
-                    <a:pt x="8905" y="8905"/>
-                  </a:lnTo>
-                  <a:lnTo>
-                    <a:pt x="2387" y="18591"/>
-                  </a:lnTo>
-                  <a:lnTo>
-                    <a:pt x="0" y="30479"/>
-                  </a:lnTo>
-                  <a:lnTo>
-                    <a:pt x="2387" y="42368"/>
-                  </a:lnTo>
-                  <a:lnTo>
-                    <a:pt x="8905" y="52054"/>
-                  </a:lnTo>
-                  <a:lnTo>
-                    <a:pt x="18591" y="58572"/>
-                  </a:lnTo>
-                  <a:lnTo>
-                    <a:pt x="30480" y="60959"/>
-                  </a:lnTo>
-                  <a:lnTo>
-                    <a:pt x="42368" y="58572"/>
-                  </a:lnTo>
-                  <a:lnTo>
-                    <a:pt x="52054" y="52054"/>
-                  </a:lnTo>
-                  <a:lnTo>
-                    <a:pt x="58572" y="42368"/>
-                  </a:lnTo>
-                  <a:lnTo>
-                    <a:pt x="60959" y="30479"/>
-                  </a:lnTo>
-                  <a:lnTo>
-                    <a:pt x="58572" y="18591"/>
-                  </a:lnTo>
-                  <a:lnTo>
-                    <a:pt x="52054" y="8905"/>
-                  </a:lnTo>
-                  <a:lnTo>
-                    <a:pt x="42368" y="2387"/>
-                  </a:lnTo>
-                  <a:lnTo>
-                    <a:pt x="30480" y="0"/>
-                  </a:lnTo>
-                  <a:close/>
-                </a:path>
-              </a:pathLst>
-            </a:custGeom>
+      </p:grpSp>
+      <p:sp>
+        <p:nvSpPr>
+          <p:cNvPr id="15" name="object 15"/>
+          <p:cNvSpPr txBox="1"/>
+          <p:nvPr/>
+        </p:nvSpPr>
+        <p:spPr>
+          <a:xfrm>
+            <a:off x="1889760" y="1395983"/>
+            <a:ext cx="3203575" cy="128270"/>
+          </a:xfrm>
+          <a:prstGeom prst="rect">
+            <a:avLst/>
+          </a:prstGeom>
+          <a:ln w="24383">
             <a:solidFill>
-              <a:srgbClr val="520977"/>
+              <a:srgbClr val="B3B3B3"/>
             </a:solidFill>
-          </p:spPr>
-          <p:txBody>
-            <a:bodyPr wrap="square" lIns="0" tIns="0" rIns="0" bIns="0" rtlCol="0"/>
-            <a:lstStyle/>
-            <a:p/>
-          </p:txBody>
-        </p:sp>
-      </p:grpSp>
+          </a:ln>
+        </p:spPr>
+        <p:txBody>
+          <a:bodyPr wrap="square" lIns="0" tIns="0" rIns="0" bIns="0" rtlCol="0" vert="horz">
+            <a:spAutoFit/>
+          </a:bodyPr>
+          <a:lstStyle/>
+          <a:p>
+            <a:pPr marL="207645">
+              <a:lnSpc>
+                <a:spcPts val="1010"/>
+              </a:lnSpc>
+            </a:pPr>
+            <a:r>
+              <a:rPr dirty="0" sz="1000" spc="-10">
+                <a:latin typeface="Montserrat"/>
+                <a:cs typeface="Microsoft Sans Serif"/>
+                <a:hlinkClick r:id="rId5"/>
+              </a:rPr>
+              <a:t>www.lider.com</a:t>
+            </a:r>
+            <a:endParaRPr sz="1000">
+              <a:latin typeface="Microsoft Sans Serif"/>
+              <a:cs typeface="Microsoft Sans Serif"/>
+            </a:endParaRPr>
+          </a:p>
+        </p:txBody>
+      </p:sp>
       <p:grpSp>
         <p:nvGrpSpPr>
           <p:cNvPr id="16" name="object 16"/>
@@ -10280,819 +6108,6 @@
             </a:prstGeom>
           </p:spPr>
         </p:pic>
-        <p:sp>
-          <p:nvSpPr>
-            <p:cNvPr id="19" name="object 19"/>
-            <p:cNvSpPr/>
-            <p:nvPr/>
-          </p:nvSpPr>
-          <p:spPr>
-            <a:xfrm>
-              <a:off x="6793992" y="1149095"/>
-              <a:ext cx="4267200" cy="2822575"/>
-            </a:xfrm>
-            <a:custGeom>
-              <a:avLst/>
-              <a:gdLst/>
-              <a:ahLst/>
-              <a:cxnLst/>
-              <a:rect l="l" t="t" r="r" b="b"/>
-              <a:pathLst>
-                <a:path w="4267200" h="2822575">
-                  <a:moveTo>
-                    <a:pt x="4230751" y="0"/>
-                  </a:moveTo>
-                  <a:lnTo>
-                    <a:pt x="36449" y="0"/>
-                  </a:lnTo>
-                  <a:lnTo>
-                    <a:pt x="22288" y="2873"/>
-                  </a:lnTo>
-                  <a:lnTo>
-                    <a:pt x="10699" y="10699"/>
-                  </a:lnTo>
-                  <a:lnTo>
-                    <a:pt x="2873" y="22288"/>
-                  </a:lnTo>
-                  <a:lnTo>
-                    <a:pt x="0" y="36449"/>
-                  </a:lnTo>
-                  <a:lnTo>
-                    <a:pt x="0" y="2785998"/>
-                  </a:lnTo>
-                  <a:lnTo>
-                    <a:pt x="2873" y="2800159"/>
-                  </a:lnTo>
-                  <a:lnTo>
-                    <a:pt x="10699" y="2811748"/>
-                  </a:lnTo>
-                  <a:lnTo>
-                    <a:pt x="22288" y="2819574"/>
-                  </a:lnTo>
-                  <a:lnTo>
-                    <a:pt x="36449" y="2822447"/>
-                  </a:lnTo>
-                  <a:lnTo>
-                    <a:pt x="4230751" y="2822447"/>
-                  </a:lnTo>
-                  <a:lnTo>
-                    <a:pt x="4244911" y="2819574"/>
-                  </a:lnTo>
-                  <a:lnTo>
-                    <a:pt x="4256500" y="2811748"/>
-                  </a:lnTo>
-                  <a:lnTo>
-                    <a:pt x="4264326" y="2800159"/>
-                  </a:lnTo>
-                  <a:lnTo>
-                    <a:pt x="4267200" y="2785998"/>
-                  </a:lnTo>
-                  <a:lnTo>
-                    <a:pt x="4267200" y="36449"/>
-                  </a:lnTo>
-                  <a:lnTo>
-                    <a:pt x="4264326" y="22288"/>
-                  </a:lnTo>
-                  <a:lnTo>
-                    <a:pt x="4256500" y="10699"/>
-                  </a:lnTo>
-                  <a:lnTo>
-                    <a:pt x="4244911" y="2873"/>
-                  </a:lnTo>
-                  <a:lnTo>
-                    <a:pt x="4230751" y="0"/>
-                  </a:lnTo>
-                  <a:close/>
-                </a:path>
-              </a:pathLst>
-            </a:custGeom>
-            <a:solidFill>
-              <a:srgbClr val="520977"/>
-            </a:solidFill>
-          </p:spPr>
-          <p:txBody>
-            <a:bodyPr wrap="square" lIns="0" tIns="0" rIns="0" bIns="0" rtlCol="0"/>
-            <a:lstStyle/>
-            <a:p/>
-          </p:txBody>
-        </p:sp>
-        <p:sp>
-          <p:nvSpPr>
-            <p:cNvPr id="20" name="object 20"/>
-            <p:cNvSpPr/>
-            <p:nvPr/>
-          </p:nvSpPr>
-          <p:spPr>
-            <a:xfrm>
-              <a:off x="6793992" y="1203959"/>
-              <a:ext cx="4267200" cy="353695"/>
-            </a:xfrm>
-            <a:custGeom>
-              <a:avLst/>
-              <a:gdLst/>
-              <a:ahLst/>
-              <a:cxnLst/>
-              <a:rect l="l" t="t" r="r" b="b"/>
-              <a:pathLst>
-                <a:path w="4267200" h="353694">
-                  <a:moveTo>
-                    <a:pt x="4267200" y="155448"/>
-                  </a:moveTo>
-                  <a:lnTo>
-                    <a:pt x="2340864" y="155448"/>
-                  </a:lnTo>
-                  <a:lnTo>
-                    <a:pt x="2340864" y="42418"/>
-                  </a:lnTo>
-                  <a:lnTo>
-                    <a:pt x="2337536" y="25882"/>
-                  </a:lnTo>
-                  <a:lnTo>
-                    <a:pt x="2328456" y="12407"/>
-                  </a:lnTo>
-                  <a:lnTo>
-                    <a:pt x="2314981" y="3327"/>
-                  </a:lnTo>
-                  <a:lnTo>
-                    <a:pt x="2298446" y="0"/>
-                  </a:lnTo>
-                  <a:lnTo>
-                    <a:pt x="676402" y="0"/>
-                  </a:lnTo>
-                  <a:lnTo>
-                    <a:pt x="659853" y="3327"/>
-                  </a:lnTo>
-                  <a:lnTo>
-                    <a:pt x="646379" y="12407"/>
-                  </a:lnTo>
-                  <a:lnTo>
-                    <a:pt x="637298" y="25882"/>
-                  </a:lnTo>
-                  <a:lnTo>
-                    <a:pt x="633984" y="42418"/>
-                  </a:lnTo>
-                  <a:lnTo>
-                    <a:pt x="633984" y="155448"/>
-                  </a:lnTo>
-                  <a:lnTo>
-                    <a:pt x="0" y="155448"/>
-                  </a:lnTo>
-                  <a:lnTo>
-                    <a:pt x="0" y="353568"/>
-                  </a:lnTo>
-                  <a:lnTo>
-                    <a:pt x="676402" y="353568"/>
-                  </a:lnTo>
-                  <a:lnTo>
-                    <a:pt x="2298446" y="353568"/>
-                  </a:lnTo>
-                  <a:lnTo>
-                    <a:pt x="4267200" y="353568"/>
-                  </a:lnTo>
-                  <a:lnTo>
-                    <a:pt x="4267200" y="155448"/>
-                  </a:lnTo>
-                  <a:close/>
-                </a:path>
-              </a:pathLst>
-            </a:custGeom>
-            <a:solidFill>
-              <a:srgbClr val="160928"/>
-            </a:solidFill>
-          </p:spPr>
-          <p:txBody>
-            <a:bodyPr wrap="square" lIns="0" tIns="0" rIns="0" bIns="0" rtlCol="0"/>
-            <a:lstStyle/>
-            <a:p/>
-          </p:txBody>
-        </p:sp>
-        <p:sp>
-          <p:nvSpPr>
-            <p:cNvPr id="21" name="object 21"/>
-            <p:cNvSpPr/>
-            <p:nvPr/>
-          </p:nvSpPr>
-          <p:spPr>
-            <a:xfrm>
-              <a:off x="6864095" y="1225295"/>
-              <a:ext cx="60960" cy="60960"/>
-            </a:xfrm>
-            <a:custGeom>
-              <a:avLst/>
-              <a:gdLst/>
-              <a:ahLst/>
-              <a:cxnLst/>
-              <a:rect l="l" t="t" r="r" b="b"/>
-              <a:pathLst>
-                <a:path w="60959" h="60959">
-                  <a:moveTo>
-                    <a:pt x="30479" y="0"/>
-                  </a:moveTo>
-                  <a:lnTo>
-                    <a:pt x="18591" y="2387"/>
-                  </a:lnTo>
-                  <a:lnTo>
-                    <a:pt x="8905" y="8905"/>
-                  </a:lnTo>
-                  <a:lnTo>
-                    <a:pt x="2387" y="18591"/>
-                  </a:lnTo>
-                  <a:lnTo>
-                    <a:pt x="0" y="30479"/>
-                  </a:lnTo>
-                  <a:lnTo>
-                    <a:pt x="2387" y="42368"/>
-                  </a:lnTo>
-                  <a:lnTo>
-                    <a:pt x="8905" y="52054"/>
-                  </a:lnTo>
-                  <a:lnTo>
-                    <a:pt x="18591" y="58572"/>
-                  </a:lnTo>
-                  <a:lnTo>
-                    <a:pt x="30479" y="60959"/>
-                  </a:lnTo>
-                  <a:lnTo>
-                    <a:pt x="42368" y="58572"/>
-                  </a:lnTo>
-                  <a:lnTo>
-                    <a:pt x="52054" y="52054"/>
-                  </a:lnTo>
-                  <a:lnTo>
-                    <a:pt x="58572" y="42368"/>
-                  </a:lnTo>
-                  <a:lnTo>
-                    <a:pt x="60959" y="30479"/>
-                  </a:lnTo>
-                  <a:lnTo>
-                    <a:pt x="58572" y="18591"/>
-                  </a:lnTo>
-                  <a:lnTo>
-                    <a:pt x="52054" y="8905"/>
-                  </a:lnTo>
-                  <a:lnTo>
-                    <a:pt x="42368" y="2387"/>
-                  </a:lnTo>
-                  <a:lnTo>
-                    <a:pt x="30479" y="0"/>
-                  </a:lnTo>
-                  <a:close/>
-                </a:path>
-              </a:pathLst>
-            </a:custGeom>
-            <a:solidFill>
-              <a:srgbClr val="FFD5E2"/>
-            </a:solidFill>
-          </p:spPr>
-          <p:txBody>
-            <a:bodyPr wrap="square" lIns="0" tIns="0" rIns="0" bIns="0" rtlCol="0"/>
-            <a:lstStyle/>
-            <a:p/>
-          </p:txBody>
-        </p:sp>
-        <p:sp>
-          <p:nvSpPr>
-            <p:cNvPr id="22" name="object 22"/>
-            <p:cNvSpPr/>
-            <p:nvPr/>
-          </p:nvSpPr>
-          <p:spPr>
-            <a:xfrm>
-              <a:off x="6970775" y="1225295"/>
-              <a:ext cx="60960" cy="60960"/>
-            </a:xfrm>
-            <a:custGeom>
-              <a:avLst/>
-              <a:gdLst/>
-              <a:ahLst/>
-              <a:cxnLst/>
-              <a:rect l="l" t="t" r="r" b="b"/>
-              <a:pathLst>
-                <a:path w="60959" h="60959">
-                  <a:moveTo>
-                    <a:pt x="30479" y="0"/>
-                  </a:moveTo>
-                  <a:lnTo>
-                    <a:pt x="18591" y="2387"/>
-                  </a:lnTo>
-                  <a:lnTo>
-                    <a:pt x="8905" y="8905"/>
-                  </a:lnTo>
-                  <a:lnTo>
-                    <a:pt x="2387" y="18591"/>
-                  </a:lnTo>
-                  <a:lnTo>
-                    <a:pt x="0" y="30479"/>
-                  </a:lnTo>
-                  <a:lnTo>
-                    <a:pt x="2387" y="42368"/>
-                  </a:lnTo>
-                  <a:lnTo>
-                    <a:pt x="8905" y="52054"/>
-                  </a:lnTo>
-                  <a:lnTo>
-                    <a:pt x="18591" y="58572"/>
-                  </a:lnTo>
-                  <a:lnTo>
-                    <a:pt x="30479" y="60959"/>
-                  </a:lnTo>
-                  <a:lnTo>
-                    <a:pt x="42368" y="58572"/>
-                  </a:lnTo>
-                  <a:lnTo>
-                    <a:pt x="52054" y="52054"/>
-                  </a:lnTo>
-                  <a:lnTo>
-                    <a:pt x="58572" y="42368"/>
-                  </a:lnTo>
-                  <a:lnTo>
-                    <a:pt x="60959" y="30479"/>
-                  </a:lnTo>
-                  <a:lnTo>
-                    <a:pt x="58572" y="18591"/>
-                  </a:lnTo>
-                  <a:lnTo>
-                    <a:pt x="52054" y="8905"/>
-                  </a:lnTo>
-                  <a:lnTo>
-                    <a:pt x="42368" y="2387"/>
-                  </a:lnTo>
-                  <a:lnTo>
-                    <a:pt x="30479" y="0"/>
-                  </a:lnTo>
-                  <a:close/>
-                </a:path>
-              </a:pathLst>
-            </a:custGeom>
-            <a:solidFill>
-              <a:srgbClr val="FB3777"/>
-            </a:solidFill>
-          </p:spPr>
-          <p:txBody>
-            <a:bodyPr wrap="square" lIns="0" tIns="0" rIns="0" bIns="0" rtlCol="0"/>
-            <a:lstStyle/>
-            <a:p/>
-          </p:txBody>
-        </p:sp>
-        <p:sp>
-          <p:nvSpPr>
-            <p:cNvPr id="23" name="object 23"/>
-            <p:cNvSpPr/>
-            <p:nvPr/>
-          </p:nvSpPr>
-          <p:spPr>
-            <a:xfrm>
-              <a:off x="7077455" y="1225295"/>
-              <a:ext cx="60960" cy="60960"/>
-            </a:xfrm>
-            <a:custGeom>
-              <a:avLst/>
-              <a:gdLst/>
-              <a:ahLst/>
-              <a:cxnLst/>
-              <a:rect l="l" t="t" r="r" b="b"/>
-              <a:pathLst>
-                <a:path w="60959" h="60959">
-                  <a:moveTo>
-                    <a:pt x="30479" y="0"/>
-                  </a:moveTo>
-                  <a:lnTo>
-                    <a:pt x="18591" y="2387"/>
-                  </a:lnTo>
-                  <a:lnTo>
-                    <a:pt x="8905" y="8905"/>
-                  </a:lnTo>
-                  <a:lnTo>
-                    <a:pt x="2387" y="18591"/>
-                  </a:lnTo>
-                  <a:lnTo>
-                    <a:pt x="0" y="30479"/>
-                  </a:lnTo>
-                  <a:lnTo>
-                    <a:pt x="2387" y="42368"/>
-                  </a:lnTo>
-                  <a:lnTo>
-                    <a:pt x="8905" y="52054"/>
-                  </a:lnTo>
-                  <a:lnTo>
-                    <a:pt x="18591" y="58572"/>
-                  </a:lnTo>
-                  <a:lnTo>
-                    <a:pt x="30479" y="60959"/>
-                  </a:lnTo>
-                  <a:lnTo>
-                    <a:pt x="42368" y="58572"/>
-                  </a:lnTo>
-                  <a:lnTo>
-                    <a:pt x="52054" y="52054"/>
-                  </a:lnTo>
-                  <a:lnTo>
-                    <a:pt x="58572" y="42368"/>
-                  </a:lnTo>
-                  <a:lnTo>
-                    <a:pt x="60960" y="30479"/>
-                  </a:lnTo>
-                  <a:lnTo>
-                    <a:pt x="58572" y="18591"/>
-                  </a:lnTo>
-                  <a:lnTo>
-                    <a:pt x="52054" y="8905"/>
-                  </a:lnTo>
-                  <a:lnTo>
-                    <a:pt x="42368" y="2387"/>
-                  </a:lnTo>
-                  <a:lnTo>
-                    <a:pt x="30479" y="0"/>
-                  </a:lnTo>
-                  <a:close/>
-                </a:path>
-              </a:pathLst>
-            </a:custGeom>
-            <a:solidFill>
-              <a:srgbClr val="8983D1"/>
-            </a:solidFill>
-          </p:spPr>
-          <p:txBody>
-            <a:bodyPr wrap="square" lIns="0" tIns="0" rIns="0" bIns="0" rtlCol="0"/>
-            <a:lstStyle/>
-            <a:p/>
-          </p:txBody>
-        </p:sp>
-        <p:sp>
-          <p:nvSpPr>
-            <p:cNvPr id="24" name="object 24"/>
-            <p:cNvSpPr/>
-            <p:nvPr/>
-          </p:nvSpPr>
-          <p:spPr>
-            <a:xfrm>
-              <a:off x="7534655" y="1395983"/>
-              <a:ext cx="3203575" cy="128270"/>
-            </a:xfrm>
-            <a:custGeom>
-              <a:avLst/>
-              <a:gdLst/>
-              <a:ahLst/>
-              <a:cxnLst/>
-              <a:rect l="l" t="t" r="r" b="b"/>
-              <a:pathLst>
-                <a:path w="3203575" h="128269">
-                  <a:moveTo>
-                    <a:pt x="3203448" y="0"/>
-                  </a:moveTo>
-                  <a:lnTo>
-                    <a:pt x="0" y="0"/>
-                  </a:lnTo>
-                  <a:lnTo>
-                    <a:pt x="0" y="128015"/>
-                  </a:lnTo>
-                  <a:lnTo>
-                    <a:pt x="3203448" y="128015"/>
-                  </a:lnTo>
-                  <a:lnTo>
-                    <a:pt x="3203448" y="0"/>
-                  </a:lnTo>
-                  <a:close/>
-                </a:path>
-              </a:pathLst>
-            </a:custGeom>
-            <a:solidFill>
-              <a:srgbClr val="FFFFFF"/>
-            </a:solidFill>
-          </p:spPr>
-          <p:txBody>
-            <a:bodyPr wrap="square" lIns="0" tIns="0" rIns="0" bIns="0" rtlCol="0"/>
-            <a:lstStyle/>
-            <a:p/>
-          </p:txBody>
-        </p:sp>
-        <p:sp>
-          <p:nvSpPr>
-            <p:cNvPr id="25" name="object 25"/>
-            <p:cNvSpPr/>
-            <p:nvPr/>
-          </p:nvSpPr>
-          <p:spPr>
-            <a:xfrm>
-              <a:off x="10853928" y="1203959"/>
-              <a:ext cx="97790" cy="97790"/>
-            </a:xfrm>
-            <a:custGeom>
-              <a:avLst/>
-              <a:gdLst/>
-              <a:ahLst/>
-              <a:cxnLst/>
-              <a:rect l="l" t="t" r="r" b="b"/>
-              <a:pathLst>
-                <a:path w="97790" h="97790">
-                  <a:moveTo>
-                    <a:pt x="24384" y="74549"/>
-                  </a:moveTo>
-                  <a:lnTo>
-                    <a:pt x="22987" y="73152"/>
-                  </a:lnTo>
-                  <a:lnTo>
-                    <a:pt x="21209" y="73152"/>
-                  </a:lnTo>
-                  <a:lnTo>
-                    <a:pt x="1397" y="73152"/>
-                  </a:lnTo>
-                  <a:lnTo>
-                    <a:pt x="0" y="74549"/>
-                  </a:lnTo>
-                  <a:lnTo>
-                    <a:pt x="0" y="96139"/>
-                  </a:lnTo>
-                  <a:lnTo>
-                    <a:pt x="1397" y="97536"/>
-                  </a:lnTo>
-                  <a:lnTo>
-                    <a:pt x="22987" y="97536"/>
-                  </a:lnTo>
-                  <a:lnTo>
-                    <a:pt x="24384" y="96139"/>
-                  </a:lnTo>
-                  <a:lnTo>
-                    <a:pt x="24384" y="74549"/>
-                  </a:lnTo>
-                  <a:close/>
-                </a:path>
-                <a:path w="97790" h="97790">
-                  <a:moveTo>
-                    <a:pt x="24384" y="37973"/>
-                  </a:moveTo>
-                  <a:lnTo>
-                    <a:pt x="22987" y="36576"/>
-                  </a:lnTo>
-                  <a:lnTo>
-                    <a:pt x="21209" y="36576"/>
-                  </a:lnTo>
-                  <a:lnTo>
-                    <a:pt x="1397" y="36576"/>
-                  </a:lnTo>
-                  <a:lnTo>
-                    <a:pt x="0" y="37973"/>
-                  </a:lnTo>
-                  <a:lnTo>
-                    <a:pt x="0" y="59563"/>
-                  </a:lnTo>
-                  <a:lnTo>
-                    <a:pt x="1397" y="60960"/>
-                  </a:lnTo>
-                  <a:lnTo>
-                    <a:pt x="22987" y="60960"/>
-                  </a:lnTo>
-                  <a:lnTo>
-                    <a:pt x="24384" y="59563"/>
-                  </a:lnTo>
-                  <a:lnTo>
-                    <a:pt x="24384" y="37973"/>
-                  </a:lnTo>
-                  <a:close/>
-                </a:path>
-                <a:path w="97790" h="97790">
-                  <a:moveTo>
-                    <a:pt x="24384" y="1397"/>
-                  </a:moveTo>
-                  <a:lnTo>
-                    <a:pt x="22987" y="0"/>
-                  </a:lnTo>
-                  <a:lnTo>
-                    <a:pt x="21209" y="0"/>
-                  </a:lnTo>
-                  <a:lnTo>
-                    <a:pt x="1397" y="0"/>
-                  </a:lnTo>
-                  <a:lnTo>
-                    <a:pt x="0" y="1397"/>
-                  </a:lnTo>
-                  <a:lnTo>
-                    <a:pt x="0" y="23114"/>
-                  </a:lnTo>
-                  <a:lnTo>
-                    <a:pt x="1397" y="24384"/>
-                  </a:lnTo>
-                  <a:lnTo>
-                    <a:pt x="22987" y="24384"/>
-                  </a:lnTo>
-                  <a:lnTo>
-                    <a:pt x="24384" y="23114"/>
-                  </a:lnTo>
-                  <a:lnTo>
-                    <a:pt x="24384" y="1397"/>
-                  </a:lnTo>
-                  <a:close/>
-                </a:path>
-                <a:path w="97790" h="97790">
-                  <a:moveTo>
-                    <a:pt x="60960" y="74549"/>
-                  </a:moveTo>
-                  <a:lnTo>
-                    <a:pt x="59563" y="73152"/>
-                  </a:lnTo>
-                  <a:lnTo>
-                    <a:pt x="57912" y="73152"/>
-                  </a:lnTo>
-                  <a:lnTo>
-                    <a:pt x="37973" y="73152"/>
-                  </a:lnTo>
-                  <a:lnTo>
-                    <a:pt x="36576" y="74549"/>
-                  </a:lnTo>
-                  <a:lnTo>
-                    <a:pt x="36576" y="96139"/>
-                  </a:lnTo>
-                  <a:lnTo>
-                    <a:pt x="37973" y="97536"/>
-                  </a:lnTo>
-                  <a:lnTo>
-                    <a:pt x="59563" y="97536"/>
-                  </a:lnTo>
-                  <a:lnTo>
-                    <a:pt x="60960" y="96139"/>
-                  </a:lnTo>
-                  <a:lnTo>
-                    <a:pt x="60960" y="74549"/>
-                  </a:lnTo>
-                  <a:close/>
-                </a:path>
-                <a:path w="97790" h="97790">
-                  <a:moveTo>
-                    <a:pt x="60960" y="37973"/>
-                  </a:moveTo>
-                  <a:lnTo>
-                    <a:pt x="59563" y="36576"/>
-                  </a:lnTo>
-                  <a:lnTo>
-                    <a:pt x="57912" y="36576"/>
-                  </a:lnTo>
-                  <a:lnTo>
-                    <a:pt x="37973" y="36576"/>
-                  </a:lnTo>
-                  <a:lnTo>
-                    <a:pt x="36576" y="37973"/>
-                  </a:lnTo>
-                  <a:lnTo>
-                    <a:pt x="36576" y="59563"/>
-                  </a:lnTo>
-                  <a:lnTo>
-                    <a:pt x="37973" y="60960"/>
-                  </a:lnTo>
-                  <a:lnTo>
-                    <a:pt x="59563" y="60960"/>
-                  </a:lnTo>
-                  <a:lnTo>
-                    <a:pt x="60960" y="59563"/>
-                  </a:lnTo>
-                  <a:lnTo>
-                    <a:pt x="60960" y="37973"/>
-                  </a:lnTo>
-                  <a:close/>
-                </a:path>
-                <a:path w="97790" h="97790">
-                  <a:moveTo>
-                    <a:pt x="60960" y="1397"/>
-                  </a:moveTo>
-                  <a:lnTo>
-                    <a:pt x="59563" y="0"/>
-                  </a:lnTo>
-                  <a:lnTo>
-                    <a:pt x="57912" y="0"/>
-                  </a:lnTo>
-                  <a:lnTo>
-                    <a:pt x="37973" y="0"/>
-                  </a:lnTo>
-                  <a:lnTo>
-                    <a:pt x="36576" y="1397"/>
-                  </a:lnTo>
-                  <a:lnTo>
-                    <a:pt x="36576" y="23114"/>
-                  </a:lnTo>
-                  <a:lnTo>
-                    <a:pt x="37973" y="24384"/>
-                  </a:lnTo>
-                  <a:lnTo>
-                    <a:pt x="59563" y="24384"/>
-                  </a:lnTo>
-                  <a:lnTo>
-                    <a:pt x="60960" y="23114"/>
-                  </a:lnTo>
-                  <a:lnTo>
-                    <a:pt x="60960" y="1397"/>
-                  </a:lnTo>
-                  <a:close/>
-                </a:path>
-                <a:path w="97790" h="97790">
-                  <a:moveTo>
-                    <a:pt x="97536" y="74549"/>
-                  </a:moveTo>
-                  <a:lnTo>
-                    <a:pt x="96139" y="73152"/>
-                  </a:lnTo>
-                  <a:lnTo>
-                    <a:pt x="94488" y="73152"/>
-                  </a:lnTo>
-                  <a:lnTo>
-                    <a:pt x="74422" y="73152"/>
-                  </a:lnTo>
-                  <a:lnTo>
-                    <a:pt x="73152" y="74549"/>
-                  </a:lnTo>
-                  <a:lnTo>
-                    <a:pt x="73152" y="96139"/>
-                  </a:lnTo>
-                  <a:lnTo>
-                    <a:pt x="74422" y="97536"/>
-                  </a:lnTo>
-                  <a:lnTo>
-                    <a:pt x="96139" y="97536"/>
-                  </a:lnTo>
-                  <a:lnTo>
-                    <a:pt x="97536" y="96139"/>
-                  </a:lnTo>
-                  <a:lnTo>
-                    <a:pt x="97536" y="74549"/>
-                  </a:lnTo>
-                  <a:close/>
-                </a:path>
-                <a:path w="97790" h="97790">
-                  <a:moveTo>
-                    <a:pt x="97536" y="37973"/>
-                  </a:moveTo>
-                  <a:lnTo>
-                    <a:pt x="96139" y="36576"/>
-                  </a:lnTo>
-                  <a:lnTo>
-                    <a:pt x="94488" y="36576"/>
-                  </a:lnTo>
-                  <a:lnTo>
-                    <a:pt x="74422" y="36576"/>
-                  </a:lnTo>
-                  <a:lnTo>
-                    <a:pt x="73152" y="37973"/>
-                  </a:lnTo>
-                  <a:lnTo>
-                    <a:pt x="73152" y="59563"/>
-                  </a:lnTo>
-                  <a:lnTo>
-                    <a:pt x="74422" y="60960"/>
-                  </a:lnTo>
-                  <a:lnTo>
-                    <a:pt x="96139" y="60960"/>
-                  </a:lnTo>
-                  <a:lnTo>
-                    <a:pt x="97536" y="59563"/>
-                  </a:lnTo>
-                  <a:lnTo>
-                    <a:pt x="97536" y="37973"/>
-                  </a:lnTo>
-                  <a:close/>
-                </a:path>
-                <a:path w="97790" h="97790">
-                  <a:moveTo>
-                    <a:pt x="97536" y="1397"/>
-                  </a:moveTo>
-                  <a:lnTo>
-                    <a:pt x="96139" y="0"/>
-                  </a:lnTo>
-                  <a:lnTo>
-                    <a:pt x="94488" y="0"/>
-                  </a:lnTo>
-                  <a:lnTo>
-                    <a:pt x="74422" y="0"/>
-                  </a:lnTo>
-                  <a:lnTo>
-                    <a:pt x="73152" y="1397"/>
-                  </a:lnTo>
-                  <a:lnTo>
-                    <a:pt x="73152" y="23114"/>
-                  </a:lnTo>
-                  <a:lnTo>
-                    <a:pt x="74422" y="24384"/>
-                  </a:lnTo>
-                  <a:lnTo>
-                    <a:pt x="96139" y="24384"/>
-                  </a:lnTo>
-                  <a:lnTo>
-                    <a:pt x="97536" y="23114"/>
-                  </a:lnTo>
-                  <a:lnTo>
-                    <a:pt x="97536" y="1397"/>
-                  </a:lnTo>
-                  <a:close/>
-                </a:path>
-              </a:pathLst>
-            </a:custGeom>
-            <a:solidFill>
-              <a:srgbClr val="7E7E7E"/>
-            </a:solidFill>
-          </p:spPr>
-          <p:txBody>
-            <a:bodyPr wrap="square" lIns="0" tIns="0" rIns="0" bIns="0" rtlCol="0"/>
-            <a:lstStyle/>
-            <a:p/>
-          </p:txBody>
-        </p:sp>
         <p:pic>
           <p:nvPicPr>
             <p:cNvPr id="26" name="object 26"/>
@@ -11115,91 +6130,53 @@
             </a:prstGeom>
           </p:spPr>
         </p:pic>
-        <p:sp>
-          <p:nvSpPr>
-            <p:cNvPr id="27" name="object 27"/>
-            <p:cNvSpPr/>
-            <p:nvPr/>
-          </p:nvSpPr>
-          <p:spPr>
-            <a:xfrm>
-              <a:off x="7187183" y="1225295"/>
-              <a:ext cx="60960" cy="60960"/>
-            </a:xfrm>
-            <a:custGeom>
-              <a:avLst/>
-              <a:gdLst/>
-              <a:ahLst/>
-              <a:cxnLst/>
-              <a:rect l="l" t="t" r="r" b="b"/>
-              <a:pathLst>
-                <a:path w="60959" h="60959">
-                  <a:moveTo>
-                    <a:pt x="30480" y="0"/>
-                  </a:moveTo>
-                  <a:lnTo>
-                    <a:pt x="18591" y="2387"/>
-                  </a:lnTo>
-                  <a:lnTo>
-                    <a:pt x="8905" y="8905"/>
-                  </a:lnTo>
-                  <a:lnTo>
-                    <a:pt x="2387" y="18591"/>
-                  </a:lnTo>
-                  <a:lnTo>
-                    <a:pt x="0" y="30479"/>
-                  </a:lnTo>
-                  <a:lnTo>
-                    <a:pt x="2387" y="42368"/>
-                  </a:lnTo>
-                  <a:lnTo>
-                    <a:pt x="8905" y="52054"/>
-                  </a:lnTo>
-                  <a:lnTo>
-                    <a:pt x="18591" y="58572"/>
-                  </a:lnTo>
-                  <a:lnTo>
-                    <a:pt x="30480" y="60959"/>
-                  </a:lnTo>
-                  <a:lnTo>
-                    <a:pt x="42368" y="58572"/>
-                  </a:lnTo>
-                  <a:lnTo>
-                    <a:pt x="52054" y="52054"/>
-                  </a:lnTo>
-                  <a:lnTo>
-                    <a:pt x="58572" y="42368"/>
-                  </a:lnTo>
-                  <a:lnTo>
-                    <a:pt x="60960" y="30479"/>
-                  </a:lnTo>
-                  <a:lnTo>
-                    <a:pt x="58572" y="18591"/>
-                  </a:lnTo>
-                  <a:lnTo>
-                    <a:pt x="52054" y="8905"/>
-                  </a:lnTo>
-                  <a:lnTo>
-                    <a:pt x="42368" y="2387"/>
-                  </a:lnTo>
-                  <a:lnTo>
-                    <a:pt x="30480" y="0"/>
-                  </a:lnTo>
-                  <a:close/>
-                </a:path>
-              </a:pathLst>
-            </a:custGeom>
+      </p:grpSp>
+      <p:sp>
+        <p:nvSpPr>
+          <p:cNvPr id="28" name="object 28"/>
+          <p:cNvSpPr txBox="1"/>
+          <p:nvPr/>
+        </p:nvSpPr>
+        <p:spPr>
+          <a:xfrm>
+            <a:off x="7534656" y="1395983"/>
+            <a:ext cx="3203575" cy="128270"/>
+          </a:xfrm>
+          <a:prstGeom prst="rect">
+            <a:avLst/>
+          </a:prstGeom>
+          <a:ln w="24384">
             <a:solidFill>
-              <a:srgbClr val="520977"/>
+              <a:srgbClr val="B3B3B3"/>
             </a:solidFill>
-          </p:spPr>
-          <p:txBody>
-            <a:bodyPr wrap="square" lIns="0" tIns="0" rIns="0" bIns="0" rtlCol="0"/>
-            <a:lstStyle/>
-            <a:p/>
-          </p:txBody>
-        </p:sp>
-      </p:grpSp>
+          </a:ln>
+        </p:spPr>
+        <p:txBody>
+          <a:bodyPr wrap="square" lIns="0" tIns="0" rIns="0" bIns="0" rtlCol="0" vert="horz">
+            <a:spAutoFit/>
+          </a:bodyPr>
+          <a:lstStyle/>
+          <a:p>
+            <a:pPr marL="208915">
+              <a:lnSpc>
+                <a:spcPts val="1010"/>
+              </a:lnSpc>
+            </a:pPr>
+            <a:r>
+              <a:rPr dirty="0" sz="1000" spc="-10">
+                <a:latin typeface="Montserrat"/>
+                <a:cs typeface="Microsoft Sans Serif"/>
+                <a:hlinkClick r:id="rId5"/>
+              </a:rPr>
+              <a:t>www.lider.com</a:t>
+            </a:r>
+            <a:endParaRPr sz="1000">
+              <a:latin typeface="Microsoft Sans Serif"/>
+              <a:cs typeface="Microsoft Sans Serif"/>
+            </a:endParaRPr>
+          </a:p>
+        </p:txBody>
+      </p:sp>
       <p:pic>
         <p:nvPicPr>
           <p:cNvPr id="29" name="object 29"/>
@@ -11233,10 +6210,13 @@
           </p:nvPr>
         </p:nvSpPr>
         <p:spPr>
+          <a:xfrm>
+            <a:ext cx="548640" cy="0"/>
+          </a:xfrm>
           <a:prstGeom prst="rect"/>
         </p:spPr>
         <p:txBody>
-          <a:bodyPr wrap="square" lIns="0" tIns="45415" rIns="0" bIns="0" rtlCol="0" vert="horz">
+          <a:bodyPr wrap="none" lIns="0" tIns="45415" rIns="0" bIns="0" rtlCol="0" vert="horz">
             <a:spAutoFit/>
           </a:bodyPr>
           <a:lstStyle/>
@@ -11313,224 +6293,16 @@
           </a:p>
         </p:txBody>
       </p:sp>
-      <p:pic>
-        <p:nvPicPr>
-          <p:cNvPr id="32" name="Picture 31" descr="02-kanban-board.png"/>
-          <p:cNvPicPr>
-            <a:picLocks noChangeAspect="1"/>
-          </p:cNvPicPr>
-          <p:nvPr/>
-        </p:nvPicPr>
-        <p:blipFill>
-          <a:blip r:embed="rId9"/>
-          <a:stretch>
-            <a:fillRect/>
-          </a:stretch>
-        </p:blipFill>
-        <p:spPr>
-          <a:xfrm>
-            <a:off x="1524304" y="1481328"/>
-            <a:ext cx="3525926" cy="2203704"/>
-          </a:xfrm>
-          <a:prstGeom prst="rect">
-            <a:avLst/>
-          </a:prstGeom>
-        </p:spPr>
-      </p:pic>
-      <p:pic>
-        <p:nvPicPr>
-          <p:cNvPr id="33" name="Picture 32" descr="11-integration.png"/>
-          <p:cNvPicPr>
-            <a:picLocks noChangeAspect="1"/>
-          </p:cNvPicPr>
-          <p:nvPr/>
-        </p:nvPicPr>
-        <p:blipFill>
-          <a:blip r:embed="rId10"/>
-          <a:stretch>
-            <a:fillRect/>
-          </a:stretch>
-        </p:blipFill>
-        <p:spPr>
-          <a:xfrm>
-            <a:off x="7166152" y="1481328"/>
-            <a:ext cx="3525926" cy="2203704"/>
-          </a:xfrm>
-          <a:prstGeom prst="rect">
-            <a:avLst/>
-          </a:prstGeom>
-        </p:spPr>
-      </p:pic>
-      <p:sp>
-        <p:nvSpPr>
-          <p:cNvPr id="34" name="TextBox 33"/>
-          <p:cNvSpPr txBox="1"/>
-          <p:nvPr/>
-        </p:nvSpPr>
-        <p:spPr>
-          <a:xfrm>
-            <a:off x="1188720" y="3803904"/>
-            <a:ext cx="4389120" cy="1463040"/>
-          </a:xfrm>
-          <a:prstGeom prst="rect">
-            <a:avLst/>
-          </a:prstGeom>
-          <a:noFill/>
-        </p:spPr>
-        <p:txBody>
-          <a:bodyPr wrap="square">
-            <a:spAutoFit/>
-          </a:bodyPr>
-          <a:lstStyle/>
-          <a:p>
-            <a:pPr algn="l">
-              <a:lnSpc>
-                <a:spcPct val="112000"/>
-              </a:lnSpc>
-              <a:spcAft>
-                <a:spcPts val="400"/>
-              </a:spcAft>
-            </a:pPr>
-            <a:r>
-              <a:rPr sz="1300" b="1">
-                <a:solidFill>
-                  <a:srgbClr val="520978"/>
-                </a:solidFill>
-                <a:latin typeface="Montserrat"/>
-              </a:rPr>
-              <a:t>Kanban-доска</a:t>
-            </a:r>
-          </a:p>
-          <a:p>
-            <a:pPr algn="l">
-              <a:lnSpc>
-                <a:spcPct val="112000"/>
-              </a:lnSpc>
-              <a:spcAft>
-                <a:spcPts val="300"/>
-              </a:spcAft>
-            </a:pPr>
-            <a:r>
-              <a:rPr sz="1050" b="0">
-                <a:solidFill>
-                  <a:srgbClr val="1C1D22"/>
-                </a:solidFill>
-                <a:latin typeface="Montserrat"/>
-              </a:rPr>
-              <a:t>Портфель взаимодействий с фильтрами по вузу и продукту, переключением B2B/B2C и перемещением карточек по этапам.</a:t>
-            </a:r>
-          </a:p>
-          <a:p>
-            <a:pPr algn="l">
-              <a:lnSpc>
-                <a:spcPct val="112000"/>
-              </a:lnSpc>
-              <a:spcAft>
-                <a:spcPts val="0"/>
-              </a:spcAft>
-            </a:pPr>
-            <a:r>
-              <a:rPr sz="1050" b="1">
-                <a:solidFill>
-                  <a:srgbClr val="FF0053"/>
-                </a:solidFill>
-                <a:latin typeface="Montserrat"/>
-              </a:rPr>
-              <a:t>Демо: https://crm-rtk.pixel-minds.ru</a:t>
-            </a:r>
-          </a:p>
-        </p:txBody>
-      </p:sp>
-      <p:sp>
-        <p:nvSpPr>
-          <p:cNvPr id="35" name="TextBox 34"/>
-          <p:cNvSpPr txBox="1"/>
-          <p:nvPr/>
-        </p:nvSpPr>
-        <p:spPr>
-          <a:xfrm>
-            <a:off x="6830568" y="3803904"/>
-            <a:ext cx="4389120" cy="1463040"/>
-          </a:xfrm>
-          <a:prstGeom prst="rect">
-            <a:avLst/>
-          </a:prstGeom>
-          <a:noFill/>
-        </p:spPr>
-        <p:txBody>
-          <a:bodyPr wrap="square">
-            <a:spAutoFit/>
-          </a:bodyPr>
-          <a:lstStyle/>
-          <a:p>
-            <a:pPr algn="l">
-              <a:lnSpc>
-                <a:spcPct val="112000"/>
-              </a:lnSpc>
-              <a:spcAft>
-                <a:spcPts val="400"/>
-              </a:spcAft>
-            </a:pPr>
-            <a:r>
-              <a:rPr sz="1300" b="1">
-                <a:solidFill>
-                  <a:srgbClr val="520978"/>
-                </a:solidFill>
-                <a:latin typeface="Montserrat"/>
-              </a:rPr>
-              <a:t>Интеграция с LMS и CMS</a:t>
-            </a:r>
-          </a:p>
-          <a:p>
-            <a:pPr algn="l">
-              <a:lnSpc>
-                <a:spcPct val="112000"/>
-              </a:lnSpc>
-              <a:spcAft>
-                <a:spcPts val="300"/>
-              </a:spcAft>
-            </a:pPr>
-            <a:r>
-              <a:rPr sz="1050" b="0">
-                <a:solidFill>
-                  <a:srgbClr val="1C1D22"/>
-                </a:solidFill>
-                <a:latin typeface="Montserrat"/>
-              </a:rPr>
-              <a:t>Контракт обмена, предпросмотр пакета без записи (dry-run) и идемпотентный импорт по номеру договора. Отчёты выгружаются в XLSX, XLS, PDF и JSON.</a:t>
-            </a:r>
-          </a:p>
-          <a:p>
-            <a:pPr algn="l">
-              <a:lnSpc>
-                <a:spcPct val="112000"/>
-              </a:lnSpc>
-              <a:spcAft>
-                <a:spcPts val="0"/>
-              </a:spcAft>
-            </a:pPr>
-            <a:r>
-              <a:rPr sz="1050" b="1">
-                <a:solidFill>
-                  <a:srgbClr val="FF0053"/>
-                </a:solidFill>
-                <a:latin typeface="Montserrat"/>
-              </a:rPr>
-              <a:t>API: https://crm-rtk.pixel-minds.ru/api</a:t>
-            </a:r>
-          </a:p>
-        </p:txBody>
-      </p:sp>
-      <p:sp>
-        <p:nvSpPr>
-          <p:cNvPr id="36" name="Rounded Rectangle 35"/>
+      <p:sp>
+        <p:nvSpPr>
+          <p:cNvPr id="32" name="Rounded Rectangle 31"/>
           <p:cNvSpPr/>
           <p:nvPr/>
         </p:nvSpPr>
         <p:spPr>
           <a:xfrm>
-            <a:off x="347472" y="5230368"/>
-            <a:ext cx="9052560" cy="1143000"/>
+            <a:off x="502920" y="1371600"/>
+            <a:ext cx="5632704" cy="3520440"/>
           </a:xfrm>
           <a:prstGeom prst="roundRect">
             <a:avLst>
@@ -11567,16 +6339,40 @@
           </a:p>
         </p:txBody>
       </p:sp>
-      <p:sp>
-        <p:nvSpPr>
-          <p:cNvPr id="37" name="TextBox 36"/>
+      <p:pic>
+        <p:nvPicPr>
+          <p:cNvPr id="33" name="Picture 32" descr="02-kanban-board.png"/>
+          <p:cNvPicPr>
+            <a:picLocks noChangeAspect="1"/>
+          </p:cNvPicPr>
+          <p:nvPr/>
+        </p:nvPicPr>
+        <p:blipFill>
+          <a:blip r:embed="rId9"/>
+          <a:stretch>
+            <a:fillRect/>
+          </a:stretch>
+        </p:blipFill>
+        <p:spPr>
+          <a:xfrm>
+            <a:off x="1600199" y="1554480"/>
+            <a:ext cx="3438144" cy="2148840"/>
+          </a:xfrm>
+          <a:prstGeom prst="rect">
+            <a:avLst/>
+          </a:prstGeom>
+        </p:spPr>
+      </p:pic>
+      <p:sp>
+        <p:nvSpPr>
+          <p:cNvPr id="34" name="TextBox 33"/>
           <p:cNvSpPr txBox="1"/>
           <p:nvPr/>
         </p:nvSpPr>
         <p:spPr>
           <a:xfrm>
-            <a:off x="566928" y="5367528"/>
-            <a:ext cx="8595360" cy="914400"/>
+            <a:off x="731520" y="3730752"/>
+            <a:ext cx="5175504" cy="822960"/>
           </a:xfrm>
           <a:prstGeom prst="rect">
             <a:avLst/>
@@ -11598,18 +6394,37 @@
               </a:spcAft>
             </a:pPr>
             <a:r>
-              <a:rPr sz="1200" b="1">
+              <a:rPr sz="1250" b="1">
                 <a:solidFill>
                   <a:srgbClr val="520978"/>
                 </a:solidFill>
                 <a:latin typeface="Montserrat"/>
               </a:rPr>
-              <a:t>Нагрузочный прогон (локально)</a:t>
+              <a:t>Kanban-доска</a:t>
             </a:r>
           </a:p>
           <a:p>
             <a:pPr algn="l">
               <a:lnSpc>
+                <a:spcPct val="118000"/>
+              </a:lnSpc>
+              <a:spcAft>
+                <a:spcPts val="300"/>
+              </a:spcAft>
+            </a:pPr>
+            <a:r>
+              <a:rPr sz="1050" b="0">
+                <a:solidFill>
+                  <a:srgbClr val="1C1D22"/>
+                </a:solidFill>
+                <a:latin typeface="Montserrat"/>
+              </a:rPr>
+              <a:t>Портфель взаимодействий с фильтрами по вузу и продукту, переключением B2B/B2C и перемещением карточек по этапам.</a:t>
+            </a:r>
+          </a:p>
+          <a:p>
+            <a:pPr algn="l">
+              <a:lnSpc>
                 <a:spcPct val="112000"/>
               </a:lnSpc>
               <a:spcAft>
@@ -11617,27 +6432,97 @@
               </a:spcAft>
             </a:pPr>
             <a:r>
-              <a:rPr sz="1000" b="0">
-                <a:solidFill>
-                  <a:srgbClr val="6B5B78"/>
-                </a:solidFill>
-                <a:latin typeface="Montserrat"/>
-              </a:rPr>
-              <a:t>50 пользователей / 60 с: 1613 запросов, 0 ошибок, p95 — 93 мс. Смешанный read/write: 4673 запроса, 0 ошибок; экспорт PDF — 210 мс. Не является SLA production.</a:t>
-            </a:r>
-          </a:p>
-        </p:txBody>
-      </p:sp>
-      <p:sp>
-        <p:nvSpPr>
-          <p:cNvPr id="38" name="TextBox 37"/>
+              <a:rPr sz="1050" b="1">
+                <a:solidFill>
+                  <a:srgbClr val="FF0053"/>
+                </a:solidFill>
+                <a:latin typeface="Montserrat"/>
+              </a:rPr>
+              <a:t>Демо: https://crm-rtk.pixel-minds.ru</a:t>
+            </a:r>
+          </a:p>
+        </p:txBody>
+      </p:sp>
+      <p:sp>
+        <p:nvSpPr>
+          <p:cNvPr id="35" name="Rounded Rectangle 34"/>
+          <p:cNvSpPr/>
+          <p:nvPr/>
+        </p:nvSpPr>
+        <p:spPr>
+          <a:xfrm>
+            <a:off x="6172200" y="1371600"/>
+            <a:ext cx="5632704" cy="3520440"/>
+          </a:xfrm>
+          <a:prstGeom prst="roundRect">
+            <a:avLst>
+              <a:gd name="adj" fmla="val 6000"/>
+            </a:avLst>
+          </a:prstGeom>
+          <a:solidFill>
+            <a:srgbClr val="F7F4FA"/>
+          </a:solidFill>
+          <a:ln>
+            <a:noFill/>
+          </a:ln>
+          <a:effectLst/>
+        </p:spPr>
+        <p:style>
+          <a:lnRef idx="1">
+            <a:schemeClr val="accent1"/>
+          </a:lnRef>
+          <a:fillRef idx="3">
+            <a:schemeClr val="accent1"/>
+          </a:fillRef>
+          <a:effectRef idx="2">
+            <a:schemeClr val="accent1"/>
+          </a:effectRef>
+          <a:fontRef idx="minor">
+            <a:schemeClr val="lt1"/>
+          </a:fontRef>
+        </p:style>
+        <p:txBody>
+          <a:bodyPr rtlCol="0" anchor="ctr"/>
+          <a:lstStyle/>
+          <a:p>
+            <a:pPr algn="ctr"/>
+          </a:p>
+        </p:txBody>
+      </p:sp>
+      <p:pic>
+        <p:nvPicPr>
+          <p:cNvPr id="36" name="Picture 35" descr="11-integration.png"/>
+          <p:cNvPicPr>
+            <a:picLocks noChangeAspect="1"/>
+          </p:cNvPicPr>
+          <p:nvPr/>
+        </p:nvPicPr>
+        <p:blipFill>
+          <a:blip r:embed="rId10"/>
+          <a:stretch>
+            <a:fillRect/>
+          </a:stretch>
+        </p:blipFill>
+        <p:spPr>
+          <a:xfrm>
+            <a:off x="7269480" y="1554480"/>
+            <a:ext cx="3438144" cy="2148840"/>
+          </a:xfrm>
+          <a:prstGeom prst="rect">
+            <a:avLst/>
+          </a:prstGeom>
+        </p:spPr>
+      </p:pic>
+      <p:sp>
+        <p:nvSpPr>
+          <p:cNvPr id="37" name="TextBox 36"/>
           <p:cNvSpPr txBox="1"/>
           <p:nvPr/>
         </p:nvSpPr>
         <p:spPr>
           <a:xfrm>
-            <a:off x="9555480" y="5138928"/>
-            <a:ext cx="2286000" cy="292608"/>
+            <a:off x="6400800" y="3730752"/>
+            <a:ext cx="5175504" cy="822960"/>
           </a:xfrm>
           <a:prstGeom prst="rect">
             <a:avLst/>
@@ -11650,6 +6535,193 @@
           </a:bodyPr>
           <a:lstStyle/>
           <a:p>
+            <a:pPr algn="l">
+              <a:lnSpc>
+                <a:spcPct val="112000"/>
+              </a:lnSpc>
+              <a:spcAft>
+                <a:spcPts val="300"/>
+              </a:spcAft>
+            </a:pPr>
+            <a:r>
+              <a:rPr sz="1250" b="1">
+                <a:solidFill>
+                  <a:srgbClr val="520978"/>
+                </a:solidFill>
+                <a:latin typeface="Montserrat"/>
+              </a:rPr>
+              <a:t>Интеграция с LMS и CMS</a:t>
+            </a:r>
+          </a:p>
+          <a:p>
+            <a:pPr algn="l">
+              <a:lnSpc>
+                <a:spcPct val="118000"/>
+              </a:lnSpc>
+              <a:spcAft>
+                <a:spcPts val="300"/>
+              </a:spcAft>
+            </a:pPr>
+            <a:r>
+              <a:rPr sz="1050" b="0">
+                <a:solidFill>
+                  <a:srgbClr val="1C1D22"/>
+                </a:solidFill>
+                <a:latin typeface="Montserrat"/>
+              </a:rPr>
+              <a:t>Контракт обмена, предпросмотр пакета без записи (dry-run) и идемпотентный импорт по номеру договора. Отчёты выгружаются в XLSX, XLS, PDF и JSON.</a:t>
+            </a:r>
+          </a:p>
+          <a:p>
+            <a:pPr algn="l">
+              <a:lnSpc>
+                <a:spcPct val="112000"/>
+              </a:lnSpc>
+              <a:spcAft>
+                <a:spcPts val="0"/>
+              </a:spcAft>
+            </a:pPr>
+            <a:r>
+              <a:rPr sz="1050" b="1">
+                <a:solidFill>
+                  <a:srgbClr val="FF0053"/>
+                </a:solidFill>
+                <a:latin typeface="Montserrat"/>
+              </a:rPr>
+              <a:t>API: https://crm-rtk.pixel-minds.ru/api</a:t>
+            </a:r>
+          </a:p>
+        </p:txBody>
+      </p:sp>
+      <p:sp>
+        <p:nvSpPr>
+          <p:cNvPr id="38" name="Rounded Rectangle 37"/>
+          <p:cNvSpPr/>
+          <p:nvPr/>
+        </p:nvSpPr>
+        <p:spPr>
+          <a:xfrm>
+            <a:off x="502920" y="5074920"/>
+            <a:ext cx="8595360" cy="1234440"/>
+          </a:xfrm>
+          <a:prstGeom prst="roundRect">
+            <a:avLst>
+              <a:gd name="adj" fmla="val 6000"/>
+            </a:avLst>
+          </a:prstGeom>
+          <a:solidFill>
+            <a:srgbClr val="F7F4FA"/>
+          </a:solidFill>
+          <a:ln>
+            <a:noFill/>
+          </a:ln>
+          <a:effectLst/>
+        </p:spPr>
+        <p:style>
+          <a:lnRef idx="1">
+            <a:schemeClr val="accent1"/>
+          </a:lnRef>
+          <a:fillRef idx="3">
+            <a:schemeClr val="accent1"/>
+          </a:fillRef>
+          <a:effectRef idx="2">
+            <a:schemeClr val="accent1"/>
+          </a:effectRef>
+          <a:fontRef idx="minor">
+            <a:schemeClr val="lt1"/>
+          </a:fontRef>
+        </p:style>
+        <p:txBody>
+          <a:bodyPr rtlCol="0" anchor="ctr"/>
+          <a:lstStyle/>
+          <a:p>
+            <a:pPr algn="ctr"/>
+          </a:p>
+        </p:txBody>
+      </p:sp>
+      <p:sp>
+        <p:nvSpPr>
+          <p:cNvPr id="39" name="TextBox 38"/>
+          <p:cNvSpPr txBox="1"/>
+          <p:nvPr/>
+        </p:nvSpPr>
+        <p:spPr>
+          <a:xfrm>
+            <a:off x="777240" y="5239512"/>
+            <a:ext cx="8046720" cy="914400"/>
+          </a:xfrm>
+          <a:prstGeom prst="rect">
+            <a:avLst/>
+          </a:prstGeom>
+          <a:noFill/>
+        </p:spPr>
+        <p:txBody>
+          <a:bodyPr wrap="square">
+            <a:spAutoFit/>
+          </a:bodyPr>
+          <a:lstStyle/>
+          <a:p>
+            <a:pPr algn="l">
+              <a:lnSpc>
+                <a:spcPct val="112000"/>
+              </a:lnSpc>
+              <a:spcAft>
+                <a:spcPts val="400"/>
+              </a:spcAft>
+            </a:pPr>
+            <a:r>
+              <a:rPr sz="1250" b="1">
+                <a:solidFill>
+                  <a:srgbClr val="520978"/>
+                </a:solidFill>
+                <a:latin typeface="Montserrat"/>
+              </a:rPr>
+              <a:t>Нагрузочный прогон (локально)</a:t>
+            </a:r>
+          </a:p>
+          <a:p>
+            <a:pPr algn="l">
+              <a:lnSpc>
+                <a:spcPct val="120000"/>
+              </a:lnSpc>
+              <a:spcAft>
+                <a:spcPts val="0"/>
+              </a:spcAft>
+            </a:pPr>
+            <a:r>
+              <a:rPr sz="1050" b="0">
+                <a:solidFill>
+                  <a:srgbClr val="6B5B78"/>
+                </a:solidFill>
+                <a:latin typeface="Montserrat"/>
+              </a:rPr>
+              <a:t>50 пользователей / 60 с: 1613 запросов, 0 ошибок, p95 — 93 мс. Смешанный read/write: 4673 запроса, 0 ошибок; экспорт PDF — 210 мс. Не является SLA production.</a:t>
+            </a:r>
+          </a:p>
+        </p:txBody>
+      </p:sp>
+      <p:sp>
+        <p:nvSpPr>
+          <p:cNvPr id="40" name="TextBox 39"/>
+          <p:cNvSpPr txBox="1"/>
+          <p:nvPr/>
+        </p:nvSpPr>
+        <p:spPr>
+          <a:xfrm>
+            <a:off x="9418320" y="4892040"/>
+            <a:ext cx="2423160" cy="274320"/>
+          </a:xfrm>
+          <a:prstGeom prst="rect">
+            <a:avLst/>
+          </a:prstGeom>
+          <a:noFill/>
+        </p:spPr>
+        <p:txBody>
+          <a:bodyPr wrap="square">
+            <a:spAutoFit/>
+          </a:bodyPr>
+          <a:lstStyle/>
+          <a:p>
             <a:pPr algn="ctr">
               <a:lnSpc>
                 <a:spcPct val="112000"/>
@@ -11659,7 +6731,7 @@
               </a:spcAft>
             </a:pPr>
             <a:r>
-              <a:rPr sz="1000" b="1">
+              <a:rPr sz="1050" b="1">
                 <a:solidFill>
                   <a:srgbClr val="520978"/>
                 </a:solidFill>
@@ -11672,7 +6744,7 @@
       </p:sp>
       <p:pic>
         <p:nvPicPr>
-          <p:cNvPr id="39" name="Picture 38" descr="image.png"/>
+          <p:cNvPr id="41" name="Picture 40" descr="image.png"/>
           <p:cNvPicPr>
             <a:picLocks noChangeAspect="1"/>
           </p:cNvPicPr>
@@ -11686,8 +6758,8 @@
         </p:blipFill>
         <p:spPr>
           <a:xfrm>
-            <a:off x="9985248" y="5413248"/>
-            <a:ext cx="1325880" cy="1325880"/>
+            <a:off x="10058400" y="5212080"/>
+            <a:ext cx="1188720" cy="1188720"/>
           </a:xfrm>
           <a:prstGeom prst="rect">
             <a:avLst/>
@@ -11696,14 +6768,14 @@
       </p:pic>
       <p:sp>
         <p:nvSpPr>
-          <p:cNvPr id="40" name="TextBox 39"/>
+          <p:cNvPr id="42" name="TextBox 41"/>
           <p:cNvSpPr txBox="1"/>
           <p:nvPr/>
         </p:nvSpPr>
         <p:spPr>
           <a:xfrm>
-            <a:off x="347472" y="6446520"/>
-            <a:ext cx="9052560" cy="274320"/>
+            <a:off x="502920" y="6446520"/>
+            <a:ext cx="8595360" cy="274320"/>
           </a:xfrm>
           <a:prstGeom prst="rect">
             <a:avLst/>
@@ -11725,7 +6797,7 @@
               </a:spcAft>
             </a:pPr>
             <a:r>
-              <a:rPr sz="900" b="0">
+              <a:rPr sz="950" b="0">
                 <a:solidFill>
                   <a:srgbClr val="6B5B78"/>
                 </a:solidFill>
@@ -12226,7 +7298,7 @@
                 </a:solidFill>
                 <a:latin typeface="Montserrat"/>
               </a:rPr>
-              <a:t>Кол-во участников: 5 человек</a:t>
+              <a:t>Участников: 5</a:t>
             </a:r>
           </a:p>
           <a:p>
@@ -12264,7 +7336,7 @@
                 </a:solidFill>
                 <a:latin typeface="Montserrat"/>
               </a:rPr>
-              <a:t>Собрались на ЛЦТ 2026 вокруг задачи ИТ Школы.</a:t>
+              <a:t>Команда собралась на ЛЦТ 2026 вокруг задачи ИТ Школы.</a:t>
             </a:r>
           </a:p>
         </p:txBody>
@@ -12517,10 +7589,13 @@
           </p:nvPr>
         </p:nvSpPr>
         <p:spPr>
+          <a:xfrm>
+            <a:ext cx="548640" cy="0"/>
+          </a:xfrm>
           <a:prstGeom prst="rect"/>
         </p:spPr>
         <p:txBody>
-          <a:bodyPr wrap="square" lIns="0" tIns="43180" rIns="0" bIns="0" rtlCol="0" vert="horz">
+          <a:bodyPr wrap="none" lIns="0" tIns="43180" rIns="0" bIns="0" rtlCol="0" vert="horz">
             <a:spAutoFit/>
           </a:bodyPr>
           <a:lstStyle/>
@@ -12762,7 +7837,7 @@
           <a:p>
             <a:pPr marL="12700" algn="l">
               <a:lnSpc>
-                <a:spcPct val="112000"/>
+                <a:spcPct val="100000"/>
               </a:lnSpc>
               <a:spcBef>
                 <a:spcPts val="110"/>
@@ -12810,7 +7885,7 @@
           <a:p>
             <a:pPr marL="160655" indent="-147955" algn="l">
               <a:lnSpc>
-                <a:spcPct val="112000"/>
+                <a:spcPct val="105000"/>
               </a:lnSpc>
               <a:spcBef>
                 <a:spcPts val="100"/>
@@ -12843,7 +7918,7 @@
           <a:p>
             <a:pPr algn="l">
               <a:lnSpc>
-                <a:spcPct val="112000"/>
+                <a:spcPct val="105000"/>
               </a:lnSpc>
               <a:spcAft>
                 <a:spcPts val="0"/>
@@ -13127,7 +8202,7 @@
           <a:p>
             <a:pPr marL="12700" algn="l">
               <a:lnSpc>
-                <a:spcPct val="112000"/>
+                <a:spcPct val="100000"/>
               </a:lnSpc>
               <a:spcBef>
                 <a:spcPts val="110"/>
@@ -13307,7 +8382,7 @@
           <a:p>
             <a:pPr marL="12700" algn="l">
               <a:lnSpc>
-                <a:spcPct val="112000"/>
+                <a:spcPct val="100000"/>
               </a:lnSpc>
               <a:spcBef>
                 <a:spcPts val="110"/>
@@ -13355,7 +8430,7 @@
           <a:p>
             <a:pPr marL="160020" indent="-147320" algn="l">
               <a:lnSpc>
-                <a:spcPct val="112000"/>
+                <a:spcPct val="105000"/>
               </a:lnSpc>
               <a:spcBef>
                 <a:spcPts val="100"/>
@@ -13388,7 +8463,7 @@
           <a:p>
             <a:pPr algn="l">
               <a:lnSpc>
-                <a:spcPct val="112000"/>
+                <a:spcPct val="105000"/>
               </a:lnSpc>
               <a:spcAft>
                 <a:spcPts val="0"/>
@@ -13561,7 +8636,7 @@
           <a:p>
             <a:pPr marL="12700" algn="l">
               <a:lnSpc>
-                <a:spcPct val="112000"/>
+                <a:spcPct val="100000"/>
               </a:lnSpc>
               <a:spcBef>
                 <a:spcPts val="110"/>
@@ -13609,7 +8684,7 @@
           <a:p>
             <a:pPr marL="160020" indent="-147320" algn="l">
               <a:lnSpc>
-                <a:spcPct val="112000"/>
+                <a:spcPct val="105000"/>
               </a:lnSpc>
               <a:spcBef>
                 <a:spcPts val="100"/>
@@ -13642,7 +8717,7 @@
           <a:p>
             <a:pPr algn="l">
               <a:lnSpc>
-                <a:spcPct val="112000"/>
+                <a:spcPct val="105000"/>
               </a:lnSpc>
               <a:spcAft>
                 <a:spcPts val="0"/>
@@ -13815,7 +8890,7 @@
           <a:p>
             <a:pPr marL="12700" algn="l">
               <a:lnSpc>
-                <a:spcPct val="112000"/>
+                <a:spcPct val="100000"/>
               </a:lnSpc>
               <a:spcBef>
                 <a:spcPts val="110"/>
@@ -13863,7 +8938,7 @@
           <a:p>
             <a:pPr marL="160020" indent="-147320" algn="l">
               <a:lnSpc>
-                <a:spcPct val="112000"/>
+                <a:spcPct val="105000"/>
               </a:lnSpc>
               <a:spcBef>
                 <a:spcPts val="100"/>
@@ -13896,7 +8971,7 @@
           <a:p>
             <a:pPr algn="l">
               <a:lnSpc>
-                <a:spcPct val="112000"/>
+                <a:spcPct val="105000"/>
               </a:lnSpc>
               <a:spcAft>
                 <a:spcPts val="0"/>
@@ -13937,7 +9012,7 @@
           <a:p>
             <a:pPr marL="160020" indent="-147320" algn="l">
               <a:lnSpc>
-                <a:spcPct val="112000"/>
+                <a:spcPct val="105000"/>
               </a:lnSpc>
               <a:spcBef>
                 <a:spcPts val="100"/>
@@ -13970,7 +9045,7 @@
           <a:p>
             <a:pPr algn="l">
               <a:lnSpc>
-                <a:spcPct val="112000"/>
+                <a:spcPct val="105000"/>
               </a:lnSpc>
               <a:spcAft>
                 <a:spcPts val="0"/>
@@ -13999,10 +9074,13 @@
           </p:nvPr>
         </p:nvSpPr>
         <p:spPr>
+          <a:xfrm>
+            <a:ext cx="548640" cy="0"/>
+          </a:xfrm>
           <a:prstGeom prst="rect"/>
         </p:spPr>
         <p:txBody>
-          <a:bodyPr wrap="square" lIns="0" tIns="43180" rIns="0" bIns="0" rtlCol="0" vert="horz">
+          <a:bodyPr wrap="none" lIns="0" tIns="43180" rIns="0" bIns="0" rtlCol="0" vert="horz">
             <a:spAutoFit/>
           </a:bodyPr>
           <a:lstStyle/>

--- a/docs/presentation/RTK-CRM-LCT2026.pptx
+++ b/docs/presentation/RTK-CRM-LCT2026.pptx
@@ -3645,7 +3645,7 @@
                 </a:solidFill>
                 <a:latin typeface="Montserrat"/>
               </a:rPr>
-              <a:t>Браузерный smoke-тест сценариев · нагрузка Locust на стенде · резервное восстановление в CI · подтверждение контура хранения данных в РФ · перенос production после согласования.</a:t>
+              <a:t>Браузерный smoke-тест сценариев · нагрузка Locust на стенде · резервное восстановление в CI · подтверждение контура хранения данных в РФ · перевод в промышленную эксплуатацию после согласования.</a:t>
             </a:r>
           </a:p>
         </p:txBody>
@@ -6004,52 +6004,6 @@
           </p:spPr>
         </p:pic>
       </p:grpSp>
-      <p:sp>
-        <p:nvSpPr>
-          <p:cNvPr id="15" name="object 15"/>
-          <p:cNvSpPr txBox="1"/>
-          <p:nvPr/>
-        </p:nvSpPr>
-        <p:spPr>
-          <a:xfrm>
-            <a:off x="1889760" y="1395983"/>
-            <a:ext cx="3203575" cy="128270"/>
-          </a:xfrm>
-          <a:prstGeom prst="rect">
-            <a:avLst/>
-          </a:prstGeom>
-          <a:ln w="24383">
-            <a:solidFill>
-              <a:srgbClr val="B3B3B3"/>
-            </a:solidFill>
-          </a:ln>
-        </p:spPr>
-        <p:txBody>
-          <a:bodyPr wrap="square" lIns="0" tIns="0" rIns="0" bIns="0" rtlCol="0" vert="horz">
-            <a:spAutoFit/>
-          </a:bodyPr>
-          <a:lstStyle/>
-          <a:p>
-            <a:pPr marL="207645">
-              <a:lnSpc>
-                <a:spcPts val="1010"/>
-              </a:lnSpc>
-            </a:pPr>
-            <a:r>
-              <a:rPr dirty="0" sz="1000" spc="-10">
-                <a:latin typeface="Montserrat"/>
-                <a:cs typeface="Microsoft Sans Serif"/>
-                <a:hlinkClick r:id="rId5"/>
-              </a:rPr>
-              <a:t>www.lider.com</a:t>
-            </a:r>
-            <a:endParaRPr sz="1000">
-              <a:latin typeface="Microsoft Sans Serif"/>
-              <a:cs typeface="Microsoft Sans Serif"/>
-            </a:endParaRPr>
-          </a:p>
-        </p:txBody>
-      </p:sp>
       <p:grpSp>
         <p:nvGrpSpPr>
           <p:cNvPr id="16" name="object 16"/>
@@ -6131,52 +6085,6 @@
           </p:spPr>
         </p:pic>
       </p:grpSp>
-      <p:sp>
-        <p:nvSpPr>
-          <p:cNvPr id="28" name="object 28"/>
-          <p:cNvSpPr txBox="1"/>
-          <p:nvPr/>
-        </p:nvSpPr>
-        <p:spPr>
-          <a:xfrm>
-            <a:off x="7534656" y="1395983"/>
-            <a:ext cx="3203575" cy="128270"/>
-          </a:xfrm>
-          <a:prstGeom prst="rect">
-            <a:avLst/>
-          </a:prstGeom>
-          <a:ln w="24384">
-            <a:solidFill>
-              <a:srgbClr val="B3B3B3"/>
-            </a:solidFill>
-          </a:ln>
-        </p:spPr>
-        <p:txBody>
-          <a:bodyPr wrap="square" lIns="0" tIns="0" rIns="0" bIns="0" rtlCol="0" vert="horz">
-            <a:spAutoFit/>
-          </a:bodyPr>
-          <a:lstStyle/>
-          <a:p>
-            <a:pPr marL="208915">
-              <a:lnSpc>
-                <a:spcPts val="1010"/>
-              </a:lnSpc>
-            </a:pPr>
-            <a:r>
-              <a:rPr dirty="0" sz="1000" spc="-10">
-                <a:latin typeface="Montserrat"/>
-                <a:cs typeface="Microsoft Sans Serif"/>
-                <a:hlinkClick r:id="rId5"/>
-              </a:rPr>
-              <a:t>www.lider.com</a:t>
-            </a:r>
-            <a:endParaRPr sz="1000">
-              <a:latin typeface="Microsoft Sans Serif"/>
-              <a:cs typeface="Microsoft Sans Serif"/>
-            </a:endParaRPr>
-          </a:p>
-        </p:txBody>
-      </p:sp>
       <p:pic>
         <p:nvPicPr>
           <p:cNvPr id="29" name="object 29"/>
@@ -6695,7 +6603,7 @@
                 </a:solidFill>
                 <a:latin typeface="Montserrat"/>
               </a:rPr>
-              <a:t>50 пользователей / 60 с: 1613 запросов, 0 ошибок, p95 — 93 мс. Смешанный read/write: 4673 запроса, 0 ошибок; экспорт PDF — 210 мс. Не является SLA production.</a:t>
+              <a:t>50 пользователей / 60 с: 1613 запросов, 0 ошибок, p95 — 93 мс. Смешанный read/write: 4673 запроса, 0 ошибок; экспорт PDF — 210 мс. Показатели не являются гарантией SLA.</a:t>
             </a:r>
           </a:p>
         </p:txBody>
